--- a/output/part6.pptx
+++ b/output/part6.pptx
@@ -17,8 +17,8 @@
   <p:notesMasterIdLst>
     <p:notesMasterId r:id="rId10"/>
   </p:notesMasterIdLst>
-  <p:sldSz cx="12192000" cy="6858000"/>
-  <p:notesSz cx="6858000" cy="12192000"/>
+  <p:sldSz cx="9144000" cy="5029200"/>
+  <p:notesSz cx="5029200" cy="9144000"/>
   <p:defaultTextStyle>
     <a:lvl1pPr marL="0" algn="l" defTabSz="914400" rtl="0" eaLnBrk="1" latinLnBrk="0" hangingPunct="1">
       <a:defRPr sz="1800" kern="1200">

--- a/output/part6.pptx
+++ b/output/part6.pptx
@@ -4585,7 +4585,7 @@
         <p:spPr>
           <a:xfrm>
             <a:off x="3063240" y="1325880"/>
-            <a:ext cx="164592" cy="0"/>
+            <a:ext cx="164592" cy="9144"/>
           </a:xfrm>
           <a:prstGeom prst="line">
             <a:avLst/>
@@ -4648,7 +4648,7 @@
         <p:spPr>
           <a:xfrm>
             <a:off x="6035040" y="1325880"/>
-            <a:ext cx="164592" cy="0"/>
+            <a:ext cx="164592" cy="9144"/>
           </a:xfrm>
           <a:prstGeom prst="line">
             <a:avLst/>
@@ -5396,7 +5396,7 @@
         <p:spPr>
           <a:xfrm>
             <a:off x="4754880" y="987552"/>
-            <a:ext cx="4069080" cy="0"/>
+            <a:ext cx="4069080" cy="9144"/>
           </a:xfrm>
           <a:prstGeom prst="line">
             <a:avLst/>
@@ -7631,7 +7631,7 @@
         <p:spPr>
           <a:xfrm>
             <a:off x="2103120" y="1371600"/>
-            <a:ext cx="457200" cy="0"/>
+            <a:ext cx="457200" cy="9144"/>
           </a:xfrm>
           <a:prstGeom prst="line">
             <a:avLst/>
@@ -7876,7 +7876,7 @@
         <p:spPr>
           <a:xfrm>
             <a:off x="4206240" y="1344168"/>
-            <a:ext cx="411480" cy="0"/>
+            <a:ext cx="411480" cy="9144"/>
           </a:xfrm>
           <a:prstGeom prst="line">
             <a:avLst/>
@@ -8167,7 +8167,7 @@
         <p:spPr>
           <a:xfrm>
             <a:off x="3383280" y="2057400"/>
-            <a:ext cx="0" cy="256032"/>
+            <a:ext cx="9144" cy="256032"/>
           </a:xfrm>
           <a:prstGeom prst="line">
             <a:avLst/>
@@ -8191,7 +8191,7 @@
         <p:spPr>
           <a:xfrm>
             <a:off x="4206240" y="2743200"/>
-            <a:ext cx="457200" cy="0"/>
+            <a:ext cx="457200" cy="9144"/>
           </a:xfrm>
           <a:prstGeom prst="line">
             <a:avLst/>
@@ -9415,7 +9415,7 @@
         <p:spPr>
           <a:xfrm>
             <a:off x="950976" y="1033272"/>
-            <a:ext cx="274320" cy="0"/>
+            <a:ext cx="274320" cy="9144"/>
           </a:xfrm>
           <a:prstGeom prst="line">
             <a:avLst/>
@@ -9580,7 +9580,7 @@
         <p:spPr>
           <a:xfrm>
             <a:off x="2048256" y="1033272"/>
-            <a:ext cx="274320" cy="0"/>
+            <a:ext cx="274320" cy="9144"/>
           </a:xfrm>
           <a:prstGeom prst="line">
             <a:avLst/>
@@ -9745,7 +9745,7 @@
         <p:spPr>
           <a:xfrm>
             <a:off x="2697480" y="1298448"/>
-            <a:ext cx="0" cy="292608"/>
+            <a:ext cx="9144" cy="292608"/>
           </a:xfrm>
           <a:prstGeom prst="line">
             <a:avLst/>
@@ -14894,7 +14894,7 @@
         <p:spPr>
           <a:xfrm>
             <a:off x="1581912" y="1371600"/>
-            <a:ext cx="64008" cy="0"/>
+            <a:ext cx="64008" cy="9144"/>
           </a:xfrm>
           <a:prstGeom prst="line">
             <a:avLst/>
@@ -14918,7 +14918,7 @@
         <p:spPr>
           <a:xfrm>
             <a:off x="3017520" y="1371600"/>
-            <a:ext cx="64008" cy="0"/>
+            <a:ext cx="64008" cy="9144"/>
           </a:xfrm>
           <a:prstGeom prst="line">
             <a:avLst/>
@@ -14942,7 +14942,7 @@
         <p:spPr>
           <a:xfrm>
             <a:off x="4453128" y="1371600"/>
-            <a:ext cx="64008" cy="0"/>
+            <a:ext cx="64008" cy="9144"/>
           </a:xfrm>
           <a:prstGeom prst="line">
             <a:avLst/>
@@ -14966,7 +14966,7 @@
         <p:spPr>
           <a:xfrm>
             <a:off x="5888736" y="1371600"/>
-            <a:ext cx="64008" cy="0"/>
+            <a:ext cx="64008" cy="9144"/>
           </a:xfrm>
           <a:prstGeom prst="line">
             <a:avLst/>
@@ -14990,7 +14990,7 @@
         <p:spPr>
           <a:xfrm>
             <a:off x="7324344" y="1371600"/>
-            <a:ext cx="64008" cy="0"/>
+            <a:ext cx="64008" cy="9144"/>
           </a:xfrm>
           <a:prstGeom prst="line">
             <a:avLst/>

--- a/output/part6.pptx
+++ b/output/part6.pptx
@@ -1480,7 +1480,7 @@
     <p:bg>
       <p:bgPr>
         <a:solidFill>
-          <a:srgbClr val="0D1117"/>
+          <a:srgbClr val="FFFDF8"/>
         </a:solidFill>
       </p:bgPr>
     </p:bg>
@@ -1513,11 +1513,11 @@
             <a:avLst/>
           </a:prstGeom>
           <a:solidFill>
-            <a:srgbClr val="161B22"/>
+            <a:srgbClr val="F5F1EB"/>
           </a:solidFill>
           <a:ln w="6350">
             <a:solidFill>
-              <a:srgbClr val="30363D"/>
+              <a:srgbClr val="D6CCBF"/>
             </a:solidFill>
             <a:prstDash val="solid"/>
           </a:ln>
@@ -1538,11 +1538,11 @@
             <a:avLst/>
           </a:prstGeom>
           <a:solidFill>
-            <a:srgbClr val="58A6FF"/>
+            <a:srgbClr val="4A7FB5"/>
           </a:solidFill>
           <a:ln w="12700">
             <a:solidFill>
-              <a:srgbClr val="58A6FF"/>
+              <a:srgbClr val="4A7FB5"/>
             </a:solidFill>
             <a:prstDash val="solid"/>
           </a:ln>
@@ -1575,13 +1575,13 @@
             <a:r>
               <a:rPr lang="en-US" sz="1600" b="1" dirty="0">
                 <a:solidFill>
-                  <a:srgbClr val="E6EDF3"/>
-                </a:solidFill>
-                <a:latin typeface="Calibri" pitchFamily="34" charset="0"/>
-                <a:ea typeface="Calibri" pitchFamily="34" charset="-122"/>
-                <a:cs typeface="Calibri" pitchFamily="34" charset="-120"/>
-              </a:rPr>
-              <a:t>可觀測性三本柱：Metrics、Logs、Traces</a:t>
+                  <a:srgbClr val="2D2926"/>
+                </a:solidFill>
+                <a:latin typeface="Calibri" pitchFamily="34" charset="0"/>
+                <a:ea typeface="Calibri" pitchFamily="34" charset="-122"/>
+                <a:cs typeface="Calibri" pitchFamily="34" charset="-120"/>
+              </a:rPr>
+              <a:t>Observability Three Pillars: Metrics, Logs, Traces</a:t>
             </a:r>
             <a:endParaRPr lang="en-US" sz="1600" dirty="0"/>
           </a:p>
@@ -1614,13 +1614,13 @@
             <a:r>
               <a:rPr lang="en-US" sz="850" dirty="0">
                 <a:solidFill>
-                  <a:srgbClr val="8B949E"/>
-                </a:solidFill>
-                <a:latin typeface="Calibri" pitchFamily="34" charset="0"/>
-                <a:ea typeface="Calibri" pitchFamily="34" charset="-122"/>
-                <a:cs typeface="Calibri" pitchFamily="34" charset="-120"/>
-              </a:rPr>
-              <a:t>PART 6  ·  43 / 50</a:t>
+                  <a:srgbClr val="8A8078"/>
+                </a:solidFill>
+                <a:latin typeface="Calibri" pitchFamily="34" charset="0"/>
+                <a:ea typeface="Calibri" pitchFamily="34" charset="-122"/>
+                <a:cs typeface="Calibri" pitchFamily="34" charset="-120"/>
+              </a:rPr>
+              <a:t>PART 6</a:t>
             </a:r>
             <a:endParaRPr lang="en-US" sz="850" dirty="0"/>
           </a:p>
@@ -1643,11 +1643,11 @@
             </a:avLst>
           </a:prstGeom>
           <a:solidFill>
-            <a:srgbClr val="161B22"/>
+            <a:srgbClr val="F5F1EB"/>
           </a:solidFill>
           <a:ln w="15240">
             <a:solidFill>
-              <a:srgbClr val="3FB950"/>
+              <a:srgbClr val="4A9968"/>
             </a:solidFill>
             <a:prstDash val="solid"/>
           </a:ln>
@@ -1668,11 +1668,11 @@
             <a:avLst/>
           </a:prstGeom>
           <a:solidFill>
-            <a:srgbClr val="1C2128"/>
+            <a:srgbClr val="ECE6DD"/>
           </a:solidFill>
           <a:ln w="12700">
             <a:solidFill>
-              <a:srgbClr val="30363D"/>
+              <a:srgbClr val="D6CCBF"/>
             </a:solidFill>
             <a:prstDash val="solid"/>
           </a:ln>
@@ -1741,7 +1741,7 @@
             <a:r>
               <a:rPr lang="en-US" sz="1200" b="1" dirty="0">
                 <a:solidFill>
-                  <a:srgbClr val="3FB950"/>
+                  <a:srgbClr val="4A9968"/>
                 </a:solidFill>
                 <a:latin typeface="Calibri" pitchFamily="34" charset="0"/>
                 <a:ea typeface="Calibri" pitchFamily="34" charset="-122"/>
@@ -1768,11 +1768,11 @@
             <a:avLst/>
           </a:prstGeom>
           <a:solidFill>
-            <a:srgbClr val="3FB950"/>
+            <a:srgbClr val="4A9968"/>
           </a:solidFill>
           <a:ln w="12700">
             <a:solidFill>
-              <a:srgbClr val="3FB950"/>
+              <a:srgbClr val="4A9968"/>
             </a:solidFill>
             <a:prstDash val="solid"/>
           </a:ln>
@@ -1805,13 +1805,13 @@
             <a:r>
               <a:rPr lang="en-US" sz="1050" b="1" dirty="0">
                 <a:solidFill>
-                  <a:srgbClr val="E6EDF3"/>
-                </a:solidFill>
-                <a:latin typeface="Calibri" pitchFamily="34" charset="0"/>
-                <a:ea typeface="Calibri" pitchFamily="34" charset="-122"/>
-                <a:cs typeface="Calibri" pitchFamily="34" charset="-120"/>
-              </a:rPr>
-              <a:t>數字型時序資料</a:t>
+                  <a:srgbClr val="2D2926"/>
+                </a:solidFill>
+                <a:latin typeface="Calibri" pitchFamily="34" charset="0"/>
+                <a:ea typeface="Calibri" pitchFamily="34" charset="-122"/>
+                <a:cs typeface="Calibri" pitchFamily="34" charset="-120"/>
+              </a:rPr>
+              <a:t>Numeric time-series data</a:t>
             </a:r>
             <a:endParaRPr lang="en-US" sz="1050" dirty="0"/>
           </a:p>
@@ -1844,13 +1844,13 @@
             <a:r>
               <a:rPr lang="en-US" sz="850" dirty="0">
                 <a:solidFill>
-                  <a:srgbClr val="8B949E"/>
-                </a:solidFill>
-                <a:latin typeface="Calibri" pitchFamily="34" charset="0"/>
-                <a:ea typeface="Calibri" pitchFamily="34" charset="-122"/>
-                <a:cs typeface="Calibri" pitchFamily="34" charset="-120"/>
-              </a:rPr>
-              <a:t>CPU%, 記憶體, 請求數/秒</a:t>
+                  <a:srgbClr val="8A8078"/>
+                </a:solidFill>
+                <a:latin typeface="Calibri" pitchFamily="34" charset="0"/>
+                <a:ea typeface="Calibri" pitchFamily="34" charset="-122"/>
+                <a:cs typeface="Calibri" pitchFamily="34" charset="-120"/>
+              </a:rPr>
+              <a:t>CPU%, Memory, Requests/sec</a:t>
             </a:r>
             <a:endParaRPr lang="en-US" sz="850" dirty="0"/>
           </a:p>
@@ -1871,11 +1871,11 @@
             <a:avLst/>
           </a:prstGeom>
           <a:solidFill>
-            <a:srgbClr val="3FB950"/>
+            <a:srgbClr val="4A9968"/>
           </a:solidFill>
           <a:ln w="12700">
             <a:solidFill>
-              <a:srgbClr val="3FB950"/>
+              <a:srgbClr val="4A9968"/>
             </a:solidFill>
             <a:prstDash val="solid"/>
           </a:ln>
@@ -1908,13 +1908,13 @@
             <a:r>
               <a:rPr lang="en-US" sz="1050" b="1" dirty="0">
                 <a:solidFill>
-                  <a:srgbClr val="E6EDF3"/>
-                </a:solidFill>
-                <a:latin typeface="Calibri" pitchFamily="34" charset="0"/>
-                <a:ea typeface="Calibri" pitchFamily="34" charset="-122"/>
-                <a:cs typeface="Calibri" pitchFamily="34" charset="-120"/>
-              </a:rPr>
-              <a:t>工具: Prometheus + Grafana</a:t>
+                  <a:srgbClr val="2D2926"/>
+                </a:solidFill>
+                <a:latin typeface="Calibri" pitchFamily="34" charset="0"/>
+                <a:ea typeface="Calibri" pitchFamily="34" charset="-122"/>
+                <a:cs typeface="Calibri" pitchFamily="34" charset="-120"/>
+              </a:rPr>
+              <a:t>Tools: Prometheus + Grafana</a:t>
             </a:r>
             <a:endParaRPr lang="en-US" sz="1050" dirty="0"/>
           </a:p>
@@ -1935,11 +1935,11 @@
             <a:avLst/>
           </a:prstGeom>
           <a:solidFill>
-            <a:srgbClr val="3FB950"/>
+            <a:srgbClr val="4A9968"/>
           </a:solidFill>
           <a:ln w="12700">
             <a:solidFill>
-              <a:srgbClr val="3FB950"/>
+              <a:srgbClr val="4A9968"/>
             </a:solidFill>
             <a:prstDash val="solid"/>
           </a:ln>
@@ -1972,13 +1972,13 @@
             <a:r>
               <a:rPr lang="en-US" sz="1050" b="1" dirty="0">
                 <a:solidFill>
-                  <a:srgbClr val="E6EDF3"/>
-                </a:solidFill>
-                <a:latin typeface="Calibri" pitchFamily="34" charset="0"/>
-                <a:ea typeface="Calibri" pitchFamily="34" charset="-122"/>
-                <a:cs typeface="Calibri" pitchFamily="34" charset="-120"/>
-              </a:rPr>
-              <a:t>告警規則：CPU &gt; 80% → 通知</a:t>
+                  <a:srgbClr val="2D2926"/>
+                </a:solidFill>
+                <a:latin typeface="Calibri" pitchFamily="34" charset="0"/>
+                <a:ea typeface="Calibri" pitchFamily="34" charset="-122"/>
+                <a:cs typeface="Calibri" pitchFamily="34" charset="-120"/>
+              </a:rPr>
+              <a:t>Alert rules: CPU &gt; 80% → Notify</a:t>
             </a:r>
             <a:endParaRPr lang="en-US" sz="1050" dirty="0"/>
           </a:p>
@@ -1999,11 +1999,11 @@
             <a:avLst/>
           </a:prstGeom>
           <a:solidFill>
-            <a:srgbClr val="3FB950"/>
+            <a:srgbClr val="4A9968"/>
           </a:solidFill>
           <a:ln w="12700">
             <a:solidFill>
-              <a:srgbClr val="3FB950"/>
+              <a:srgbClr val="4A9968"/>
             </a:solidFill>
             <a:prstDash val="solid"/>
           </a:ln>
@@ -2036,13 +2036,13 @@
             <a:r>
               <a:rPr lang="en-US" sz="1050" b="1" dirty="0">
                 <a:solidFill>
-                  <a:srgbClr val="E6EDF3"/>
-                </a:solidFill>
-                <a:latin typeface="Calibri" pitchFamily="34" charset="0"/>
-                <a:ea typeface="Calibri" pitchFamily="34" charset="-122"/>
-                <a:cs typeface="Calibri" pitchFamily="34" charset="-120"/>
-              </a:rPr>
-              <a:t>適合: 「What 出了問題」</a:t>
+                  <a:srgbClr val="2D2926"/>
+                </a:solidFill>
+                <a:latin typeface="Calibri" pitchFamily="34" charset="0"/>
+                <a:ea typeface="Calibri" pitchFamily="34" charset="-122"/>
+                <a:cs typeface="Calibri" pitchFamily="34" charset="-120"/>
+              </a:rPr>
+              <a:t>Best for: 'What went wrong'</a:t>
             </a:r>
             <a:endParaRPr lang="en-US" sz="1050" dirty="0"/>
           </a:p>
@@ -2063,11 +2063,11 @@
             <a:avLst/>
           </a:prstGeom>
           <a:solidFill>
-            <a:srgbClr val="3FB950"/>
+            <a:srgbClr val="4A9968"/>
           </a:solidFill>
           <a:ln w="12700">
             <a:solidFill>
-              <a:srgbClr val="3FB950"/>
+              <a:srgbClr val="4A9968"/>
             </a:solidFill>
             <a:prstDash val="solid"/>
           </a:ln>
@@ -2100,13 +2100,13 @@
             <a:r>
               <a:rPr lang="en-US" sz="1050" b="1" dirty="0">
                 <a:solidFill>
-                  <a:srgbClr val="E6EDF3"/>
-                </a:solidFill>
-                <a:latin typeface="Calibri" pitchFamily="34" charset="0"/>
-                <a:ea typeface="Calibri" pitchFamily="34" charset="-122"/>
-                <a:cs typeface="Calibri" pitchFamily="34" charset="-120"/>
-              </a:rPr>
-              <a:t>保留週期: 月 ~ 年</a:t>
+                  <a:srgbClr val="2D2926"/>
+                </a:solidFill>
+                <a:latin typeface="Calibri" pitchFamily="34" charset="0"/>
+                <a:ea typeface="Calibri" pitchFamily="34" charset="-122"/>
+                <a:cs typeface="Calibri" pitchFamily="34" charset="-120"/>
+              </a:rPr>
+              <a:t>Retention: Months to Years</a:t>
             </a:r>
             <a:endParaRPr lang="en-US" sz="1050" dirty="0"/>
           </a:p>
@@ -2129,11 +2129,11 @@
             </a:avLst>
           </a:prstGeom>
           <a:solidFill>
-            <a:srgbClr val="161B22"/>
+            <a:srgbClr val="F5F1EB"/>
           </a:solidFill>
           <a:ln w="15240">
             <a:solidFill>
-              <a:srgbClr val="D29922"/>
+              <a:srgbClr val="B8892C"/>
             </a:solidFill>
             <a:prstDash val="solid"/>
           </a:ln>
@@ -2154,11 +2154,11 @@
             <a:avLst/>
           </a:prstGeom>
           <a:solidFill>
-            <a:srgbClr val="1C2128"/>
+            <a:srgbClr val="ECE6DD"/>
           </a:solidFill>
           <a:ln w="12700">
             <a:solidFill>
-              <a:srgbClr val="30363D"/>
+              <a:srgbClr val="D6CCBF"/>
             </a:solidFill>
             <a:prstDash val="solid"/>
           </a:ln>
@@ -2227,7 +2227,7 @@
             <a:r>
               <a:rPr lang="en-US" sz="1200" b="1" dirty="0">
                 <a:solidFill>
-                  <a:srgbClr val="D29922"/>
+                  <a:srgbClr val="B8892C"/>
                 </a:solidFill>
                 <a:latin typeface="Calibri" pitchFamily="34" charset="0"/>
                 <a:ea typeface="Calibri" pitchFamily="34" charset="-122"/>
@@ -2254,11 +2254,11 @@
             <a:avLst/>
           </a:prstGeom>
           <a:solidFill>
-            <a:srgbClr val="D29922"/>
+            <a:srgbClr val="B8892C"/>
           </a:solidFill>
           <a:ln w="12700">
             <a:solidFill>
-              <a:srgbClr val="D29922"/>
+              <a:srgbClr val="B8892C"/>
             </a:solidFill>
             <a:prstDash val="solid"/>
           </a:ln>
@@ -2291,13 +2291,13 @@
             <a:r>
               <a:rPr lang="en-US" sz="1050" b="1" dirty="0">
                 <a:solidFill>
-                  <a:srgbClr val="E6EDF3"/>
-                </a:solidFill>
-                <a:latin typeface="Calibri" pitchFamily="34" charset="0"/>
-                <a:ea typeface="Calibri" pitchFamily="34" charset="-122"/>
-                <a:cs typeface="Calibri" pitchFamily="34" charset="-120"/>
-              </a:rPr>
-              <a:t>文字事件流</a:t>
+                  <a:srgbClr val="2D2926"/>
+                </a:solidFill>
+                <a:latin typeface="Calibri" pitchFamily="34" charset="0"/>
+                <a:ea typeface="Calibri" pitchFamily="34" charset="-122"/>
+                <a:cs typeface="Calibri" pitchFamily="34" charset="-120"/>
+              </a:rPr>
+              <a:t>Text event stream</a:t>
             </a:r>
             <a:endParaRPr lang="en-US" sz="1050" dirty="0"/>
           </a:p>
@@ -2330,13 +2330,13 @@
             <a:r>
               <a:rPr lang="en-US" sz="850" dirty="0">
                 <a:solidFill>
-                  <a:srgbClr val="8B949E"/>
-                </a:solidFill>
-                <a:latin typeface="Calibri" pitchFamily="34" charset="0"/>
-                <a:ea typeface="Calibri" pitchFamily="34" charset="-122"/>
-                <a:cs typeface="Calibri" pitchFamily="34" charset="-120"/>
-              </a:rPr>
-              <a:t>結構化 JSON 格式</a:t>
+                  <a:srgbClr val="8A8078"/>
+                </a:solidFill>
+                <a:latin typeface="Calibri" pitchFamily="34" charset="0"/>
+                <a:ea typeface="Calibri" pitchFamily="34" charset="-122"/>
+                <a:cs typeface="Calibri" pitchFamily="34" charset="-120"/>
+              </a:rPr>
+              <a:t>Structured JSON format</a:t>
             </a:r>
             <a:endParaRPr lang="en-US" sz="850" dirty="0"/>
           </a:p>
@@ -2357,11 +2357,11 @@
             <a:avLst/>
           </a:prstGeom>
           <a:solidFill>
-            <a:srgbClr val="D29922"/>
+            <a:srgbClr val="B8892C"/>
           </a:solidFill>
           <a:ln w="12700">
             <a:solidFill>
-              <a:srgbClr val="D29922"/>
+              <a:srgbClr val="B8892C"/>
             </a:solidFill>
             <a:prstDash val="solid"/>
           </a:ln>
@@ -2394,13 +2394,13 @@
             <a:r>
               <a:rPr lang="en-US" sz="1050" b="1" dirty="0">
                 <a:solidFill>
-                  <a:srgbClr val="E6EDF3"/>
-                </a:solidFill>
-                <a:latin typeface="Calibri" pitchFamily="34" charset="0"/>
-                <a:ea typeface="Calibri" pitchFamily="34" charset="-122"/>
-                <a:cs typeface="Calibri" pitchFamily="34" charset="-120"/>
-              </a:rPr>
-              <a:t>工具: ELK Stack, Loki, CloudWatch</a:t>
+                  <a:srgbClr val="2D2926"/>
+                </a:solidFill>
+                <a:latin typeface="Calibri" pitchFamily="34" charset="0"/>
+                <a:ea typeface="Calibri" pitchFamily="34" charset="-122"/>
+                <a:cs typeface="Calibri" pitchFamily="34" charset="-120"/>
+              </a:rPr>
+              <a:t>Tools: ELK Stack, Loki, CloudWatch</a:t>
             </a:r>
             <a:endParaRPr lang="en-US" sz="1050" dirty="0"/>
           </a:p>
@@ -2421,11 +2421,11 @@
             <a:avLst/>
           </a:prstGeom>
           <a:solidFill>
-            <a:srgbClr val="D29922"/>
+            <a:srgbClr val="B8892C"/>
           </a:solidFill>
           <a:ln w="12700">
             <a:solidFill>
-              <a:srgbClr val="D29922"/>
+              <a:srgbClr val="B8892C"/>
             </a:solidFill>
             <a:prstDash val="solid"/>
           </a:ln>
@@ -2458,13 +2458,13 @@
             <a:r>
               <a:rPr lang="en-US" sz="1050" b="1" dirty="0">
                 <a:solidFill>
-                  <a:srgbClr val="E6EDF3"/>
-                </a:solidFill>
-                <a:latin typeface="Calibri" pitchFamily="34" charset="0"/>
-                <a:ea typeface="Calibri" pitchFamily="34" charset="-122"/>
-                <a:cs typeface="Calibri" pitchFamily="34" charset="-120"/>
-              </a:rPr>
-              <a:t>stdout → 集中收集</a:t>
+                  <a:srgbClr val="2D2926"/>
+                </a:solidFill>
+                <a:latin typeface="Calibri" pitchFamily="34" charset="0"/>
+                <a:ea typeface="Calibri" pitchFamily="34" charset="-122"/>
+                <a:cs typeface="Calibri" pitchFamily="34" charset="-120"/>
+              </a:rPr>
+              <a:t>stdout → Centralized collection</a:t>
             </a:r>
             <a:endParaRPr lang="en-US" sz="1050" dirty="0"/>
           </a:p>
@@ -2485,11 +2485,11 @@
             <a:avLst/>
           </a:prstGeom>
           <a:solidFill>
-            <a:srgbClr val="D29922"/>
+            <a:srgbClr val="B8892C"/>
           </a:solidFill>
           <a:ln w="12700">
             <a:solidFill>
-              <a:srgbClr val="D29922"/>
+              <a:srgbClr val="B8892C"/>
             </a:solidFill>
             <a:prstDash val="solid"/>
           </a:ln>
@@ -2522,13 +2522,13 @@
             <a:r>
               <a:rPr lang="en-US" sz="1050" b="1" dirty="0">
                 <a:solidFill>
-                  <a:srgbClr val="E6EDF3"/>
-                </a:solidFill>
-                <a:latin typeface="Calibri" pitchFamily="34" charset="0"/>
-                <a:ea typeface="Calibri" pitchFamily="34" charset="-122"/>
-                <a:cs typeface="Calibri" pitchFamily="34" charset="-120"/>
-              </a:rPr>
-              <a:t>適合: 「Why 出了問題」</a:t>
+                  <a:srgbClr val="2D2926"/>
+                </a:solidFill>
+                <a:latin typeface="Calibri" pitchFamily="34" charset="0"/>
+                <a:ea typeface="Calibri" pitchFamily="34" charset="-122"/>
+                <a:cs typeface="Calibri" pitchFamily="34" charset="-120"/>
+              </a:rPr>
+              <a:t>Best for: 'Why it went wrong'</a:t>
             </a:r>
             <a:endParaRPr lang="en-US" sz="1050" dirty="0"/>
           </a:p>
@@ -2549,11 +2549,11 @@
             <a:avLst/>
           </a:prstGeom>
           <a:solidFill>
-            <a:srgbClr val="D29922"/>
+            <a:srgbClr val="B8892C"/>
           </a:solidFill>
           <a:ln w="12700">
             <a:solidFill>
-              <a:srgbClr val="D29922"/>
+              <a:srgbClr val="B8892C"/>
             </a:solidFill>
             <a:prstDash val="solid"/>
           </a:ln>
@@ -2586,13 +2586,13 @@
             <a:r>
               <a:rPr lang="en-US" sz="1050" b="1" dirty="0">
                 <a:solidFill>
-                  <a:srgbClr val="E6EDF3"/>
-                </a:solidFill>
-                <a:latin typeface="Calibri" pitchFamily="34" charset="0"/>
-                <a:ea typeface="Calibri" pitchFamily="34" charset="-122"/>
-                <a:cs typeface="Calibri" pitchFamily="34" charset="-120"/>
-              </a:rPr>
-              <a:t>保留週期: 週 ~ 月</a:t>
+                  <a:srgbClr val="2D2926"/>
+                </a:solidFill>
+                <a:latin typeface="Calibri" pitchFamily="34" charset="0"/>
+                <a:ea typeface="Calibri" pitchFamily="34" charset="-122"/>
+                <a:cs typeface="Calibri" pitchFamily="34" charset="-120"/>
+              </a:rPr>
+              <a:t>Retention: Weeks to Months</a:t>
             </a:r>
             <a:endParaRPr lang="en-US" sz="1050" dirty="0"/>
           </a:p>
@@ -2615,11 +2615,11 @@
             </a:avLst>
           </a:prstGeom>
           <a:solidFill>
-            <a:srgbClr val="161B22"/>
+            <a:srgbClr val="F5F1EB"/>
           </a:solidFill>
           <a:ln w="15240">
             <a:solidFill>
-              <a:srgbClr val="6E40C9"/>
+              <a:srgbClr val="8B6AB5"/>
             </a:solidFill>
             <a:prstDash val="solid"/>
           </a:ln>
@@ -2640,11 +2640,11 @@
             <a:avLst/>
           </a:prstGeom>
           <a:solidFill>
-            <a:srgbClr val="1C2128"/>
+            <a:srgbClr val="ECE6DD"/>
           </a:solidFill>
           <a:ln w="12700">
             <a:solidFill>
-              <a:srgbClr val="30363D"/>
+              <a:srgbClr val="D6CCBF"/>
             </a:solidFill>
             <a:prstDash val="solid"/>
           </a:ln>
@@ -2713,7 +2713,7 @@
             <a:r>
               <a:rPr lang="en-US" sz="1200" b="1" dirty="0">
                 <a:solidFill>
-                  <a:srgbClr val="6E40C9"/>
+                  <a:srgbClr val="8B6AB5"/>
                 </a:solidFill>
                 <a:latin typeface="Calibri" pitchFamily="34" charset="0"/>
                 <a:ea typeface="Calibri" pitchFamily="34" charset="-122"/>
@@ -2740,11 +2740,11 @@
             <a:avLst/>
           </a:prstGeom>
           <a:solidFill>
-            <a:srgbClr val="6E40C9"/>
+            <a:srgbClr val="8B6AB5"/>
           </a:solidFill>
           <a:ln w="12700">
             <a:solidFill>
-              <a:srgbClr val="6E40C9"/>
+              <a:srgbClr val="8B6AB5"/>
             </a:solidFill>
             <a:prstDash val="solid"/>
           </a:ln>
@@ -2777,13 +2777,13 @@
             <a:r>
               <a:rPr lang="en-US" sz="1050" b="1" dirty="0">
                 <a:solidFill>
-                  <a:srgbClr val="E6EDF3"/>
-                </a:solidFill>
-                <a:latin typeface="Calibri" pitchFamily="34" charset="0"/>
-                <a:ea typeface="Calibri" pitchFamily="34" charset="-122"/>
-                <a:cs typeface="Calibri" pitchFamily="34" charset="-120"/>
-              </a:rPr>
-              <a:t>分散式請求鏈路追蹤</a:t>
+                  <a:srgbClr val="2D2926"/>
+                </a:solidFill>
+                <a:latin typeface="Calibri" pitchFamily="34" charset="0"/>
+                <a:ea typeface="Calibri" pitchFamily="34" charset="-122"/>
+                <a:cs typeface="Calibri" pitchFamily="34" charset="-120"/>
+              </a:rPr>
+              <a:t>Distributed request chain tracing</a:t>
             </a:r>
             <a:endParaRPr lang="en-US" sz="1050" dirty="0"/>
           </a:p>
@@ -2804,11 +2804,11 @@
             <a:avLst/>
           </a:prstGeom>
           <a:solidFill>
-            <a:srgbClr val="6E40C9"/>
+            <a:srgbClr val="8B6AB5"/>
           </a:solidFill>
           <a:ln w="12700">
             <a:solidFill>
-              <a:srgbClr val="6E40C9"/>
+              <a:srgbClr val="8B6AB5"/>
             </a:solidFill>
             <a:prstDash val="solid"/>
           </a:ln>
@@ -2841,13 +2841,13 @@
             <a:r>
               <a:rPr lang="en-US" sz="1050" b="1" dirty="0">
                 <a:solidFill>
-                  <a:srgbClr val="E6EDF3"/>
-                </a:solidFill>
-                <a:latin typeface="Calibri" pitchFamily="34" charset="0"/>
-                <a:ea typeface="Calibri" pitchFamily="34" charset="-122"/>
-                <a:cs typeface="Calibri" pitchFamily="34" charset="-120"/>
-              </a:rPr>
-              <a:t>Trace ID 貫穿所有服務</a:t>
+                  <a:srgbClr val="2D2926"/>
+                </a:solidFill>
+                <a:latin typeface="Calibri" pitchFamily="34" charset="0"/>
+                <a:ea typeface="Calibri" pitchFamily="34" charset="-122"/>
+                <a:cs typeface="Calibri" pitchFamily="34" charset="-120"/>
+              </a:rPr>
+              <a:t>Trace ID spans all services</a:t>
             </a:r>
             <a:endParaRPr lang="en-US" sz="1050" dirty="0"/>
           </a:p>
@@ -2868,11 +2868,11 @@
             <a:avLst/>
           </a:prstGeom>
           <a:solidFill>
-            <a:srgbClr val="6E40C9"/>
+            <a:srgbClr val="8B6AB5"/>
           </a:solidFill>
           <a:ln w="12700">
             <a:solidFill>
-              <a:srgbClr val="6E40C9"/>
+              <a:srgbClr val="8B6AB5"/>
             </a:solidFill>
             <a:prstDash val="solid"/>
           </a:ln>
@@ -2905,13 +2905,13 @@
             <a:r>
               <a:rPr lang="en-US" sz="1050" b="1" dirty="0">
                 <a:solidFill>
-                  <a:srgbClr val="E6EDF3"/>
-                </a:solidFill>
-                <a:latin typeface="Calibri" pitchFamily="34" charset="0"/>
-                <a:ea typeface="Calibri" pitchFamily="34" charset="-122"/>
-                <a:cs typeface="Calibri" pitchFamily="34" charset="-120"/>
-              </a:rPr>
-              <a:t>工具: Jaeger, Zipkin, Tempo</a:t>
+                  <a:srgbClr val="2D2926"/>
+                </a:solidFill>
+                <a:latin typeface="Calibri" pitchFamily="34" charset="0"/>
+                <a:ea typeface="Calibri" pitchFamily="34" charset="-122"/>
+                <a:cs typeface="Calibri" pitchFamily="34" charset="-120"/>
+              </a:rPr>
+              <a:t>Tools: Jaeger, Zipkin, Tempo</a:t>
             </a:r>
             <a:endParaRPr lang="en-US" sz="1050" dirty="0"/>
           </a:p>
@@ -2932,11 +2932,11 @@
             <a:avLst/>
           </a:prstGeom>
           <a:solidFill>
-            <a:srgbClr val="6E40C9"/>
+            <a:srgbClr val="8B6AB5"/>
           </a:solidFill>
           <a:ln w="12700">
             <a:solidFill>
-              <a:srgbClr val="6E40C9"/>
+              <a:srgbClr val="8B6AB5"/>
             </a:solidFill>
             <a:prstDash val="solid"/>
           </a:ln>
@@ -2969,13 +2969,13 @@
             <a:r>
               <a:rPr lang="en-US" sz="1050" b="1" dirty="0">
                 <a:solidFill>
-                  <a:srgbClr val="E6EDF3"/>
-                </a:solidFill>
-                <a:latin typeface="Calibri" pitchFamily="34" charset="0"/>
-                <a:ea typeface="Calibri" pitchFamily="34" charset="-122"/>
-                <a:cs typeface="Calibri" pitchFamily="34" charset="-120"/>
-              </a:rPr>
-              <a:t>適合: 「Where 出了問題」</a:t>
+                  <a:srgbClr val="2D2926"/>
+                </a:solidFill>
+                <a:latin typeface="Calibri" pitchFamily="34" charset="0"/>
+                <a:ea typeface="Calibri" pitchFamily="34" charset="-122"/>
+                <a:cs typeface="Calibri" pitchFamily="34" charset="-120"/>
+              </a:rPr>
+              <a:t>Best for: 'Where it went wrong'</a:t>
             </a:r>
             <a:endParaRPr lang="en-US" sz="1050" dirty="0"/>
           </a:p>
@@ -2996,11 +2996,11 @@
             <a:avLst/>
           </a:prstGeom>
           <a:solidFill>
-            <a:srgbClr val="6E40C9"/>
+            <a:srgbClr val="8B6AB5"/>
           </a:solidFill>
           <a:ln w="12700">
             <a:solidFill>
-              <a:srgbClr val="6E40C9"/>
+              <a:srgbClr val="8B6AB5"/>
             </a:solidFill>
             <a:prstDash val="solid"/>
           </a:ln>
@@ -3033,13 +3033,13 @@
             <a:r>
               <a:rPr lang="en-US" sz="1050" b="1" dirty="0">
                 <a:solidFill>
-                  <a:srgbClr val="E6EDF3"/>
-                </a:solidFill>
-                <a:latin typeface="Calibri" pitchFamily="34" charset="0"/>
-                <a:ea typeface="Calibri" pitchFamily="34" charset="-122"/>
-                <a:cs typeface="Calibri" pitchFamily="34" charset="-120"/>
-              </a:rPr>
-              <a:t>保留週期: 天 ~ 週 (成本高)</a:t>
+                  <a:srgbClr val="2D2926"/>
+                </a:solidFill>
+                <a:latin typeface="Calibri" pitchFamily="34" charset="0"/>
+                <a:ea typeface="Calibri" pitchFamily="34" charset="-122"/>
+                <a:cs typeface="Calibri" pitchFamily="34" charset="-120"/>
+              </a:rPr>
+              <a:t>Retention: Days to Weeks (high cost)</a:t>
             </a:r>
             <a:endParaRPr lang="en-US" sz="1050" dirty="0"/>
           </a:p>
@@ -3062,11 +3062,11 @@
             </a:avLst>
           </a:prstGeom>
           <a:solidFill>
-            <a:srgbClr val="0A1929"/>
+            <a:srgbClr val="EAF0F7"/>
           </a:solidFill>
           <a:ln w="9525">
             <a:solidFill>
-              <a:srgbClr val="58A6FF"/>
+              <a:srgbClr val="4A7FB5"/>
             </a:solidFill>
             <a:prstDash val="solid"/>
           </a:ln>
@@ -3099,13 +3099,13 @@
             <a:r>
               <a:rPr lang="en-US" sz="1000" i="1" dirty="0">
                 <a:solidFill>
-                  <a:srgbClr val="8B949E"/>
-                </a:solidFill>
-                <a:latin typeface="Calibri" pitchFamily="34" charset="0"/>
-                <a:ea typeface="Calibri" pitchFamily="34" charset="-122"/>
-                <a:cs typeface="Calibri" pitchFamily="34" charset="-120"/>
-              </a:rPr>
-              <a:t>💡  三本柱缺一不可：Metrics 告訴你有問題，Logs 告訴你原因，Traces 告訴你在哪個服務</a:t>
+                  <a:srgbClr val="8A8078"/>
+                </a:solidFill>
+                <a:latin typeface="Calibri" pitchFamily="34" charset="0"/>
+                <a:ea typeface="Calibri" pitchFamily="34" charset="-122"/>
+                <a:cs typeface="Calibri" pitchFamily="34" charset="-120"/>
+              </a:rPr>
+              <a:t>💡  All three pillars are essential: Metrics tell you something is wrong, Logs tell you why, Traces tell you which service</a:t>
             </a:r>
             <a:endParaRPr lang="en-US" sz="1000" dirty="0"/>
           </a:p>
@@ -3125,7 +3125,7 @@
     <p:bg>
       <p:bgPr>
         <a:solidFill>
-          <a:srgbClr val="0D1117"/>
+          <a:srgbClr val="FFFDF8"/>
         </a:solidFill>
       </p:bgPr>
     </p:bg>
@@ -3158,11 +3158,11 @@
             <a:avLst/>
           </a:prstGeom>
           <a:solidFill>
-            <a:srgbClr val="161B22"/>
+            <a:srgbClr val="F5F1EB"/>
           </a:solidFill>
           <a:ln w="6350">
             <a:solidFill>
-              <a:srgbClr val="30363D"/>
+              <a:srgbClr val="D6CCBF"/>
             </a:solidFill>
             <a:prstDash val="solid"/>
           </a:ln>
@@ -3183,11 +3183,11 @@
             <a:avLst/>
           </a:prstGeom>
           <a:solidFill>
-            <a:srgbClr val="3FB950"/>
+            <a:srgbClr val="4A9968"/>
           </a:solidFill>
           <a:ln w="12700">
             <a:solidFill>
-              <a:srgbClr val="3FB950"/>
+              <a:srgbClr val="4A9968"/>
             </a:solidFill>
             <a:prstDash val="solid"/>
           </a:ln>
@@ -3220,13 +3220,13 @@
             <a:r>
               <a:rPr lang="en-US" sz="1600" b="1" dirty="0">
                 <a:solidFill>
-                  <a:srgbClr val="E6EDF3"/>
-                </a:solidFill>
-                <a:latin typeface="Calibri" pitchFamily="34" charset="0"/>
-                <a:ea typeface="Calibri" pitchFamily="34" charset="-122"/>
-                <a:cs typeface="Calibri" pitchFamily="34" charset="-120"/>
-              </a:rPr>
-              <a:t>SLI / SLO / SLA：可靠性的三個層次</a:t>
+                  <a:srgbClr val="2D2926"/>
+                </a:solidFill>
+                <a:latin typeface="Calibri" pitchFamily="34" charset="0"/>
+                <a:ea typeface="Calibri" pitchFamily="34" charset="-122"/>
+                <a:cs typeface="Calibri" pitchFamily="34" charset="-120"/>
+              </a:rPr>
+              <a:t>SLI / SLO / SLA: Three Levels of Reliability</a:t>
             </a:r>
             <a:endParaRPr lang="en-US" sz="1600" dirty="0"/>
           </a:p>
@@ -3259,13 +3259,13 @@
             <a:r>
               <a:rPr lang="en-US" sz="850" dirty="0">
                 <a:solidFill>
-                  <a:srgbClr val="8B949E"/>
-                </a:solidFill>
-                <a:latin typeface="Calibri" pitchFamily="34" charset="0"/>
-                <a:ea typeface="Calibri" pitchFamily="34" charset="-122"/>
-                <a:cs typeface="Calibri" pitchFamily="34" charset="-120"/>
-              </a:rPr>
-              <a:t>PART 6  ·  44 / 50</a:t>
+                  <a:srgbClr val="8A8078"/>
+                </a:solidFill>
+                <a:latin typeface="Calibri" pitchFamily="34" charset="0"/>
+                <a:ea typeface="Calibri" pitchFamily="34" charset="-122"/>
+                <a:cs typeface="Calibri" pitchFamily="34" charset="-120"/>
+              </a:rPr>
+              <a:t>PART 6</a:t>
             </a:r>
             <a:endParaRPr lang="en-US" sz="850" dirty="0"/>
           </a:p>
@@ -3288,11 +3288,11 @@
             </a:avLst>
           </a:prstGeom>
           <a:solidFill>
-            <a:srgbClr val="1C2128"/>
+            <a:srgbClr val="ECE6DD"/>
           </a:solidFill>
           <a:ln w="19050">
             <a:solidFill>
-              <a:srgbClr val="3FB950"/>
+              <a:srgbClr val="4A9968"/>
             </a:solidFill>
             <a:prstDash val="solid"/>
           </a:ln>
@@ -3325,7 +3325,7 @@
             <a:r>
               <a:rPr lang="en-US" sz="1050" b="1" dirty="0">
                 <a:solidFill>
-                  <a:srgbClr val="3FB950"/>
+                  <a:srgbClr val="4A9968"/>
                 </a:solidFill>
                 <a:latin typeface="Calibri" pitchFamily="34" charset="0"/>
                 <a:ea typeface="Calibri" pitchFamily="34" charset="-122"/>
@@ -3354,11 +3354,11 @@
             </a:avLst>
           </a:prstGeom>
           <a:solidFill>
-            <a:srgbClr val="161B22"/>
+            <a:srgbClr val="F5F1EB"/>
           </a:solidFill>
           <a:ln w="12700">
             <a:solidFill>
-              <a:srgbClr val="30363D"/>
+              <a:srgbClr val="D6CCBF"/>
             </a:solidFill>
             <a:prstDash val="solid"/>
           </a:ln>
@@ -3391,13 +3391,13 @@
             <a:r>
               <a:rPr lang="en-US" sz="1000" b="1" dirty="0">
                 <a:solidFill>
-                  <a:srgbClr val="E6EDF3"/>
-                </a:solidFill>
-                <a:latin typeface="Calibri" pitchFamily="34" charset="0"/>
-                <a:ea typeface="Calibri" pitchFamily="34" charset="-122"/>
-                <a:cs typeface="Calibri" pitchFamily="34" charset="-120"/>
-              </a:rPr>
-              <a:t>實際量測的服務指標值</a:t>
+                  <a:srgbClr val="2D2926"/>
+                </a:solidFill>
+                <a:latin typeface="Calibri" pitchFamily="34" charset="0"/>
+                <a:ea typeface="Calibri" pitchFamily="34" charset="-122"/>
+                <a:cs typeface="Calibri" pitchFamily="34" charset="-120"/>
+              </a:rPr>
+              <a:t>Actual measured service metric values</a:t>
             </a:r>
             <a:endParaRPr lang="en-US" sz="1000" dirty="0"/>
           </a:p>
@@ -3430,13 +3430,13 @@
             <a:r>
               <a:rPr lang="en-US" sz="900" dirty="0">
                 <a:solidFill>
-                  <a:srgbClr val="8B949E"/>
-                </a:solidFill>
-                <a:latin typeface="Calibri" pitchFamily="34" charset="0"/>
-                <a:ea typeface="Calibri" pitchFamily="34" charset="-122"/>
-                <a:cs typeface="Calibri" pitchFamily="34" charset="-120"/>
-              </a:rPr>
-              <a:t>一個數字，代表服務現在的表現</a:t>
+                  <a:srgbClr val="8A8078"/>
+                </a:solidFill>
+                <a:latin typeface="Calibri" pitchFamily="34" charset="0"/>
+                <a:ea typeface="Calibri" pitchFamily="34" charset="-122"/>
+                <a:cs typeface="Calibri" pitchFamily="34" charset="-120"/>
+              </a:rPr>
+              <a:t>A number representing current service performance</a:t>
             </a:r>
             <a:endParaRPr lang="en-US" sz="900" dirty="0"/>
           </a:p>
@@ -3459,11 +3459,11 @@
             </a:avLst>
           </a:prstGeom>
           <a:solidFill>
-            <a:srgbClr val="161B22"/>
+            <a:srgbClr val="F5F1EB"/>
           </a:solidFill>
           <a:ln w="12700">
             <a:solidFill>
-              <a:srgbClr val="30363D"/>
+              <a:srgbClr val="D6CCBF"/>
             </a:solidFill>
             <a:prstDash val="solid"/>
           </a:ln>
@@ -3496,13 +3496,13 @@
             <a:r>
               <a:rPr lang="en-US" sz="1000" b="1" dirty="0">
                 <a:solidFill>
-                  <a:srgbClr val="3FB950"/>
-                </a:solidFill>
-                <a:latin typeface="Calibri" pitchFamily="34" charset="0"/>
-                <a:ea typeface="Calibri" pitchFamily="34" charset="-122"/>
-                <a:cs typeface="Calibri" pitchFamily="34" charset="-120"/>
-              </a:rPr>
-              <a:t>可用性: 99.95%</a:t>
+                  <a:srgbClr val="4A9968"/>
+                </a:solidFill>
+                <a:latin typeface="Calibri" pitchFamily="34" charset="0"/>
+                <a:ea typeface="Calibri" pitchFamily="34" charset="-122"/>
+                <a:cs typeface="Calibri" pitchFamily="34" charset="-120"/>
+              </a:rPr>
+              <a:t>Availability: 99.95%</a:t>
             </a:r>
             <a:endParaRPr lang="en-US" sz="1000" dirty="0"/>
           </a:p>
@@ -3525,11 +3525,11 @@
             </a:avLst>
           </a:prstGeom>
           <a:solidFill>
-            <a:srgbClr val="161B22"/>
+            <a:srgbClr val="F5F1EB"/>
           </a:solidFill>
           <a:ln w="12700">
             <a:solidFill>
-              <a:srgbClr val="30363D"/>
+              <a:srgbClr val="D6CCBF"/>
             </a:solidFill>
             <a:prstDash val="solid"/>
           </a:ln>
@@ -3562,13 +3562,13 @@
             <a:r>
               <a:rPr lang="en-US" sz="1000" b="1" dirty="0">
                 <a:solidFill>
-                  <a:srgbClr val="58A6FF"/>
-                </a:solidFill>
-                <a:latin typeface="Calibri" pitchFamily="34" charset="0"/>
-                <a:ea typeface="Calibri" pitchFamily="34" charset="-122"/>
-                <a:cs typeface="Calibri" pitchFamily="34" charset="-120"/>
-              </a:rPr>
-              <a:t>P99 延遲: 245ms</a:t>
+                  <a:srgbClr val="4A7FB5"/>
+                </a:solidFill>
+                <a:latin typeface="Calibri" pitchFamily="34" charset="0"/>
+                <a:ea typeface="Calibri" pitchFamily="34" charset="-122"/>
+                <a:cs typeface="Calibri" pitchFamily="34" charset="-120"/>
+              </a:rPr>
+              <a:t>P99 Latency: 245ms</a:t>
             </a:r>
             <a:endParaRPr lang="en-US" sz="1000" dirty="0"/>
           </a:p>
@@ -3591,11 +3591,11 @@
             </a:avLst>
           </a:prstGeom>
           <a:solidFill>
-            <a:srgbClr val="161B22"/>
+            <a:srgbClr val="F5F1EB"/>
           </a:solidFill>
           <a:ln w="12700">
             <a:solidFill>
-              <a:srgbClr val="30363D"/>
+              <a:srgbClr val="D6CCBF"/>
             </a:solidFill>
             <a:prstDash val="solid"/>
           </a:ln>
@@ -3628,13 +3628,13 @@
             <a:r>
               <a:rPr lang="en-US" sz="1000" b="1" dirty="0">
                 <a:solidFill>
-                  <a:srgbClr val="3FB950"/>
-                </a:solidFill>
-                <a:latin typeface="Calibri" pitchFamily="34" charset="0"/>
-                <a:ea typeface="Calibri" pitchFamily="34" charset="-122"/>
-                <a:cs typeface="Calibri" pitchFamily="34" charset="-120"/>
-              </a:rPr>
-              <a:t>錯誤率: 0.03%</a:t>
+                  <a:srgbClr val="4A9968"/>
+                </a:solidFill>
+                <a:latin typeface="Calibri" pitchFamily="34" charset="0"/>
+                <a:ea typeface="Calibri" pitchFamily="34" charset="-122"/>
+                <a:cs typeface="Calibri" pitchFamily="34" charset="-120"/>
+              </a:rPr>
+              <a:t>Error Rate: 0.03%</a:t>
             </a:r>
             <a:endParaRPr lang="en-US" sz="1000" dirty="0"/>
           </a:p>
@@ -3657,11 +3657,11 @@
             </a:avLst>
           </a:prstGeom>
           <a:solidFill>
-            <a:srgbClr val="161B22"/>
+            <a:srgbClr val="F5F1EB"/>
           </a:solidFill>
           <a:ln w="12700">
             <a:solidFill>
-              <a:srgbClr val="30363D"/>
+              <a:srgbClr val="D6CCBF"/>
             </a:solidFill>
             <a:prstDash val="solid"/>
           </a:ln>
@@ -3694,13 +3694,13 @@
             <a:r>
               <a:rPr lang="en-US" sz="1000" b="1" dirty="0">
                 <a:solidFill>
-                  <a:srgbClr val="58A6FF"/>
-                </a:solidFill>
-                <a:latin typeface="Calibri" pitchFamily="34" charset="0"/>
-                <a:ea typeface="Calibri" pitchFamily="34" charset="-122"/>
-                <a:cs typeface="Calibri" pitchFamily="34" charset="-120"/>
-              </a:rPr>
-              <a:t>吞吐量: 1200 req/s</a:t>
+                  <a:srgbClr val="4A7FB5"/>
+                </a:solidFill>
+                <a:latin typeface="Calibri" pitchFamily="34" charset="0"/>
+                <a:ea typeface="Calibri" pitchFamily="34" charset="-122"/>
+                <a:cs typeface="Calibri" pitchFamily="34" charset="-120"/>
+              </a:rPr>
+              <a:t>Throughput: 1200 req/s</a:t>
             </a:r>
             <a:endParaRPr lang="en-US" sz="1000" dirty="0"/>
           </a:p>
@@ -3723,11 +3723,11 @@
             </a:avLst>
           </a:prstGeom>
           <a:solidFill>
-            <a:srgbClr val="1C2128"/>
+            <a:srgbClr val="ECE6DD"/>
           </a:solidFill>
           <a:ln w="19050">
             <a:solidFill>
-              <a:srgbClr val="58A6FF"/>
+              <a:srgbClr val="4A7FB5"/>
             </a:solidFill>
             <a:prstDash val="solid"/>
           </a:ln>
@@ -3760,7 +3760,7 @@
             <a:r>
               <a:rPr lang="en-US" sz="1050" b="1" dirty="0">
                 <a:solidFill>
-                  <a:srgbClr val="58A6FF"/>
+                  <a:srgbClr val="4A7FB5"/>
                 </a:solidFill>
                 <a:latin typeface="Calibri" pitchFamily="34" charset="0"/>
                 <a:ea typeface="Calibri" pitchFamily="34" charset="-122"/>
@@ -3789,11 +3789,11 @@
             </a:avLst>
           </a:prstGeom>
           <a:solidFill>
-            <a:srgbClr val="161B22"/>
+            <a:srgbClr val="F5F1EB"/>
           </a:solidFill>
           <a:ln w="12700">
             <a:solidFill>
-              <a:srgbClr val="30363D"/>
+              <a:srgbClr val="D6CCBF"/>
             </a:solidFill>
             <a:prstDash val="solid"/>
           </a:ln>
@@ -3826,13 +3826,13 @@
             <a:r>
               <a:rPr lang="en-US" sz="1000" b="1" dirty="0">
                 <a:solidFill>
-                  <a:srgbClr val="E6EDF3"/>
-                </a:solidFill>
-                <a:latin typeface="Calibri" pitchFamily="34" charset="0"/>
-                <a:ea typeface="Calibri" pitchFamily="34" charset="-122"/>
-                <a:cs typeface="Calibri" pitchFamily="34" charset="-120"/>
-              </a:rPr>
-              <a:t>你設定的目標數字</a:t>
+                  <a:srgbClr val="2D2926"/>
+                </a:solidFill>
+                <a:latin typeface="Calibri" pitchFamily="34" charset="0"/>
+                <a:ea typeface="Calibri" pitchFamily="34" charset="-122"/>
+                <a:cs typeface="Calibri" pitchFamily="34" charset="-120"/>
+              </a:rPr>
+              <a:t>Your defined target numbers</a:t>
             </a:r>
             <a:endParaRPr lang="en-US" sz="1000" dirty="0"/>
           </a:p>
@@ -3865,13 +3865,13 @@
             <a:r>
               <a:rPr lang="en-US" sz="900" dirty="0">
                 <a:solidFill>
-                  <a:srgbClr val="8B949E"/>
-                </a:solidFill>
-                <a:latin typeface="Calibri" pitchFamily="34" charset="0"/>
-                <a:ea typeface="Calibri" pitchFamily="34" charset="-122"/>
-                <a:cs typeface="Calibri" pitchFamily="34" charset="-120"/>
-              </a:rPr>
-              <a:t>SLO 是 SLI 的目標值</a:t>
+                  <a:srgbClr val="8A8078"/>
+                </a:solidFill>
+                <a:latin typeface="Calibri" pitchFamily="34" charset="0"/>
+                <a:ea typeface="Calibri" pitchFamily="34" charset="-122"/>
+                <a:cs typeface="Calibri" pitchFamily="34" charset="-120"/>
+              </a:rPr>
+              <a:t>SLO is the target value for SLI</a:t>
             </a:r>
             <a:endParaRPr lang="en-US" sz="900" dirty="0"/>
           </a:p>
@@ -3894,11 +3894,11 @@
             </a:avLst>
           </a:prstGeom>
           <a:solidFill>
-            <a:srgbClr val="161B22"/>
+            <a:srgbClr val="F5F1EB"/>
           </a:solidFill>
           <a:ln w="12700">
             <a:solidFill>
-              <a:srgbClr val="30363D"/>
+              <a:srgbClr val="D6CCBF"/>
             </a:solidFill>
             <a:prstDash val="solid"/>
           </a:ln>
@@ -3931,13 +3931,13 @@
             <a:r>
               <a:rPr lang="en-US" sz="1000" b="1" dirty="0">
                 <a:solidFill>
-                  <a:srgbClr val="58A6FF"/>
-                </a:solidFill>
-                <a:latin typeface="Calibri" pitchFamily="34" charset="0"/>
-                <a:ea typeface="Calibri" pitchFamily="34" charset="-122"/>
-                <a:cs typeface="Calibri" pitchFamily="34" charset="-120"/>
-              </a:rPr>
-              <a:t>可用性 SLO: ≥ 99.9%</a:t>
+                  <a:srgbClr val="4A7FB5"/>
+                </a:solidFill>
+                <a:latin typeface="Calibri" pitchFamily="34" charset="0"/>
+                <a:ea typeface="Calibri" pitchFamily="34" charset="-122"/>
+                <a:cs typeface="Calibri" pitchFamily="34" charset="-120"/>
+              </a:rPr>
+              <a:t>Availability SLO: ≥ 99.9%</a:t>
             </a:r>
             <a:endParaRPr lang="en-US" sz="1000" dirty="0"/>
           </a:p>
@@ -3960,11 +3960,11 @@
             </a:avLst>
           </a:prstGeom>
           <a:solidFill>
-            <a:srgbClr val="161B22"/>
+            <a:srgbClr val="F5F1EB"/>
           </a:solidFill>
           <a:ln w="12700">
             <a:solidFill>
-              <a:srgbClr val="30363D"/>
+              <a:srgbClr val="D6CCBF"/>
             </a:solidFill>
             <a:prstDash val="solid"/>
           </a:ln>
@@ -3997,13 +3997,13 @@
             <a:r>
               <a:rPr lang="en-US" sz="1000" b="1" dirty="0">
                 <a:solidFill>
-                  <a:srgbClr val="58A6FF"/>
-                </a:solidFill>
-                <a:latin typeface="Calibri" pitchFamily="34" charset="0"/>
-                <a:ea typeface="Calibri" pitchFamily="34" charset="-122"/>
-                <a:cs typeface="Calibri" pitchFamily="34" charset="-120"/>
-              </a:rPr>
-              <a:t>P99 延遲 SLO: ≤ 500ms</a:t>
+                  <a:srgbClr val="4A7FB5"/>
+                </a:solidFill>
+                <a:latin typeface="Calibri" pitchFamily="34" charset="0"/>
+                <a:ea typeface="Calibri" pitchFamily="34" charset="-122"/>
+                <a:cs typeface="Calibri" pitchFamily="34" charset="-120"/>
+              </a:rPr>
+              <a:t>P99 Latency SLO: ≤ 500ms</a:t>
             </a:r>
             <a:endParaRPr lang="en-US" sz="1000" dirty="0"/>
           </a:p>
@@ -4026,11 +4026,11 @@
             </a:avLst>
           </a:prstGeom>
           <a:solidFill>
-            <a:srgbClr val="161B22"/>
+            <a:srgbClr val="F5F1EB"/>
           </a:solidFill>
           <a:ln w="12700">
             <a:solidFill>
-              <a:srgbClr val="30363D"/>
+              <a:srgbClr val="D6CCBF"/>
             </a:solidFill>
             <a:prstDash val="solid"/>
           </a:ln>
@@ -4063,13 +4063,13 @@
             <a:r>
               <a:rPr lang="en-US" sz="1000" b="1" dirty="0">
                 <a:solidFill>
-                  <a:srgbClr val="58A6FF"/>
-                </a:solidFill>
-                <a:latin typeface="Calibri" pitchFamily="34" charset="0"/>
-                <a:ea typeface="Calibri" pitchFamily="34" charset="-122"/>
-                <a:cs typeface="Calibri" pitchFamily="34" charset="-120"/>
-              </a:rPr>
-              <a:t>錯誤率 SLO: ≤ 0.1%</a:t>
+                  <a:srgbClr val="4A7FB5"/>
+                </a:solidFill>
+                <a:latin typeface="Calibri" pitchFamily="34" charset="0"/>
+                <a:ea typeface="Calibri" pitchFamily="34" charset="-122"/>
+                <a:cs typeface="Calibri" pitchFamily="34" charset="-120"/>
+              </a:rPr>
+              <a:t>Error Rate SLO: ≤ 0.1%</a:t>
             </a:r>
             <a:endParaRPr lang="en-US" sz="1000" dirty="0"/>
           </a:p>
@@ -4092,11 +4092,11 @@
             </a:avLst>
           </a:prstGeom>
           <a:solidFill>
-            <a:srgbClr val="161B22"/>
+            <a:srgbClr val="F5F1EB"/>
           </a:solidFill>
           <a:ln w="12700">
             <a:solidFill>
-              <a:srgbClr val="30363D"/>
+              <a:srgbClr val="D6CCBF"/>
             </a:solidFill>
             <a:prstDash val="solid"/>
           </a:ln>
@@ -4129,13 +4129,13 @@
             <a:r>
               <a:rPr lang="en-US" sz="1000" b="1" dirty="0">
                 <a:solidFill>
-                  <a:srgbClr val="D29922"/>
-                </a:solidFill>
-                <a:latin typeface="Calibri" pitchFamily="34" charset="0"/>
-                <a:ea typeface="Calibri" pitchFamily="34" charset="-122"/>
-                <a:cs typeface="Calibri" pitchFamily="34" charset="-120"/>
-              </a:rPr>
-              <a:t>Error Budget: 0.1% = 43min/月</a:t>
+                  <a:srgbClr val="B8892C"/>
+                </a:solidFill>
+                <a:latin typeface="Calibri" pitchFamily="34" charset="0"/>
+                <a:ea typeface="Calibri" pitchFamily="34" charset="-122"/>
+                <a:cs typeface="Calibri" pitchFamily="34" charset="-120"/>
+              </a:rPr>
+              <a:t>Error Budget: 0.1% = 43min/mo</a:t>
             </a:r>
             <a:endParaRPr lang="en-US" sz="1000" dirty="0"/>
           </a:p>
@@ -4158,11 +4158,11 @@
             </a:avLst>
           </a:prstGeom>
           <a:solidFill>
-            <a:srgbClr val="1C2128"/>
+            <a:srgbClr val="ECE6DD"/>
           </a:solidFill>
           <a:ln w="19050">
             <a:solidFill>
-              <a:srgbClr val="D29922"/>
+              <a:srgbClr val="B8892C"/>
             </a:solidFill>
             <a:prstDash val="solid"/>
           </a:ln>
@@ -4195,7 +4195,7 @@
             <a:r>
               <a:rPr lang="en-US" sz="1050" b="1" dirty="0">
                 <a:solidFill>
-                  <a:srgbClr val="D29922"/>
+                  <a:srgbClr val="B8892C"/>
                 </a:solidFill>
                 <a:latin typeface="Calibri" pitchFamily="34" charset="0"/>
                 <a:ea typeface="Calibri" pitchFamily="34" charset="-122"/>
@@ -4224,11 +4224,11 @@
             </a:avLst>
           </a:prstGeom>
           <a:solidFill>
-            <a:srgbClr val="161B22"/>
+            <a:srgbClr val="F5F1EB"/>
           </a:solidFill>
           <a:ln w="12700">
             <a:solidFill>
-              <a:srgbClr val="30363D"/>
+              <a:srgbClr val="D6CCBF"/>
             </a:solidFill>
             <a:prstDash val="solid"/>
           </a:ln>
@@ -4261,13 +4261,13 @@
             <a:r>
               <a:rPr lang="en-US" sz="1000" b="1" dirty="0">
                 <a:solidFill>
-                  <a:srgbClr val="E6EDF3"/>
-                </a:solidFill>
-                <a:latin typeface="Calibri" pitchFamily="34" charset="0"/>
-                <a:ea typeface="Calibri" pitchFamily="34" charset="-122"/>
-                <a:cs typeface="Calibri" pitchFamily="34" charset="-120"/>
-              </a:rPr>
-              <a:t>對外承諾的法律協議</a:t>
+                  <a:srgbClr val="2D2926"/>
+                </a:solidFill>
+                <a:latin typeface="Calibri" pitchFamily="34" charset="0"/>
+                <a:ea typeface="Calibri" pitchFamily="34" charset="-122"/>
+                <a:cs typeface="Calibri" pitchFamily="34" charset="-120"/>
+              </a:rPr>
+              <a:t>External-facing legal agreement</a:t>
             </a:r>
             <a:endParaRPr lang="en-US" sz="1000" dirty="0"/>
           </a:p>
@@ -4300,13 +4300,13 @@
             <a:r>
               <a:rPr lang="en-US" sz="900" dirty="0">
                 <a:solidFill>
-                  <a:srgbClr val="8B949E"/>
-                </a:solidFill>
-                <a:latin typeface="Calibri" pitchFamily="34" charset="0"/>
-                <a:ea typeface="Calibri" pitchFamily="34" charset="-122"/>
-                <a:cs typeface="Calibri" pitchFamily="34" charset="-120"/>
-              </a:rPr>
-              <a:t>SLA 違反 → 賠償</a:t>
+                  <a:srgbClr val="8A8078"/>
+                </a:solidFill>
+                <a:latin typeface="Calibri" pitchFamily="34" charset="0"/>
+                <a:ea typeface="Calibri" pitchFamily="34" charset="-122"/>
+                <a:cs typeface="Calibri" pitchFamily="34" charset="-120"/>
+              </a:rPr>
+              <a:t>SLA Violation → Compensation</a:t>
             </a:r>
             <a:endParaRPr lang="en-US" sz="900" dirty="0"/>
           </a:p>
@@ -4329,11 +4329,11 @@
             </a:avLst>
           </a:prstGeom>
           <a:solidFill>
-            <a:srgbClr val="161B22"/>
+            <a:srgbClr val="F5F1EB"/>
           </a:solidFill>
           <a:ln w="12700">
             <a:solidFill>
-              <a:srgbClr val="30363D"/>
+              <a:srgbClr val="D6CCBF"/>
             </a:solidFill>
             <a:prstDash val="solid"/>
           </a:ln>
@@ -4366,13 +4366,13 @@
             <a:r>
               <a:rPr lang="en-US" sz="950" b="1" dirty="0">
                 <a:solidFill>
-                  <a:srgbClr val="D29922"/>
-                </a:solidFill>
-                <a:latin typeface="Calibri" pitchFamily="34" charset="0"/>
-                <a:ea typeface="Calibri" pitchFamily="34" charset="-122"/>
-                <a:cs typeface="Calibri" pitchFamily="34" charset="-120"/>
-              </a:rPr>
-              <a:t>AWS EC2: 99.99% 可用性</a:t>
+                  <a:srgbClr val="B8892C"/>
+                </a:solidFill>
+                <a:latin typeface="Calibri" pitchFamily="34" charset="0"/>
+                <a:ea typeface="Calibri" pitchFamily="34" charset="-122"/>
+                <a:cs typeface="Calibri" pitchFamily="34" charset="-120"/>
+              </a:rPr>
+              <a:t>AWS EC2: 99.99% Availability</a:t>
             </a:r>
             <a:endParaRPr lang="en-US" sz="950" dirty="0"/>
           </a:p>
@@ -4395,11 +4395,11 @@
             </a:avLst>
           </a:prstGeom>
           <a:solidFill>
-            <a:srgbClr val="161B22"/>
+            <a:srgbClr val="F5F1EB"/>
           </a:solidFill>
           <a:ln w="12700">
             <a:solidFill>
-              <a:srgbClr val="30363D"/>
+              <a:srgbClr val="D6CCBF"/>
             </a:solidFill>
             <a:prstDash val="solid"/>
           </a:ln>
@@ -4432,13 +4432,13 @@
             <a:r>
               <a:rPr lang="en-US" sz="950" b="1" dirty="0">
                 <a:solidFill>
-                  <a:srgbClr val="D29922"/>
-                </a:solidFill>
-                <a:latin typeface="Calibri" pitchFamily="34" charset="0"/>
-                <a:ea typeface="Calibri" pitchFamily="34" charset="-122"/>
-                <a:cs typeface="Calibri" pitchFamily="34" charset="-120"/>
-              </a:rPr>
-              <a:t>賠償: Service Credit</a:t>
+                  <a:srgbClr val="B8892C"/>
+                </a:solidFill>
+                <a:latin typeface="Calibri" pitchFamily="34" charset="0"/>
+                <a:ea typeface="Calibri" pitchFamily="34" charset="-122"/>
+                <a:cs typeface="Calibri" pitchFamily="34" charset="-120"/>
+              </a:rPr>
+              <a:t>Compensation: Service Credit</a:t>
             </a:r>
             <a:endParaRPr lang="en-US" sz="950" dirty="0"/>
           </a:p>
@@ -4461,11 +4461,11 @@
             </a:avLst>
           </a:prstGeom>
           <a:solidFill>
-            <a:srgbClr val="161B22"/>
+            <a:srgbClr val="F5F1EB"/>
           </a:solidFill>
           <a:ln w="12700">
             <a:solidFill>
-              <a:srgbClr val="30363D"/>
+              <a:srgbClr val="D6CCBF"/>
             </a:solidFill>
             <a:prstDash val="solid"/>
           </a:ln>
@@ -4498,13 +4498,13 @@
             <a:r>
               <a:rPr lang="en-US" sz="950" b="1" dirty="0">
                 <a:solidFill>
-                  <a:srgbClr val="58A6FF"/>
-                </a:solidFill>
-                <a:latin typeface="Calibri" pitchFamily="34" charset="0"/>
-                <a:ea typeface="Calibri" pitchFamily="34" charset="-122"/>
-                <a:cs typeface="Calibri" pitchFamily="34" charset="-120"/>
-              </a:rPr>
-              <a:t>SLO &lt; SLA (保留緩衝)</a:t>
+                  <a:srgbClr val="4A7FB5"/>
+                </a:solidFill>
+                <a:latin typeface="Calibri" pitchFamily="34" charset="0"/>
+                <a:ea typeface="Calibri" pitchFamily="34" charset="-122"/>
+                <a:cs typeface="Calibri" pitchFamily="34" charset="-120"/>
+              </a:rPr>
+              <a:t>SLO &lt; SLA (keep buffer)</a:t>
             </a:r>
             <a:endParaRPr lang="en-US" sz="950" dirty="0"/>
           </a:p>
@@ -4527,11 +4527,11 @@
             </a:avLst>
           </a:prstGeom>
           <a:solidFill>
-            <a:srgbClr val="161B22"/>
+            <a:srgbClr val="F5F1EB"/>
           </a:solidFill>
           <a:ln w="12700">
             <a:solidFill>
-              <a:srgbClr val="30363D"/>
+              <a:srgbClr val="D6CCBF"/>
             </a:solidFill>
             <a:prstDash val="solid"/>
           </a:ln>
@@ -4564,13 +4564,13 @@
             <a:r>
               <a:rPr lang="en-US" sz="950" i="1" dirty="0">
                 <a:solidFill>
-                  <a:srgbClr val="8B949E"/>
-                </a:solidFill>
-                <a:latin typeface="Calibri" pitchFamily="34" charset="0"/>
-                <a:ea typeface="Calibri" pitchFamily="34" charset="-122"/>
-                <a:cs typeface="Calibri" pitchFamily="34" charset="-120"/>
-              </a:rPr>
-              <a:t>「SLO 是內部目標，SLA 是外部承諾」</a:t>
+                  <a:srgbClr val="8A8078"/>
+                </a:solidFill>
+                <a:latin typeface="Calibri" pitchFamily="34" charset="0"/>
+                <a:ea typeface="Calibri" pitchFamily="34" charset="-122"/>
+                <a:cs typeface="Calibri" pitchFamily="34" charset="-120"/>
+              </a:rPr>
+              <a:t>"SLO is the internal target, SLA is the external commitment"</a:t>
             </a:r>
             <a:endParaRPr lang="en-US" sz="950" dirty="0"/>
           </a:p>
@@ -4593,7 +4593,7 @@
           <a:noFill/>
           <a:ln w="19050">
             <a:solidFill>
-              <a:srgbClr val="8B949E"/>
+              <a:srgbClr val="8A8078"/>
             </a:solidFill>
             <a:prstDash val="solid"/>
             <a:tailEnd type="arrow"/>
@@ -4627,7 +4627,7 @@
             <a:r>
               <a:rPr lang="en-US" sz="650" dirty="0">
                 <a:solidFill>
-                  <a:srgbClr val="8B949E"/>
+                  <a:srgbClr val="8A8078"/>
                 </a:solidFill>
                 <a:latin typeface="Calibri" pitchFamily="34" charset="0"/>
                 <a:ea typeface="Calibri" pitchFamily="34" charset="-122"/>
@@ -4656,7 +4656,7 @@
           <a:noFill/>
           <a:ln w="19050">
             <a:solidFill>
-              <a:srgbClr val="8B949E"/>
+              <a:srgbClr val="8A8078"/>
             </a:solidFill>
             <a:prstDash val="solid"/>
             <a:tailEnd type="arrow"/>
@@ -4690,7 +4690,7 @@
             <a:r>
               <a:rPr lang="en-US" sz="650" dirty="0">
                 <a:solidFill>
-                  <a:srgbClr val="8B949E"/>
+                  <a:srgbClr val="8A8078"/>
                 </a:solidFill>
                 <a:latin typeface="Calibri" pitchFamily="34" charset="0"/>
                 <a:ea typeface="Calibri" pitchFamily="34" charset="-122"/>
@@ -4719,11 +4719,11 @@
             </a:avLst>
           </a:prstGeom>
           <a:solidFill>
-            <a:srgbClr val="0A1929"/>
+            <a:srgbClr val="EAF0F7"/>
           </a:solidFill>
           <a:ln w="9525">
             <a:solidFill>
-              <a:srgbClr val="58A6FF"/>
+              <a:srgbClr val="4A7FB5"/>
             </a:solidFill>
             <a:prstDash val="solid"/>
           </a:ln>
@@ -4756,13 +4756,13 @@
             <a:r>
               <a:rPr lang="en-US" sz="1000" i="1" dirty="0">
                 <a:solidFill>
-                  <a:srgbClr val="8B949E"/>
-                </a:solidFill>
-                <a:latin typeface="Calibri" pitchFamily="34" charset="0"/>
-                <a:ea typeface="Calibri" pitchFamily="34" charset="-122"/>
-                <a:cs typeface="Calibri" pitchFamily="34" charset="-120"/>
-              </a:rPr>
-              <a:t>💡  SLO 要比 SLA 嚴格 10x — SLA 是 99.9%，你的 SLO 應該是 99.99%，中間是 Error Budget</a:t>
+                  <a:srgbClr val="8A8078"/>
+                </a:solidFill>
+                <a:latin typeface="Calibri" pitchFamily="34" charset="0"/>
+                <a:ea typeface="Calibri" pitchFamily="34" charset="-122"/>
+                <a:cs typeface="Calibri" pitchFamily="34" charset="-120"/>
+              </a:rPr>
+              <a:t>💡  SLO should be 10x stricter than SLA — if SLA is 99.9%, your SLO should be 99.99%, the gap is your Error Budget</a:t>
             </a:r>
             <a:endParaRPr lang="en-US" sz="1000" dirty="0"/>
           </a:p>
@@ -4782,7 +4782,7 @@
     <p:bg>
       <p:bgPr>
         <a:solidFill>
-          <a:srgbClr val="0D1117"/>
+          <a:srgbClr val="FFFDF8"/>
         </a:solidFill>
       </p:bgPr>
     </p:bg>
@@ -4815,11 +4815,11 @@
             <a:avLst/>
           </a:prstGeom>
           <a:solidFill>
-            <a:srgbClr val="161B22"/>
+            <a:srgbClr val="F5F1EB"/>
           </a:solidFill>
           <a:ln w="6350">
             <a:solidFill>
-              <a:srgbClr val="30363D"/>
+              <a:srgbClr val="D6CCBF"/>
             </a:solidFill>
             <a:prstDash val="solid"/>
           </a:ln>
@@ -4840,11 +4840,11 @@
             <a:avLst/>
           </a:prstGeom>
           <a:solidFill>
-            <a:srgbClr val="D29922"/>
+            <a:srgbClr val="B8892C"/>
           </a:solidFill>
           <a:ln w="12700">
             <a:solidFill>
-              <a:srgbClr val="D29922"/>
+              <a:srgbClr val="B8892C"/>
             </a:solidFill>
             <a:prstDash val="solid"/>
           </a:ln>
@@ -4877,13 +4877,13 @@
             <a:r>
               <a:rPr lang="en-US" sz="1600" b="1" dirty="0">
                 <a:solidFill>
-                  <a:srgbClr val="E6EDF3"/>
-                </a:solidFill>
-                <a:latin typeface="Calibri" pitchFamily="34" charset="0"/>
-                <a:ea typeface="Calibri" pitchFamily="34" charset="-122"/>
-                <a:cs typeface="Calibri" pitchFamily="34" charset="-120"/>
-              </a:rPr>
-              <a:t>Error Budget：把停機時間變成決策工具</a:t>
+                  <a:srgbClr val="2D2926"/>
+                </a:solidFill>
+                <a:latin typeface="Calibri" pitchFamily="34" charset="0"/>
+                <a:ea typeface="Calibri" pitchFamily="34" charset="-122"/>
+                <a:cs typeface="Calibri" pitchFamily="34" charset="-120"/>
+              </a:rPr>
+              <a:t>Error Budget: Turning Downtime into a Decision Tool</a:t>
             </a:r>
             <a:endParaRPr lang="en-US" sz="1600" dirty="0"/>
           </a:p>
@@ -4916,13 +4916,13 @@
             <a:r>
               <a:rPr lang="en-US" sz="850" dirty="0">
                 <a:solidFill>
-                  <a:srgbClr val="8B949E"/>
-                </a:solidFill>
-                <a:latin typeface="Calibri" pitchFamily="34" charset="0"/>
-                <a:ea typeface="Calibri" pitchFamily="34" charset="-122"/>
-                <a:cs typeface="Calibri" pitchFamily="34" charset="-120"/>
-              </a:rPr>
-              <a:t>PART 6  ·  45 / 50</a:t>
+                  <a:srgbClr val="8A8078"/>
+                </a:solidFill>
+                <a:latin typeface="Calibri" pitchFamily="34" charset="0"/>
+                <a:ea typeface="Calibri" pitchFamily="34" charset="-122"/>
+                <a:cs typeface="Calibri" pitchFamily="34" charset="-120"/>
+              </a:rPr>
+              <a:t>PART 6</a:t>
             </a:r>
             <a:endParaRPr lang="en-US" sz="850" dirty="0"/>
           </a:p>
@@ -4945,11 +4945,11 @@
             </a:avLst>
           </a:prstGeom>
           <a:solidFill>
-            <a:srgbClr val="161B22"/>
+            <a:srgbClr val="F5F1EB"/>
           </a:solidFill>
           <a:ln w="19050">
             <a:solidFill>
-              <a:srgbClr val="D29922"/>
+              <a:srgbClr val="B8892C"/>
             </a:solidFill>
             <a:prstDash val="solid"/>
           </a:ln>
@@ -4982,7 +4982,7 @@
             <a:r>
               <a:rPr lang="en-US" sz="1600" b="1" dirty="0">
                 <a:solidFill>
-                  <a:srgbClr val="D29922"/>
+                  <a:srgbClr val="B8892C"/>
                 </a:solidFill>
                 <a:latin typeface="Calibri" pitchFamily="34" charset="0"/>
                 <a:ea typeface="Calibri" pitchFamily="34" charset="-122"/>
@@ -5021,13 +5021,13 @@
             <a:r>
               <a:rPr lang="en-US" sz="1000" dirty="0">
                 <a:solidFill>
-                  <a:srgbClr val="8B949E"/>
-                </a:solidFill>
-                <a:latin typeface="Calibri" pitchFamily="34" charset="0"/>
-                <a:ea typeface="Calibri" pitchFamily="34" charset="-122"/>
-                <a:cs typeface="Calibri" pitchFamily="34" charset="-120"/>
-              </a:rPr>
-              <a:t>SLO = 99.9%  →  Error Budget = 0.1% = 43.8 分鐘/月</a:t>
+                  <a:srgbClr val="8A8078"/>
+                </a:solidFill>
+                <a:latin typeface="Calibri" pitchFamily="34" charset="0"/>
+                <a:ea typeface="Calibri" pitchFamily="34" charset="-122"/>
+                <a:cs typeface="Calibri" pitchFamily="34" charset="-120"/>
+              </a:rPr>
+              <a:t>SLO = 99.9%  →  Error Budget = 0.1% = 43.8 min/month</a:t>
             </a:r>
             <a:endParaRPr lang="en-US" sz="1000" dirty="0"/>
           </a:p>
@@ -5050,11 +5050,11 @@
             </a:avLst>
           </a:prstGeom>
           <a:solidFill>
-            <a:srgbClr val="0F2A1A"/>
+            <a:srgbClr val="E5F0E9"/>
           </a:solidFill>
           <a:ln w="19050">
             <a:solidFill>
-              <a:srgbClr val="3FB950"/>
+              <a:srgbClr val="4A9968"/>
             </a:solidFill>
             <a:prstDash val="solid"/>
           </a:ln>
@@ -5087,13 +5087,13 @@
             <a:r>
               <a:rPr lang="en-US" sz="1050" b="1" dirty="0">
                 <a:solidFill>
-                  <a:srgbClr val="3FB950"/>
-                </a:solidFill>
-                <a:latin typeface="Calibri" pitchFamily="34" charset="0"/>
-                <a:ea typeface="Calibri" pitchFamily="34" charset="-122"/>
-                <a:cs typeface="Calibri" pitchFamily="34" charset="-120"/>
-              </a:rPr>
-              <a:t>✅ Budget 充足 → 可以快速部署新功能</a:t>
+                  <a:srgbClr val="4A9968"/>
+                </a:solidFill>
+                <a:latin typeface="Calibri" pitchFamily="34" charset="0"/>
+                <a:ea typeface="Calibri" pitchFamily="34" charset="-122"/>
+                <a:cs typeface="Calibri" pitchFamily="34" charset="-120"/>
+              </a:rPr>
+              <a:t>✅ Budget Sufficient → Deploy new features rapidly</a:t>
             </a:r>
             <a:endParaRPr lang="en-US" sz="1050" dirty="0"/>
           </a:p>
@@ -5116,11 +5116,11 @@
             </a:avLst>
           </a:prstGeom>
           <a:solidFill>
-            <a:srgbClr val="2A0F0F"/>
+            <a:srgbClr val="F8ECEC"/>
           </a:solidFill>
           <a:ln w="19050">
             <a:solidFill>
-              <a:srgbClr val="F85149"/>
+              <a:srgbClr val="C4605B"/>
             </a:solidFill>
             <a:prstDash val="solid"/>
           </a:ln>
@@ -5153,13 +5153,13 @@
             <a:r>
               <a:rPr lang="en-US" sz="1050" b="1" dirty="0">
                 <a:solidFill>
-                  <a:srgbClr val="F85149"/>
-                </a:solidFill>
-                <a:latin typeface="Calibri" pitchFamily="34" charset="0"/>
-                <a:ea typeface="Calibri" pitchFamily="34" charset="-122"/>
-                <a:cs typeface="Calibri" pitchFamily="34" charset="-120"/>
-              </a:rPr>
-              <a:t>🚨 Budget 耗盡 → 停止功能部署，專注穩定性</a:t>
+                  <a:srgbClr val="C4605B"/>
+                </a:solidFill>
+                <a:latin typeface="Calibri" pitchFamily="34" charset="0"/>
+                <a:ea typeface="Calibri" pitchFamily="34" charset="-122"/>
+                <a:cs typeface="Calibri" pitchFamily="34" charset="-120"/>
+              </a:rPr>
+              <a:t>🚨 Budget Exhausted → Freeze feature deploys, focus on stability</a:t>
             </a:r>
             <a:endParaRPr lang="en-US" sz="1050" dirty="0"/>
           </a:p>
@@ -5182,11 +5182,11 @@
             </a:avLst>
           </a:prstGeom>
           <a:solidFill>
-            <a:srgbClr val="161B22"/>
+            <a:srgbClr val="F5F1EB"/>
           </a:solidFill>
           <a:ln w="19050">
             <a:solidFill>
-              <a:srgbClr val="6E40C9"/>
+              <a:srgbClr val="8B6AB5"/>
             </a:solidFill>
             <a:prstDash val="solid"/>
           </a:ln>
@@ -5219,7 +5219,7 @@
             <a:r>
               <a:rPr lang="en-US" sz="1100" b="1" dirty="0">
                 <a:solidFill>
-                  <a:srgbClr val="6E40C9"/>
+                  <a:srgbClr val="8B6AB5"/>
                 </a:solidFill>
                 <a:latin typeface="Calibri" pitchFamily="34" charset="0"/>
                 <a:ea typeface="Calibri" pitchFamily="34" charset="-122"/>
@@ -5258,13 +5258,13 @@
             <a:r>
               <a:rPr lang="en-US" sz="950" dirty="0">
                 <a:solidFill>
-                  <a:srgbClr val="8B949E"/>
-                </a:solidFill>
-                <a:latin typeface="Calibri" pitchFamily="34" charset="0"/>
-                <a:ea typeface="Calibri" pitchFamily="34" charset="-122"/>
-                <a:cs typeface="Calibri" pitchFamily="34" charset="-120"/>
-              </a:rPr>
-              <a:t>• Budget &gt; 50%：正常部署，可做風險部署</a:t>
+                  <a:srgbClr val="8A8078"/>
+                </a:solidFill>
+                <a:latin typeface="Calibri" pitchFamily="34" charset="0"/>
+                <a:ea typeface="Calibri" pitchFamily="34" charset="-122"/>
+                <a:cs typeface="Calibri" pitchFamily="34" charset="-120"/>
+              </a:rPr>
+              <a:t>• Budget &gt; 50%: Normal deploys, risky deploys allowed</a:t>
             </a:r>
             <a:endParaRPr lang="en-US" sz="950" dirty="0"/>
           </a:p>
@@ -5297,13 +5297,13 @@
             <a:r>
               <a:rPr lang="en-US" sz="950" dirty="0">
                 <a:solidFill>
-                  <a:srgbClr val="D29922"/>
-                </a:solidFill>
-                <a:latin typeface="Calibri" pitchFamily="34" charset="0"/>
-                <a:ea typeface="Calibri" pitchFamily="34" charset="-122"/>
-                <a:cs typeface="Calibri" pitchFamily="34" charset="-120"/>
-              </a:rPr>
-              <a:t>• Budget 25-50%：謹慎部署，加強測試</a:t>
+                  <a:srgbClr val="B8892C"/>
+                </a:solidFill>
+                <a:latin typeface="Calibri" pitchFamily="34" charset="0"/>
+                <a:ea typeface="Calibri" pitchFamily="34" charset="-122"/>
+                <a:cs typeface="Calibri" pitchFamily="34" charset="-120"/>
+              </a:rPr>
+              <a:t>• Budget 25-50%: Deploy cautiously, increase testing</a:t>
             </a:r>
             <a:endParaRPr lang="en-US" sz="950" dirty="0"/>
           </a:p>
@@ -5336,13 +5336,13 @@
             <a:r>
               <a:rPr lang="en-US" sz="950" b="1" dirty="0">
                 <a:solidFill>
-                  <a:srgbClr val="F85149"/>
-                </a:solidFill>
-                <a:latin typeface="Calibri" pitchFamily="34" charset="0"/>
-                <a:ea typeface="Calibri" pitchFamily="34" charset="-122"/>
-                <a:cs typeface="Calibri" pitchFamily="34" charset="-120"/>
-              </a:rPr>
-              <a:t>• Budget &lt; 25%：凍結功能部署</a:t>
+                  <a:srgbClr val="C4605B"/>
+                </a:solidFill>
+                <a:latin typeface="Calibri" pitchFamily="34" charset="0"/>
+                <a:ea typeface="Calibri" pitchFamily="34" charset="-122"/>
+                <a:cs typeface="Calibri" pitchFamily="34" charset="-120"/>
+              </a:rPr>
+              <a:t>• Budget &lt; 25%: Freeze feature deployments</a:t>
             </a:r>
             <a:endParaRPr lang="en-US" sz="950" dirty="0"/>
           </a:p>
@@ -5375,13 +5375,13 @@
             <a:r>
               <a:rPr lang="en-US" sz="1100" b="1" dirty="0">
                 <a:solidFill>
-                  <a:srgbClr val="8B949E"/>
-                </a:solidFill>
-                <a:latin typeface="Calibri" pitchFamily="34" charset="0"/>
-                <a:ea typeface="Calibri" pitchFamily="34" charset="-122"/>
-                <a:cs typeface="Calibri" pitchFamily="34" charset="-120"/>
-              </a:rPr>
-              <a:t>2024 年 Monthly Error Budget 消耗</a:t>
+                  <a:srgbClr val="8A8078"/>
+                </a:solidFill>
+                <a:latin typeface="Calibri" pitchFamily="34" charset="0"/>
+                <a:ea typeface="Calibri" pitchFamily="34" charset="-122"/>
+                <a:cs typeface="Calibri" pitchFamily="34" charset="-120"/>
+              </a:rPr>
+              <a:t>2024 Monthly Error Budget Consumption</a:t>
             </a:r>
             <a:endParaRPr lang="en-US" sz="1100" dirty="0"/>
           </a:p>
@@ -5404,7 +5404,7 @@
           <a:noFill/>
           <a:ln w="12700">
             <a:solidFill>
-              <a:srgbClr val="F85149"/>
+              <a:srgbClr val="C4605B"/>
             </a:solidFill>
             <a:prstDash val="dash"/>
           </a:ln>
@@ -5437,7 +5437,7 @@
             <a:r>
               <a:rPr lang="en-US" sz="750" dirty="0">
                 <a:solidFill>
-                  <a:srgbClr val="F85149"/>
+                  <a:srgbClr val="C4605B"/>
                 </a:solidFill>
                 <a:latin typeface="Calibri" pitchFamily="34" charset="0"/>
                 <a:ea typeface="Calibri" pitchFamily="34" charset="-122"/>
@@ -5466,11 +5466,11 @@
             </a:avLst>
           </a:prstGeom>
           <a:solidFill>
-            <a:srgbClr val="F85149"/>
+            <a:srgbClr val="C4605B"/>
           </a:solidFill>
           <a:ln w="6350">
             <a:solidFill>
-              <a:srgbClr val="F85149"/>
+              <a:srgbClr val="C4605B"/>
             </a:solidFill>
             <a:prstDash val="solid"/>
           </a:ln>
@@ -5503,7 +5503,7 @@
             <a:r>
               <a:rPr lang="en-US" sz="750" dirty="0">
                 <a:solidFill>
-                  <a:srgbClr val="8B949E"/>
+                  <a:srgbClr val="8A8078"/>
                 </a:solidFill>
                 <a:latin typeface="Calibri" pitchFamily="34" charset="0"/>
                 <a:ea typeface="Calibri" pitchFamily="34" charset="-122"/>
@@ -5542,7 +5542,7 @@
             <a:r>
               <a:rPr lang="en-US" sz="650" dirty="0">
                 <a:solidFill>
-                  <a:srgbClr val="F85149"/>
+                  <a:srgbClr val="C4605B"/>
                 </a:solidFill>
                 <a:latin typeface="Calibri" pitchFamily="34" charset="0"/>
                 <a:ea typeface="Calibri" pitchFamily="34" charset="-122"/>
@@ -5571,11 +5571,11 @@
             </a:avLst>
           </a:prstGeom>
           <a:solidFill>
-            <a:srgbClr val="3FB950"/>
+            <a:srgbClr val="4A9968"/>
           </a:solidFill>
           <a:ln w="6350">
             <a:solidFill>
-              <a:srgbClr val="3FB950"/>
+              <a:srgbClr val="4A9968"/>
             </a:solidFill>
             <a:prstDash val="solid"/>
           </a:ln>
@@ -5608,7 +5608,7 @@
             <a:r>
               <a:rPr lang="en-US" sz="750" dirty="0">
                 <a:solidFill>
-                  <a:srgbClr val="8B949E"/>
+                  <a:srgbClr val="8A8078"/>
                 </a:solidFill>
                 <a:latin typeface="Calibri" pitchFamily="34" charset="0"/>
                 <a:ea typeface="Calibri" pitchFamily="34" charset="-122"/>
@@ -5647,7 +5647,7 @@
             <a:r>
               <a:rPr lang="en-US" sz="650" dirty="0">
                 <a:solidFill>
-                  <a:srgbClr val="3FB950"/>
+                  <a:srgbClr val="4A9968"/>
                 </a:solidFill>
                 <a:latin typeface="Calibri" pitchFamily="34" charset="0"/>
                 <a:ea typeface="Calibri" pitchFamily="34" charset="-122"/>
@@ -5676,11 +5676,11 @@
             </a:avLst>
           </a:prstGeom>
           <a:solidFill>
-            <a:srgbClr val="3FB950"/>
+            <a:srgbClr val="4A9968"/>
           </a:solidFill>
           <a:ln w="6350">
             <a:solidFill>
-              <a:srgbClr val="3FB950"/>
+              <a:srgbClr val="4A9968"/>
             </a:solidFill>
             <a:prstDash val="solid"/>
           </a:ln>
@@ -5713,7 +5713,7 @@
             <a:r>
               <a:rPr lang="en-US" sz="750" dirty="0">
                 <a:solidFill>
-                  <a:srgbClr val="8B949E"/>
+                  <a:srgbClr val="8A8078"/>
                 </a:solidFill>
                 <a:latin typeface="Calibri" pitchFamily="34" charset="0"/>
                 <a:ea typeface="Calibri" pitchFamily="34" charset="-122"/>
@@ -5752,7 +5752,7 @@
             <a:r>
               <a:rPr lang="en-US" sz="650" dirty="0">
                 <a:solidFill>
-                  <a:srgbClr val="3FB950"/>
+                  <a:srgbClr val="4A9968"/>
                 </a:solidFill>
                 <a:latin typeface="Calibri" pitchFamily="34" charset="0"/>
                 <a:ea typeface="Calibri" pitchFamily="34" charset="-122"/>
@@ -5781,11 +5781,11 @@
             </a:avLst>
           </a:prstGeom>
           <a:solidFill>
-            <a:srgbClr val="D29922"/>
+            <a:srgbClr val="B8892C"/>
           </a:solidFill>
           <a:ln w="6350">
             <a:solidFill>
-              <a:srgbClr val="D29922"/>
+              <a:srgbClr val="B8892C"/>
             </a:solidFill>
             <a:prstDash val="solid"/>
           </a:ln>
@@ -5818,7 +5818,7 @@
             <a:r>
               <a:rPr lang="en-US" sz="750" dirty="0">
                 <a:solidFill>
-                  <a:srgbClr val="8B949E"/>
+                  <a:srgbClr val="8A8078"/>
                 </a:solidFill>
                 <a:latin typeface="Calibri" pitchFamily="34" charset="0"/>
                 <a:ea typeface="Calibri" pitchFamily="34" charset="-122"/>
@@ -5857,7 +5857,7 @@
             <a:r>
               <a:rPr lang="en-US" sz="650" dirty="0">
                 <a:solidFill>
-                  <a:srgbClr val="D29922"/>
+                  <a:srgbClr val="B8892C"/>
                 </a:solidFill>
                 <a:latin typeface="Calibri" pitchFamily="34" charset="0"/>
                 <a:ea typeface="Calibri" pitchFamily="34" charset="-122"/>
@@ -5886,11 +5886,11 @@
             </a:avLst>
           </a:prstGeom>
           <a:solidFill>
-            <a:srgbClr val="F85149"/>
+            <a:srgbClr val="C4605B"/>
           </a:solidFill>
           <a:ln w="6350">
             <a:solidFill>
-              <a:srgbClr val="F85149"/>
+              <a:srgbClr val="C4605B"/>
             </a:solidFill>
             <a:prstDash val="solid"/>
           </a:ln>
@@ -5923,7 +5923,7 @@
             <a:r>
               <a:rPr lang="en-US" sz="750" dirty="0">
                 <a:solidFill>
-                  <a:srgbClr val="8B949E"/>
+                  <a:srgbClr val="8A8078"/>
                 </a:solidFill>
                 <a:latin typeface="Calibri" pitchFamily="34" charset="0"/>
                 <a:ea typeface="Calibri" pitchFamily="34" charset="-122"/>
@@ -5962,7 +5962,7 @@
             <a:r>
               <a:rPr lang="en-US" sz="650" dirty="0">
                 <a:solidFill>
-                  <a:srgbClr val="F85149"/>
+                  <a:srgbClr val="C4605B"/>
                 </a:solidFill>
                 <a:latin typeface="Calibri" pitchFamily="34" charset="0"/>
                 <a:ea typeface="Calibri" pitchFamily="34" charset="-122"/>
@@ -5991,11 +5991,11 @@
             </a:avLst>
           </a:prstGeom>
           <a:solidFill>
-            <a:srgbClr val="3FB950"/>
+            <a:srgbClr val="4A9968"/>
           </a:solidFill>
           <a:ln w="6350">
             <a:solidFill>
-              <a:srgbClr val="3FB950"/>
+              <a:srgbClr val="4A9968"/>
             </a:solidFill>
             <a:prstDash val="solid"/>
           </a:ln>
@@ -6028,7 +6028,7 @@
             <a:r>
               <a:rPr lang="en-US" sz="750" dirty="0">
                 <a:solidFill>
-                  <a:srgbClr val="8B949E"/>
+                  <a:srgbClr val="8A8078"/>
                 </a:solidFill>
                 <a:latin typeface="Calibri" pitchFamily="34" charset="0"/>
                 <a:ea typeface="Calibri" pitchFamily="34" charset="-122"/>
@@ -6067,7 +6067,7 @@
             <a:r>
               <a:rPr lang="en-US" sz="650" dirty="0">
                 <a:solidFill>
-                  <a:srgbClr val="3FB950"/>
+                  <a:srgbClr val="4A9968"/>
                 </a:solidFill>
                 <a:latin typeface="Calibri" pitchFamily="34" charset="0"/>
                 <a:ea typeface="Calibri" pitchFamily="34" charset="-122"/>
@@ -6096,11 +6096,11 @@
             </a:avLst>
           </a:prstGeom>
           <a:solidFill>
-            <a:srgbClr val="3FB950"/>
+            <a:srgbClr val="4A9968"/>
           </a:solidFill>
           <a:ln w="6350">
             <a:solidFill>
-              <a:srgbClr val="3FB950"/>
+              <a:srgbClr val="4A9968"/>
             </a:solidFill>
             <a:prstDash val="solid"/>
           </a:ln>
@@ -6133,7 +6133,7 @@
             <a:r>
               <a:rPr lang="en-US" sz="750" dirty="0">
                 <a:solidFill>
-                  <a:srgbClr val="8B949E"/>
+                  <a:srgbClr val="8A8078"/>
                 </a:solidFill>
                 <a:latin typeface="Calibri" pitchFamily="34" charset="0"/>
                 <a:ea typeface="Calibri" pitchFamily="34" charset="-122"/>
@@ -6172,7 +6172,7 @@
             <a:r>
               <a:rPr lang="en-US" sz="650" dirty="0">
                 <a:solidFill>
-                  <a:srgbClr val="3FB950"/>
+                  <a:srgbClr val="4A9968"/>
                 </a:solidFill>
                 <a:latin typeface="Calibri" pitchFamily="34" charset="0"/>
                 <a:ea typeface="Calibri" pitchFamily="34" charset="-122"/>
@@ -6201,11 +6201,11 @@
             </a:avLst>
           </a:prstGeom>
           <a:solidFill>
-            <a:srgbClr val="3FB950"/>
+            <a:srgbClr val="4A9968"/>
           </a:solidFill>
           <a:ln w="6350">
             <a:solidFill>
-              <a:srgbClr val="3FB950"/>
+              <a:srgbClr val="4A9968"/>
             </a:solidFill>
             <a:prstDash val="solid"/>
           </a:ln>
@@ -6238,7 +6238,7 @@
             <a:r>
               <a:rPr lang="en-US" sz="750" dirty="0">
                 <a:solidFill>
-                  <a:srgbClr val="8B949E"/>
+                  <a:srgbClr val="8A8078"/>
                 </a:solidFill>
                 <a:latin typeface="Calibri" pitchFamily="34" charset="0"/>
                 <a:ea typeface="Calibri" pitchFamily="34" charset="-122"/>
@@ -6277,7 +6277,7 @@
             <a:r>
               <a:rPr lang="en-US" sz="650" dirty="0">
                 <a:solidFill>
-                  <a:srgbClr val="3FB950"/>
+                  <a:srgbClr val="4A9968"/>
                 </a:solidFill>
                 <a:latin typeface="Calibri" pitchFamily="34" charset="0"/>
                 <a:ea typeface="Calibri" pitchFamily="34" charset="-122"/>
@@ -6306,11 +6306,11 @@
             </a:avLst>
           </a:prstGeom>
           <a:solidFill>
-            <a:srgbClr val="D29922"/>
+            <a:srgbClr val="B8892C"/>
           </a:solidFill>
           <a:ln w="6350">
             <a:solidFill>
-              <a:srgbClr val="D29922"/>
+              <a:srgbClr val="B8892C"/>
             </a:solidFill>
             <a:prstDash val="solid"/>
           </a:ln>
@@ -6343,7 +6343,7 @@
             <a:r>
               <a:rPr lang="en-US" sz="750" dirty="0">
                 <a:solidFill>
-                  <a:srgbClr val="8B949E"/>
+                  <a:srgbClr val="8A8078"/>
                 </a:solidFill>
                 <a:latin typeface="Calibri" pitchFamily="34" charset="0"/>
                 <a:ea typeface="Calibri" pitchFamily="34" charset="-122"/>
@@ -6382,7 +6382,7 @@
             <a:r>
               <a:rPr lang="en-US" sz="650" dirty="0">
                 <a:solidFill>
-                  <a:srgbClr val="D29922"/>
+                  <a:srgbClr val="B8892C"/>
                 </a:solidFill>
                 <a:latin typeface="Calibri" pitchFamily="34" charset="0"/>
                 <a:ea typeface="Calibri" pitchFamily="34" charset="-122"/>
@@ -6411,11 +6411,11 @@
             </a:avLst>
           </a:prstGeom>
           <a:solidFill>
-            <a:srgbClr val="F85149"/>
+            <a:srgbClr val="C4605B"/>
           </a:solidFill>
           <a:ln w="6350">
             <a:solidFill>
-              <a:srgbClr val="F85149"/>
+              <a:srgbClr val="C4605B"/>
             </a:solidFill>
             <a:prstDash val="solid"/>
           </a:ln>
@@ -6448,7 +6448,7 @@
             <a:r>
               <a:rPr lang="en-US" sz="750" dirty="0">
                 <a:solidFill>
-                  <a:srgbClr val="8B949E"/>
+                  <a:srgbClr val="8A8078"/>
                 </a:solidFill>
                 <a:latin typeface="Calibri" pitchFamily="34" charset="0"/>
                 <a:ea typeface="Calibri" pitchFamily="34" charset="-122"/>
@@ -6487,7 +6487,7 @@
             <a:r>
               <a:rPr lang="en-US" sz="650" dirty="0">
                 <a:solidFill>
-                  <a:srgbClr val="F85149"/>
+                  <a:srgbClr val="C4605B"/>
                 </a:solidFill>
                 <a:latin typeface="Calibri" pitchFamily="34" charset="0"/>
                 <a:ea typeface="Calibri" pitchFamily="34" charset="-122"/>
@@ -6516,11 +6516,11 @@
             </a:avLst>
           </a:prstGeom>
           <a:solidFill>
-            <a:srgbClr val="D29922"/>
+            <a:srgbClr val="B8892C"/>
           </a:solidFill>
           <a:ln w="6350">
             <a:solidFill>
-              <a:srgbClr val="D29922"/>
+              <a:srgbClr val="B8892C"/>
             </a:solidFill>
             <a:prstDash val="solid"/>
           </a:ln>
@@ -6553,7 +6553,7 @@
             <a:r>
               <a:rPr lang="en-US" sz="750" dirty="0">
                 <a:solidFill>
-                  <a:srgbClr val="8B949E"/>
+                  <a:srgbClr val="8A8078"/>
                 </a:solidFill>
                 <a:latin typeface="Calibri" pitchFamily="34" charset="0"/>
                 <a:ea typeface="Calibri" pitchFamily="34" charset="-122"/>
@@ -6592,7 +6592,7 @@
             <a:r>
               <a:rPr lang="en-US" sz="650" dirty="0">
                 <a:solidFill>
-                  <a:srgbClr val="D29922"/>
+                  <a:srgbClr val="B8892C"/>
                 </a:solidFill>
                 <a:latin typeface="Calibri" pitchFamily="34" charset="0"/>
                 <a:ea typeface="Calibri" pitchFamily="34" charset="-122"/>
@@ -6621,11 +6621,11 @@
             </a:avLst>
           </a:prstGeom>
           <a:solidFill>
-            <a:srgbClr val="3FB950"/>
+            <a:srgbClr val="4A9968"/>
           </a:solidFill>
           <a:ln w="6350">
             <a:solidFill>
-              <a:srgbClr val="3FB950"/>
+              <a:srgbClr val="4A9968"/>
             </a:solidFill>
             <a:prstDash val="solid"/>
           </a:ln>
@@ -6658,7 +6658,7 @@
             <a:r>
               <a:rPr lang="en-US" sz="750" dirty="0">
                 <a:solidFill>
-                  <a:srgbClr val="8B949E"/>
+                  <a:srgbClr val="8A8078"/>
                 </a:solidFill>
                 <a:latin typeface="Calibri" pitchFamily="34" charset="0"/>
                 <a:ea typeface="Calibri" pitchFamily="34" charset="-122"/>
@@ -6697,7 +6697,7 @@
             <a:r>
               <a:rPr lang="en-US" sz="650" dirty="0">
                 <a:solidFill>
-                  <a:srgbClr val="3FB950"/>
+                  <a:srgbClr val="4A9968"/>
                 </a:solidFill>
                 <a:latin typeface="Calibri" pitchFamily="34" charset="0"/>
                 <a:ea typeface="Calibri" pitchFamily="34" charset="-122"/>
@@ -6726,11 +6726,11 @@
             </a:avLst>
           </a:prstGeom>
           <a:solidFill>
-            <a:srgbClr val="2A0F0F"/>
+            <a:srgbClr val="F8ECEC"/>
           </a:solidFill>
           <a:ln w="12700">
             <a:solidFill>
-              <a:srgbClr val="F85149"/>
+              <a:srgbClr val="C4605B"/>
             </a:solidFill>
             <a:prstDash val="solid"/>
           </a:ln>
@@ -6763,13 +6763,13 @@
             <a:r>
               <a:rPr lang="en-US" sz="1050" b="1" dirty="0">
                 <a:solidFill>
-                  <a:srgbClr val="F85149"/>
-                </a:solidFill>
-                <a:latin typeface="Calibri" pitchFamily="34" charset="0"/>
-                <a:ea typeface="Calibri" pitchFamily="34" charset="-122"/>
-                <a:cs typeface="Calibri" pitchFamily="34" charset="-120"/>
-              </a:rPr>
-              <a:t>🔥  10月份 Error Budget 耗盡！→ 立即凍結功能部署，SRE 介入穩定性改善</a:t>
+                  <a:srgbClr val="C4605B"/>
+                </a:solidFill>
+                <a:latin typeface="Calibri" pitchFamily="34" charset="0"/>
+                <a:ea typeface="Calibri" pitchFamily="34" charset="-122"/>
+                <a:cs typeface="Calibri" pitchFamily="34" charset="-120"/>
+              </a:rPr>
+              <a:t>🔥  October Error Budget exhausted! → Immediately freeze feature deploys, SRE intervenes for stability</a:t>
             </a:r>
             <a:endParaRPr lang="en-US" sz="1050" dirty="0"/>
           </a:p>
@@ -6792,11 +6792,11 @@
             </a:avLst>
           </a:prstGeom>
           <a:solidFill>
-            <a:srgbClr val="3D1515"/>
+            <a:srgbClr val="F8ECEC"/>
           </a:solidFill>
           <a:ln w="6350">
             <a:solidFill>
-              <a:srgbClr val="F85149"/>
+              <a:srgbClr val="C4605B"/>
             </a:solidFill>
             <a:prstDash val="solid"/>
           </a:ln>
@@ -6829,13 +6829,13 @@
             <a:r>
               <a:rPr lang="en-US" sz="750" dirty="0">
                 <a:solidFill>
-                  <a:srgbClr val="F85149"/>
-                </a:solidFill>
-                <a:latin typeface="Calibri" pitchFamily="34" charset="0"/>
-                <a:ea typeface="Calibri" pitchFamily="34" charset="-122"/>
-                <a:cs typeface="Calibri" pitchFamily="34" charset="-120"/>
-              </a:rPr>
-              <a:t>凍結部署</a:t>
+                  <a:srgbClr val="C4605B"/>
+                </a:solidFill>
+                <a:latin typeface="Calibri" pitchFamily="34" charset="0"/>
+                <a:ea typeface="Calibri" pitchFamily="34" charset="-122"/>
+                <a:cs typeface="Calibri" pitchFamily="34" charset="-120"/>
+              </a:rPr>
+              <a:t>Freeze Deploys</a:t>
             </a:r>
             <a:endParaRPr lang="en-US" sz="750" dirty="0"/>
           </a:p>
@@ -6858,11 +6858,11 @@
             </a:avLst>
           </a:prstGeom>
           <a:solidFill>
-            <a:srgbClr val="3D1515"/>
+            <a:srgbClr val="F8ECEC"/>
           </a:solidFill>
           <a:ln w="6350">
             <a:solidFill>
-              <a:srgbClr val="F85149"/>
+              <a:srgbClr val="C4605B"/>
             </a:solidFill>
             <a:prstDash val="solid"/>
           </a:ln>
@@ -6895,13 +6895,13 @@
             <a:r>
               <a:rPr lang="en-US" sz="750" dirty="0">
                 <a:solidFill>
-                  <a:srgbClr val="F85149"/>
-                </a:solidFill>
-                <a:latin typeface="Calibri" pitchFamily="34" charset="0"/>
-                <a:ea typeface="Calibri" pitchFamily="34" charset="-122"/>
-                <a:cs typeface="Calibri" pitchFamily="34" charset="-120"/>
-              </a:rPr>
-              <a:t>SRE 行動</a:t>
+                  <a:srgbClr val="C4605B"/>
+                </a:solidFill>
+                <a:latin typeface="Calibri" pitchFamily="34" charset="0"/>
+                <a:ea typeface="Calibri" pitchFamily="34" charset="-122"/>
+                <a:cs typeface="Calibri" pitchFamily="34" charset="-120"/>
+              </a:rPr>
+              <a:t>SRE Action</a:t>
             </a:r>
             <a:endParaRPr lang="en-US" sz="750" dirty="0"/>
           </a:p>
@@ -6924,11 +6924,11 @@
             </a:avLst>
           </a:prstGeom>
           <a:solidFill>
-            <a:srgbClr val="3D1515"/>
+            <a:srgbClr val="F8ECEC"/>
           </a:solidFill>
           <a:ln w="6350">
             <a:solidFill>
-              <a:srgbClr val="F85149"/>
+              <a:srgbClr val="C4605B"/>
             </a:solidFill>
             <a:prstDash val="solid"/>
           </a:ln>
@@ -6961,7 +6961,7 @@
             <a:r>
               <a:rPr lang="en-US" sz="750" dirty="0">
                 <a:solidFill>
-                  <a:srgbClr val="F85149"/>
+                  <a:srgbClr val="C4605B"/>
                 </a:solidFill>
                 <a:latin typeface="Calibri" pitchFamily="34" charset="0"/>
                 <a:ea typeface="Calibri" pitchFamily="34" charset="-122"/>
@@ -6990,11 +6990,11 @@
             </a:avLst>
           </a:prstGeom>
           <a:solidFill>
-            <a:srgbClr val="0A1929"/>
+            <a:srgbClr val="EAF0F7"/>
           </a:solidFill>
           <a:ln w="9525">
             <a:solidFill>
-              <a:srgbClr val="58A6FF"/>
+              <a:srgbClr val="4A7FB5"/>
             </a:solidFill>
             <a:prstDash val="solid"/>
           </a:ln>
@@ -7027,13 +7027,13 @@
             <a:r>
               <a:rPr lang="en-US" sz="1000" i="1" dirty="0">
                 <a:solidFill>
-                  <a:srgbClr val="8B949E"/>
-                </a:solidFill>
-                <a:latin typeface="Calibri" pitchFamily="34" charset="0"/>
-                <a:ea typeface="Calibri" pitchFamily="34" charset="-122"/>
-                <a:cs typeface="Calibri" pitchFamily="34" charset="-120"/>
-              </a:rPr>
-              <a:t>💡  Error Budget 讓 Dev 和 Ops 有共同語言 — 不是「穩定 vs 速度」，而是「剩多少 budget 可以花」</a:t>
+                  <a:srgbClr val="8A8078"/>
+                </a:solidFill>
+                <a:latin typeface="Calibri" pitchFamily="34" charset="0"/>
+                <a:ea typeface="Calibri" pitchFamily="34" charset="-122"/>
+                <a:cs typeface="Calibri" pitchFamily="34" charset="-120"/>
+              </a:rPr>
+              <a:t>💡  Error Budget gives Dev and Ops a shared language — not 'stability vs speed', but 'how much budget is left to spend'</a:t>
             </a:r>
             <a:endParaRPr lang="en-US" sz="1000" dirty="0"/>
           </a:p>
@@ -7053,7 +7053,7 @@
     <p:bg>
       <p:bgPr>
         <a:solidFill>
-          <a:srgbClr val="0D1117"/>
+          <a:srgbClr val="FFFDF8"/>
         </a:solidFill>
       </p:bgPr>
     </p:bg>
@@ -7086,11 +7086,11 @@
             <a:avLst/>
           </a:prstGeom>
           <a:solidFill>
-            <a:srgbClr val="161B22"/>
+            <a:srgbClr val="F5F1EB"/>
           </a:solidFill>
           <a:ln w="6350">
             <a:solidFill>
-              <a:srgbClr val="30363D"/>
+              <a:srgbClr val="D6CCBF"/>
             </a:solidFill>
             <a:prstDash val="solid"/>
           </a:ln>
@@ -7111,11 +7111,11 @@
             <a:avLst/>
           </a:prstGeom>
           <a:solidFill>
-            <a:srgbClr val="3FB950"/>
+            <a:srgbClr val="4A9968"/>
           </a:solidFill>
           <a:ln w="12700">
             <a:solidFill>
-              <a:srgbClr val="3FB950"/>
+              <a:srgbClr val="4A9968"/>
             </a:solidFill>
             <a:prstDash val="solid"/>
           </a:ln>
@@ -7148,13 +7148,13 @@
             <a:r>
               <a:rPr lang="en-US" sz="1600" b="1" dirty="0">
                 <a:solidFill>
-                  <a:srgbClr val="E6EDF3"/>
-                </a:solidFill>
-                <a:latin typeface="Calibri" pitchFamily="34" charset="0"/>
-                <a:ea typeface="Calibri" pitchFamily="34" charset="-122"/>
-                <a:cs typeface="Calibri" pitchFamily="34" charset="-120"/>
-              </a:rPr>
-              <a:t>監控實戰：Prometheus + Grafana 組合拳</a:t>
+                  <a:srgbClr val="2D2926"/>
+                </a:solidFill>
+                <a:latin typeface="Calibri" pitchFamily="34" charset="0"/>
+                <a:ea typeface="Calibri" pitchFamily="34" charset="-122"/>
+                <a:cs typeface="Calibri" pitchFamily="34" charset="-120"/>
+              </a:rPr>
+              <a:t>Monitoring in Practice: Prometheus + Grafana Combo</a:t>
             </a:r>
             <a:endParaRPr lang="en-US" sz="1600" dirty="0"/>
           </a:p>
@@ -7187,13 +7187,13 @@
             <a:r>
               <a:rPr lang="en-US" sz="850" dirty="0">
                 <a:solidFill>
-                  <a:srgbClr val="8B949E"/>
-                </a:solidFill>
-                <a:latin typeface="Calibri" pitchFamily="34" charset="0"/>
-                <a:ea typeface="Calibri" pitchFamily="34" charset="-122"/>
-                <a:cs typeface="Calibri" pitchFamily="34" charset="-120"/>
-              </a:rPr>
-              <a:t>PART 6  ·  46 / 50</a:t>
+                  <a:srgbClr val="8A8078"/>
+                </a:solidFill>
+                <a:latin typeface="Calibri" pitchFamily="34" charset="0"/>
+                <a:ea typeface="Calibri" pitchFamily="34" charset="-122"/>
+                <a:cs typeface="Calibri" pitchFamily="34" charset="-120"/>
+              </a:rPr>
+              <a:t>PART 6</a:t>
             </a:r>
             <a:endParaRPr lang="en-US" sz="850" dirty="0"/>
           </a:p>
@@ -7216,11 +7216,11 @@
             </a:avLst>
           </a:prstGeom>
           <a:solidFill>
-            <a:srgbClr val="161B22"/>
+            <a:srgbClr val="F5F1EB"/>
           </a:solidFill>
           <a:ln w="12700">
             <a:solidFill>
-              <a:srgbClr val="238636"/>
+              <a:srgbClr val="5A9B6E"/>
             </a:solidFill>
             <a:prstDash val="solid"/>
           </a:ln>
@@ -7289,7 +7289,7 @@
             <a:r>
               <a:rPr lang="en-US" sz="950" b="1" dirty="0">
                 <a:solidFill>
-                  <a:srgbClr val="E6EDF3"/>
+                  <a:srgbClr val="2D2926"/>
                 </a:solidFill>
                 <a:latin typeface="Calibri" pitchFamily="34" charset="0"/>
                 <a:ea typeface="Calibri" pitchFamily="34" charset="-122"/>
@@ -7328,7 +7328,7 @@
             <a:r>
               <a:rPr lang="en-US" sz="850" dirty="0">
                 <a:solidFill>
-                  <a:srgbClr val="8B949E"/>
+                  <a:srgbClr val="8A8078"/>
                 </a:solidFill>
                 <a:latin typeface="Consolas" pitchFamily="34" charset="0"/>
                 <a:ea typeface="Consolas" pitchFamily="34" charset="-122"/>
@@ -7357,11 +7357,11 @@
             </a:avLst>
           </a:prstGeom>
           <a:solidFill>
-            <a:srgbClr val="161B22"/>
+            <a:srgbClr val="F5F1EB"/>
           </a:solidFill>
           <a:ln w="12700">
             <a:solidFill>
-              <a:srgbClr val="238636"/>
+              <a:srgbClr val="5A9B6E"/>
             </a:solidFill>
             <a:prstDash val="solid"/>
           </a:ln>
@@ -7430,7 +7430,7 @@
             <a:r>
               <a:rPr lang="en-US" sz="950" b="1" dirty="0">
                 <a:solidFill>
-                  <a:srgbClr val="E6EDF3"/>
+                  <a:srgbClr val="2D2926"/>
                 </a:solidFill>
                 <a:latin typeface="Calibri" pitchFamily="34" charset="0"/>
                 <a:ea typeface="Calibri" pitchFamily="34" charset="-122"/>
@@ -7469,7 +7469,7 @@
             <a:r>
               <a:rPr lang="en-US" sz="850" dirty="0">
                 <a:solidFill>
-                  <a:srgbClr val="8B949E"/>
+                  <a:srgbClr val="8A8078"/>
                 </a:solidFill>
                 <a:latin typeface="Consolas" pitchFamily="34" charset="0"/>
                 <a:ea typeface="Consolas" pitchFamily="34" charset="-122"/>
@@ -7498,11 +7498,11 @@
             </a:avLst>
           </a:prstGeom>
           <a:solidFill>
-            <a:srgbClr val="161B22"/>
+            <a:srgbClr val="F5F1EB"/>
           </a:solidFill>
           <a:ln w="12700">
             <a:solidFill>
-              <a:srgbClr val="238636"/>
+              <a:srgbClr val="5A9B6E"/>
             </a:solidFill>
             <a:prstDash val="solid"/>
           </a:ln>
@@ -7571,7 +7571,7 @@
             <a:r>
               <a:rPr lang="en-US" sz="950" b="1" dirty="0">
                 <a:solidFill>
-                  <a:srgbClr val="E6EDF3"/>
+                  <a:srgbClr val="2D2926"/>
                 </a:solidFill>
                 <a:latin typeface="Calibri" pitchFamily="34" charset="0"/>
                 <a:ea typeface="Calibri" pitchFamily="34" charset="-122"/>
@@ -7610,7 +7610,7 @@
             <a:r>
               <a:rPr lang="en-US" sz="850" dirty="0">
                 <a:solidFill>
-                  <a:srgbClr val="8B949E"/>
+                  <a:srgbClr val="8A8078"/>
                 </a:solidFill>
                 <a:latin typeface="Consolas" pitchFamily="34" charset="0"/>
                 <a:ea typeface="Consolas" pitchFamily="34" charset="-122"/>
@@ -7639,7 +7639,7 @@
           <a:noFill/>
           <a:ln w="19050">
             <a:solidFill>
-              <a:srgbClr val="3FB950"/>
+              <a:srgbClr val="4A9968"/>
             </a:solidFill>
             <a:prstDash val="solid"/>
             <a:tailEnd type="arrow"/>
@@ -7673,7 +7673,7 @@
             <a:r>
               <a:rPr lang="en-US" sz="800" dirty="0">
                 <a:solidFill>
-                  <a:srgbClr val="3FB950"/>
+                  <a:srgbClr val="4A9968"/>
                 </a:solidFill>
                 <a:latin typeface="Calibri" pitchFamily="34" charset="0"/>
                 <a:ea typeface="Calibri" pitchFamily="34" charset="-122"/>
@@ -7690,7 +7690,7 @@
             <a:r>
               <a:rPr lang="en-US" sz="800" dirty="0">
                 <a:solidFill>
-                  <a:srgbClr val="3FB950"/>
+                  <a:srgbClr val="4A9968"/>
                 </a:solidFill>
                 <a:latin typeface="Calibri" pitchFamily="34" charset="0"/>
                 <a:ea typeface="Calibri" pitchFamily="34" charset="-122"/>
@@ -7719,18 +7719,18 @@
             </a:avLst>
           </a:prstGeom>
           <a:solidFill>
-            <a:srgbClr val="161B22"/>
+            <a:srgbClr val="F5F1EB"/>
           </a:solidFill>
           <a:ln w="19050">
             <a:solidFill>
-              <a:srgbClr val="3FB950"/>
+              <a:srgbClr val="4A9968"/>
             </a:solidFill>
             <a:prstDash val="solid"/>
           </a:ln>
           <a:effectLst>
             <a:outerShdw sx="100000" sy="100000" kx="0" ky="0" algn="bl" rotWithShape="0" blurRad="76200" dist="25400" dir="2700000">
-              <a:srgbClr val="000000">
-                <a:alpha val="30000"/>
+              <a:srgbClr val="9E9488">
+                <a:alpha val="15000"/>
               </a:srgbClr>
             </a:outerShdw>
           </a:effectLst>
@@ -7799,7 +7799,7 @@
             <a:r>
               <a:rPr lang="en-US" sz="1050" b="1" dirty="0">
                 <a:solidFill>
-                  <a:srgbClr val="E6EDF3"/>
+                  <a:srgbClr val="2D2926"/>
                 </a:solidFill>
                 <a:latin typeface="Calibri" pitchFamily="34" charset="0"/>
                 <a:ea typeface="Calibri" pitchFamily="34" charset="-122"/>
@@ -7838,13 +7838,13 @@
             <a:r>
               <a:rPr lang="en-US" sz="800" dirty="0">
                 <a:solidFill>
-                  <a:srgbClr val="8B949E"/>
+                  <a:srgbClr val="8A8078"/>
                 </a:solidFill>
                 <a:latin typeface="Consolas" pitchFamily="34" charset="0"/>
                 <a:ea typeface="Consolas" pitchFamily="34" charset="-122"/>
                 <a:cs typeface="Consolas" pitchFamily="34" charset="-120"/>
               </a:rPr>
-              <a:t>時序資料庫</a:t>
+              <a:t>Time-Series DB</a:t>
             </a:r>
             <a:endParaRPr lang="en-US" sz="800" dirty="0"/>
           </a:p>
@@ -7855,7 +7855,7 @@
             <a:r>
               <a:rPr lang="en-US" sz="800" dirty="0">
                 <a:solidFill>
-                  <a:srgbClr val="8B949E"/>
+                  <a:srgbClr val="8A8078"/>
                 </a:solidFill>
                 <a:latin typeface="Consolas" pitchFamily="34" charset="0"/>
                 <a:ea typeface="Consolas" pitchFamily="34" charset="-122"/>
@@ -7884,7 +7884,7 @@
           <a:noFill/>
           <a:ln w="19050">
             <a:solidFill>
-              <a:srgbClr val="58A6FF"/>
+              <a:srgbClr val="4A7FB5"/>
             </a:solidFill>
             <a:prstDash val="solid"/>
             <a:tailEnd type="arrow"/>
@@ -7908,18 +7908,18 @@
             </a:avLst>
           </a:prstGeom>
           <a:solidFill>
-            <a:srgbClr val="161B22"/>
+            <a:srgbClr val="F5F1EB"/>
           </a:solidFill>
           <a:ln w="19050">
             <a:solidFill>
-              <a:srgbClr val="58A6FF"/>
+              <a:srgbClr val="4A7FB5"/>
             </a:solidFill>
             <a:prstDash val="solid"/>
           </a:ln>
           <a:effectLst>
             <a:outerShdw sx="100000" sy="100000" kx="0" ky="0" algn="bl" rotWithShape="0" blurRad="76200" dist="25400" dir="2700000">
-              <a:srgbClr val="000000">
-                <a:alpha val="30000"/>
+              <a:srgbClr val="9E9488">
+                <a:alpha val="15000"/>
               </a:srgbClr>
             </a:outerShdw>
           </a:effectLst>
@@ -7988,7 +7988,7 @@
             <a:r>
               <a:rPr lang="en-US" sz="1050" b="1" dirty="0">
                 <a:solidFill>
-                  <a:srgbClr val="E6EDF3"/>
+                  <a:srgbClr val="2D2926"/>
                 </a:solidFill>
                 <a:latin typeface="Calibri" pitchFamily="34" charset="0"/>
                 <a:ea typeface="Calibri" pitchFamily="34" charset="-122"/>
@@ -8027,13 +8027,13 @@
             <a:r>
               <a:rPr lang="en-US" sz="800" dirty="0">
                 <a:solidFill>
-                  <a:srgbClr val="8B949E"/>
+                  <a:srgbClr val="8A8078"/>
                 </a:solidFill>
                 <a:latin typeface="Consolas" pitchFamily="34" charset="0"/>
                 <a:ea typeface="Consolas" pitchFamily="34" charset="-122"/>
                 <a:cs typeface="Consolas" pitchFamily="34" charset="-120"/>
               </a:rPr>
-              <a:t>視覺化</a:t>
+              <a:t>Visualization</a:t>
             </a:r>
             <a:endParaRPr lang="en-US" sz="800" dirty="0"/>
           </a:p>
@@ -8044,7 +8044,7 @@
             <a:r>
               <a:rPr lang="en-US" sz="800" dirty="0">
                 <a:solidFill>
-                  <a:srgbClr val="8B949E"/>
+                  <a:srgbClr val="8A8078"/>
                 </a:solidFill>
                 <a:latin typeface="Consolas" pitchFamily="34" charset="0"/>
                 <a:ea typeface="Consolas" pitchFamily="34" charset="-122"/>
@@ -8073,11 +8073,11 @@
             </a:avLst>
           </a:prstGeom>
           <a:solidFill>
-            <a:srgbClr val="161B22"/>
+            <a:srgbClr val="F5F1EB"/>
           </a:solidFill>
           <a:ln w="12700">
             <a:solidFill>
-              <a:srgbClr val="F85149"/>
+              <a:srgbClr val="C4605B"/>
             </a:solidFill>
             <a:prstDash val="solid"/>
           </a:ln>
@@ -8146,7 +8146,7 @@
             <a:r>
               <a:rPr lang="en-US" sz="950" b="1" dirty="0">
                 <a:solidFill>
-                  <a:srgbClr val="E6EDF3"/>
+                  <a:srgbClr val="2D2926"/>
                 </a:solidFill>
                 <a:latin typeface="Calibri" pitchFamily="34" charset="0"/>
                 <a:ea typeface="Calibri" pitchFamily="34" charset="-122"/>
@@ -8175,7 +8175,7 @@
           <a:noFill/>
           <a:ln w="19050">
             <a:solidFill>
-              <a:srgbClr val="F85149"/>
+              <a:srgbClr val="C4605B"/>
             </a:solidFill>
             <a:prstDash val="solid"/>
             <a:tailEnd type="arrow"/>
@@ -8199,7 +8199,7 @@
           <a:noFill/>
           <a:ln w="19050">
             <a:solidFill>
-              <a:srgbClr val="D29922"/>
+              <a:srgbClr val="B8892C"/>
             </a:solidFill>
             <a:prstDash val="solid"/>
             <a:tailEnd type="arrow"/>
@@ -8233,7 +8233,7 @@
             <a:r>
               <a:rPr lang="en-US" sz="800" dirty="0">
                 <a:solidFill>
-                  <a:srgbClr val="D29922"/>
+                  <a:srgbClr val="B8892C"/>
                 </a:solidFill>
                 <a:latin typeface="Calibri" pitchFamily="34" charset="0"/>
                 <a:ea typeface="Calibri" pitchFamily="34" charset="-122"/>
@@ -8262,11 +8262,11 @@
             </a:avLst>
           </a:prstGeom>
           <a:solidFill>
-            <a:srgbClr val="161B22"/>
+            <a:srgbClr val="F5F1EB"/>
           </a:solidFill>
           <a:ln w="12700">
             <a:solidFill>
-              <a:srgbClr val="D29922"/>
+              <a:srgbClr val="B8892C"/>
             </a:solidFill>
             <a:prstDash val="solid"/>
           </a:ln>
@@ -8335,7 +8335,7 @@
             <a:r>
               <a:rPr lang="en-US" sz="950" b="1" dirty="0">
                 <a:solidFill>
-                  <a:srgbClr val="E6EDF3"/>
+                  <a:srgbClr val="2D2926"/>
                 </a:solidFill>
                 <a:latin typeface="Calibri" pitchFamily="34" charset="0"/>
                 <a:ea typeface="Calibri" pitchFamily="34" charset="-122"/>
@@ -8352,7 +8352,7 @@
             <a:r>
               <a:rPr lang="en-US" sz="950" b="1" dirty="0">
                 <a:solidFill>
-                  <a:srgbClr val="E6EDF3"/>
+                  <a:srgbClr val="2D2926"/>
                 </a:solidFill>
                 <a:latin typeface="Calibri" pitchFamily="34" charset="0"/>
                 <a:ea typeface="Calibri" pitchFamily="34" charset="-122"/>
@@ -8381,18 +8381,18 @@
             </a:avLst>
           </a:prstGeom>
           <a:solidFill>
-            <a:srgbClr val="0D1117"/>
+            <a:srgbClr val="2D2926"/>
           </a:solidFill>
           <a:ln w="12700">
             <a:solidFill>
-              <a:srgbClr val="30363D"/>
+              <a:srgbClr val="D6CCBF"/>
             </a:solidFill>
             <a:prstDash val="solid"/>
           </a:ln>
           <a:effectLst>
             <a:outerShdw sx="100000" sy="100000" kx="0" ky="0" algn="bl" rotWithShape="0" blurRad="127000" dist="50800" dir="2700000">
-              <a:srgbClr val="000000">
-                <a:alpha val="50000"/>
+              <a:srgbClr val="9E9488">
+                <a:alpha val="15000"/>
               </a:srgbClr>
             </a:outerShdw>
           </a:effectLst>
@@ -8415,11 +8415,11 @@
             </a:avLst>
           </a:prstGeom>
           <a:solidFill>
-            <a:srgbClr val="1C2128"/>
+            <a:srgbClr val="ECE6DD"/>
           </a:solidFill>
           <a:ln w="6350">
             <a:solidFill>
-              <a:srgbClr val="30363D"/>
+              <a:srgbClr val="D6CCBF"/>
             </a:solidFill>
             <a:prstDash val="solid"/>
           </a:ln>
@@ -8452,7 +8452,7 @@
             <a:r>
               <a:rPr lang="en-US" sz="800" b="1" dirty="0">
                 <a:solidFill>
-                  <a:srgbClr val="8B949E"/>
+                  <a:srgbClr val="8A8078"/>
                 </a:solidFill>
                 <a:latin typeface="Consolas" pitchFamily="34" charset="0"/>
                 <a:ea typeface="Consolas" pitchFamily="34" charset="-122"/>
@@ -8494,13 +8494,13 @@
             <a:r>
               <a:rPr lang="en-US" sz="950" dirty="0">
                 <a:solidFill>
-                  <a:srgbClr val="E6EDF3"/>
+                  <a:srgbClr val="2D2926"/>
                 </a:solidFill>
                 <a:latin typeface="Consolas" pitchFamily="34" charset="0"/>
                 <a:ea typeface="Consolas" pitchFamily="34" charset="-122"/>
                 <a:cs typeface="Consolas" pitchFamily="34" charset="-120"/>
               </a:rPr>
-              <a:t># HTTP 錯誤率</a:t>
+              <a:t># HTTP Error Rate</a:t>
             </a:r>
             <a:endParaRPr lang="en-US" sz="950" dirty="0"/>
           </a:p>
@@ -8514,7 +8514,7 @@
             <a:r>
               <a:rPr lang="en-US" sz="950" dirty="0">
                 <a:solidFill>
-                  <a:srgbClr val="E6EDF3"/>
+                  <a:srgbClr val="2D2926"/>
                 </a:solidFill>
                 <a:latin typeface="Consolas" pitchFamily="34" charset="0"/>
                 <a:ea typeface="Consolas" pitchFamily="34" charset="-122"/>
@@ -8534,7 +8534,7 @@
             <a:r>
               <a:rPr lang="en-US" sz="950" dirty="0">
                 <a:solidFill>
-                  <a:srgbClr val="E6EDF3"/>
+                  <a:srgbClr val="2D2926"/>
                 </a:solidFill>
                 <a:latin typeface="Consolas" pitchFamily="34" charset="0"/>
                 <a:ea typeface="Consolas" pitchFamily="34" charset="-122"/>
@@ -8554,7 +8554,7 @@
             <a:r>
               <a:rPr lang="en-US" sz="950" dirty="0">
                 <a:solidFill>
-                  <a:srgbClr val="E6EDF3"/>
+                  <a:srgbClr val="2D2926"/>
                 </a:solidFill>
                 <a:latin typeface="Consolas" pitchFamily="34" charset="0"/>
                 <a:ea typeface="Consolas" pitchFamily="34" charset="-122"/>
@@ -8574,7 +8574,7 @@
             <a:r>
               <a:rPr lang="en-US" sz="950" dirty="0">
                 <a:solidFill>
-                  <a:srgbClr val="E6EDF3"/>
+                  <a:srgbClr val="2D2926"/>
                 </a:solidFill>
                 <a:latin typeface="Consolas" pitchFamily="34" charset="0"/>
                 <a:ea typeface="Consolas" pitchFamily="34" charset="-122"/>
@@ -8603,13 +8603,13 @@
             <a:r>
               <a:rPr lang="en-US" sz="950" dirty="0">
                 <a:solidFill>
-                  <a:srgbClr val="E6EDF3"/>
+                  <a:srgbClr val="2D2926"/>
                 </a:solidFill>
                 <a:latin typeface="Consolas" pitchFamily="34" charset="0"/>
                 <a:ea typeface="Consolas" pitchFamily="34" charset="-122"/>
                 <a:cs typeface="Consolas" pitchFamily="34" charset="-120"/>
               </a:rPr>
-              <a:t># P99 延遲</a:t>
+              <a:t># P99 Latency</a:t>
             </a:r>
             <a:endParaRPr lang="en-US" sz="950" dirty="0"/>
           </a:p>
@@ -8623,7 +8623,7 @@
             <a:r>
               <a:rPr lang="en-US" sz="950" dirty="0">
                 <a:solidFill>
-                  <a:srgbClr val="E6EDF3"/>
+                  <a:srgbClr val="2D2926"/>
                 </a:solidFill>
                 <a:latin typeface="Consolas" pitchFamily="34" charset="0"/>
                 <a:ea typeface="Consolas" pitchFamily="34" charset="-122"/>
@@ -8643,7 +8643,7 @@
             <a:r>
               <a:rPr lang="en-US" sz="950" dirty="0">
                 <a:solidFill>
-                  <a:srgbClr val="E6EDF3"/>
+                  <a:srgbClr val="2D2926"/>
                 </a:solidFill>
                 <a:latin typeface="Consolas" pitchFamily="34" charset="0"/>
                 <a:ea typeface="Consolas" pitchFamily="34" charset="-122"/>
@@ -8663,7 +8663,7 @@
             <a:r>
               <a:rPr lang="en-US" sz="950" dirty="0">
                 <a:solidFill>
-                  <a:srgbClr val="E6EDF3"/>
+                  <a:srgbClr val="2D2926"/>
                 </a:solidFill>
                 <a:latin typeface="Consolas" pitchFamily="34" charset="0"/>
                 <a:ea typeface="Consolas" pitchFamily="34" charset="-122"/>
@@ -8692,13 +8692,13 @@
             <a:r>
               <a:rPr lang="en-US" sz="950" dirty="0">
                 <a:solidFill>
-                  <a:srgbClr val="E6EDF3"/>
+                  <a:srgbClr val="2D2926"/>
                 </a:solidFill>
                 <a:latin typeface="Consolas" pitchFamily="34" charset="0"/>
                 <a:ea typeface="Consolas" pitchFamily="34" charset="-122"/>
                 <a:cs typeface="Consolas" pitchFamily="34" charset="-120"/>
               </a:rPr>
-              <a:t># CPU 告警規則</a:t>
+              <a:t># CPU Alert Rule</a:t>
             </a:r>
             <a:endParaRPr lang="en-US" sz="950" dirty="0"/>
           </a:p>
@@ -8712,7 +8712,7 @@
             <a:r>
               <a:rPr lang="en-US" sz="950" dirty="0">
                 <a:solidFill>
-                  <a:srgbClr val="E6EDF3"/>
+                  <a:srgbClr val="2D2926"/>
                 </a:solidFill>
                 <a:latin typeface="Consolas" pitchFamily="34" charset="0"/>
                 <a:ea typeface="Consolas" pitchFamily="34" charset="-122"/>
@@ -8741,11 +8741,11 @@
             </a:avLst>
           </a:prstGeom>
           <a:solidFill>
-            <a:srgbClr val="161B22"/>
+            <a:srgbClr val="F5F1EB"/>
           </a:solidFill>
           <a:ln w="19050">
             <a:solidFill>
-              <a:srgbClr val="F85149"/>
+              <a:srgbClr val="C4605B"/>
             </a:solidFill>
             <a:prstDash val="solid"/>
           </a:ln>
@@ -8778,13 +8778,13 @@
             <a:r>
               <a:rPr lang="en-US" sz="1000" b="1" dirty="0">
                 <a:solidFill>
-                  <a:srgbClr val="F85149"/>
-                </a:solidFill>
-                <a:latin typeface="Calibri" pitchFamily="34" charset="0"/>
-                <a:ea typeface="Calibri" pitchFamily="34" charset="-122"/>
-                <a:cs typeface="Calibri" pitchFamily="34" charset="-120"/>
-              </a:rPr>
-              <a:t>🔴 Critical: 錯誤率 &gt; 1%</a:t>
+                  <a:srgbClr val="C4605B"/>
+                </a:solidFill>
+                <a:latin typeface="Calibri" pitchFamily="34" charset="0"/>
+                <a:ea typeface="Calibri" pitchFamily="34" charset="-122"/>
+                <a:cs typeface="Calibri" pitchFamily="34" charset="-120"/>
+              </a:rPr>
+              <a:t>🔴 Critical: Error Rate &gt; 1%</a:t>
             </a:r>
             <a:endParaRPr lang="en-US" sz="1000" dirty="0"/>
           </a:p>
@@ -8807,11 +8807,11 @@
             </a:avLst>
           </a:prstGeom>
           <a:solidFill>
-            <a:srgbClr val="161B22"/>
+            <a:srgbClr val="F5F1EB"/>
           </a:solidFill>
           <a:ln w="19050">
             <a:solidFill>
-              <a:srgbClr val="D29922"/>
+              <a:srgbClr val="B8892C"/>
             </a:solidFill>
             <a:prstDash val="solid"/>
           </a:ln>
@@ -8844,7 +8844,7 @@
             <a:r>
               <a:rPr lang="en-US" sz="1000" b="1" dirty="0">
                 <a:solidFill>
-                  <a:srgbClr val="D29922"/>
+                  <a:srgbClr val="B8892C"/>
                 </a:solidFill>
                 <a:latin typeface="Calibri" pitchFamily="34" charset="0"/>
                 <a:ea typeface="Calibri" pitchFamily="34" charset="-122"/>
@@ -8873,11 +8873,11 @@
             </a:avLst>
           </a:prstGeom>
           <a:solidFill>
-            <a:srgbClr val="161B22"/>
+            <a:srgbClr val="F5F1EB"/>
           </a:solidFill>
           <a:ln w="19050">
             <a:solidFill>
-              <a:srgbClr val="3FB950"/>
+              <a:srgbClr val="4A9968"/>
             </a:solidFill>
             <a:prstDash val="solid"/>
           </a:ln>
@@ -8910,13 +8910,13 @@
             <a:r>
               <a:rPr lang="en-US" sz="1000" b="1" dirty="0">
                 <a:solidFill>
-                  <a:srgbClr val="3FB950"/>
-                </a:solidFill>
-                <a:latin typeface="Calibri" pitchFamily="34" charset="0"/>
-                <a:ea typeface="Calibri" pitchFamily="34" charset="-122"/>
-                <a:cs typeface="Calibri" pitchFamily="34" charset="-120"/>
-              </a:rPr>
-              <a:t>🟢 Info: 部署完成通知</a:t>
+                  <a:srgbClr val="4A9968"/>
+                </a:solidFill>
+                <a:latin typeface="Calibri" pitchFamily="34" charset="0"/>
+                <a:ea typeface="Calibri" pitchFamily="34" charset="-122"/>
+                <a:cs typeface="Calibri" pitchFamily="34" charset="-120"/>
+              </a:rPr>
+              <a:t>🟢 Info: Deployment Completed</a:t>
             </a:r>
             <a:endParaRPr lang="en-US" sz="1000" dirty="0"/>
           </a:p>
@@ -8939,18 +8939,18 @@
             </a:avLst>
           </a:prstGeom>
           <a:solidFill>
-            <a:srgbClr val="0D1117"/>
+            <a:srgbClr val="2D2926"/>
           </a:solidFill>
           <a:ln w="12700">
             <a:solidFill>
-              <a:srgbClr val="30363D"/>
+              <a:srgbClr val="D6CCBF"/>
             </a:solidFill>
             <a:prstDash val="solid"/>
           </a:ln>
           <a:effectLst>
             <a:outerShdw sx="100000" sy="100000" kx="0" ky="0" algn="bl" rotWithShape="0" blurRad="127000" dist="50800" dir="2700000">
-              <a:srgbClr val="000000">
-                <a:alpha val="50000"/>
+              <a:srgbClr val="9E9488">
+                <a:alpha val="15000"/>
               </a:srgbClr>
             </a:outerShdw>
           </a:effectLst>
@@ -8973,11 +8973,11 @@
             </a:avLst>
           </a:prstGeom>
           <a:solidFill>
-            <a:srgbClr val="1C2128"/>
+            <a:srgbClr val="ECE6DD"/>
           </a:solidFill>
           <a:ln w="6350">
             <a:solidFill>
-              <a:srgbClr val="30363D"/>
+              <a:srgbClr val="D6CCBF"/>
             </a:solidFill>
             <a:prstDash val="solid"/>
           </a:ln>
@@ -9010,7 +9010,7 @@
             <a:r>
               <a:rPr lang="en-US" sz="800" b="1" dirty="0">
                 <a:solidFill>
-                  <a:srgbClr val="8B949E"/>
+                  <a:srgbClr val="8A8078"/>
                 </a:solidFill>
                 <a:latin typeface="Consolas" pitchFamily="34" charset="0"/>
                 <a:ea typeface="Consolas" pitchFamily="34" charset="-122"/>
@@ -9052,7 +9052,7 @@
             <a:r>
               <a:rPr lang="en-US" sz="950" dirty="0">
                 <a:solidFill>
-                  <a:srgbClr val="E6EDF3"/>
+                  <a:srgbClr val="2D2926"/>
                 </a:solidFill>
                 <a:latin typeface="Consolas" pitchFamily="34" charset="0"/>
                 <a:ea typeface="Consolas" pitchFamily="34" charset="-122"/>
@@ -9072,7 +9072,7 @@
             <a:r>
               <a:rPr lang="en-US" sz="950" dirty="0">
                 <a:solidFill>
-                  <a:srgbClr val="E6EDF3"/>
+                  <a:srgbClr val="2D2926"/>
                 </a:solidFill>
                 <a:latin typeface="Consolas" pitchFamily="34" charset="0"/>
                 <a:ea typeface="Consolas" pitchFamily="34" charset="-122"/>
@@ -9092,7 +9092,7 @@
             <a:r>
               <a:rPr lang="en-US" sz="950" dirty="0">
                 <a:solidFill>
-                  <a:srgbClr val="E6EDF3"/>
+                  <a:srgbClr val="2D2926"/>
                 </a:solidFill>
                 <a:latin typeface="Consolas" pitchFamily="34" charset="0"/>
                 <a:ea typeface="Consolas" pitchFamily="34" charset="-122"/>
@@ -9112,7 +9112,7 @@
             <a:r>
               <a:rPr lang="en-US" sz="950" dirty="0">
                 <a:solidFill>
-                  <a:srgbClr val="E6EDF3"/>
+                  <a:srgbClr val="2D2926"/>
                 </a:solidFill>
                 <a:latin typeface="Consolas" pitchFamily="34" charset="0"/>
                 <a:ea typeface="Consolas" pitchFamily="34" charset="-122"/>
@@ -9132,7 +9132,7 @@
             <a:r>
               <a:rPr lang="en-US" sz="950" dirty="0">
                 <a:solidFill>
-                  <a:srgbClr val="E6EDF3"/>
+                  <a:srgbClr val="2D2926"/>
                 </a:solidFill>
                 <a:latin typeface="Consolas" pitchFamily="34" charset="0"/>
                 <a:ea typeface="Consolas" pitchFamily="34" charset="-122"/>
@@ -9158,7 +9158,7 @@
     <p:bg>
       <p:bgPr>
         <a:solidFill>
-          <a:srgbClr val="0D1117"/>
+          <a:srgbClr val="FFFDF8"/>
         </a:solidFill>
       </p:bgPr>
     </p:bg>
@@ -9191,11 +9191,11 @@
             <a:avLst/>
           </a:prstGeom>
           <a:solidFill>
-            <a:srgbClr val="161B22"/>
+            <a:srgbClr val="F5F1EB"/>
           </a:solidFill>
           <a:ln w="6350">
             <a:solidFill>
-              <a:srgbClr val="30363D"/>
+              <a:srgbClr val="D6CCBF"/>
             </a:solidFill>
             <a:prstDash val="solid"/>
           </a:ln>
@@ -9216,11 +9216,11 @@
             <a:avLst/>
           </a:prstGeom>
           <a:solidFill>
-            <a:srgbClr val="6E40C9"/>
+            <a:srgbClr val="8B6AB5"/>
           </a:solidFill>
           <a:ln w="12700">
             <a:solidFill>
-              <a:srgbClr val="6E40C9"/>
+              <a:srgbClr val="8B6AB5"/>
             </a:solidFill>
             <a:prstDash val="solid"/>
           </a:ln>
@@ -9253,13 +9253,13 @@
             <a:r>
               <a:rPr lang="en-US" sz="1600" b="1" dirty="0">
                 <a:solidFill>
-                  <a:srgbClr val="E6EDF3"/>
-                </a:solidFill>
-                <a:latin typeface="Calibri" pitchFamily="34" charset="0"/>
-                <a:ea typeface="Calibri" pitchFamily="34" charset="-122"/>
-                <a:cs typeface="Calibri" pitchFamily="34" charset="-120"/>
-              </a:rPr>
-              <a:t>分散式追蹤：找出效能瓶頸在哪裡</a:t>
+                  <a:srgbClr val="2D2926"/>
+                </a:solidFill>
+                <a:latin typeface="Calibri" pitchFamily="34" charset="0"/>
+                <a:ea typeface="Calibri" pitchFamily="34" charset="-122"/>
+                <a:cs typeface="Calibri" pitchFamily="34" charset="-120"/>
+              </a:rPr>
+              <a:t>Distributed Tracing: Finding Performance Bottlenecks</a:t>
             </a:r>
             <a:endParaRPr lang="en-US" sz="1600" dirty="0"/>
           </a:p>
@@ -9292,13 +9292,13 @@
             <a:r>
               <a:rPr lang="en-US" sz="850" dirty="0">
                 <a:solidFill>
-                  <a:srgbClr val="8B949E"/>
-                </a:solidFill>
-                <a:latin typeface="Calibri" pitchFamily="34" charset="0"/>
-                <a:ea typeface="Calibri" pitchFamily="34" charset="-122"/>
-                <a:cs typeface="Calibri" pitchFamily="34" charset="-120"/>
-              </a:rPr>
-              <a:t>PART 6  ·  47 / 50</a:t>
+                  <a:srgbClr val="8A8078"/>
+                </a:solidFill>
+                <a:latin typeface="Calibri" pitchFamily="34" charset="0"/>
+                <a:ea typeface="Calibri" pitchFamily="34" charset="-122"/>
+                <a:cs typeface="Calibri" pitchFamily="34" charset="-120"/>
+              </a:rPr>
+              <a:t>PART 6</a:t>
             </a:r>
             <a:endParaRPr lang="en-US" sz="850" dirty="0"/>
           </a:p>
@@ -9321,11 +9321,11 @@
             </a:avLst>
           </a:prstGeom>
           <a:solidFill>
-            <a:srgbClr val="161B22"/>
+            <a:srgbClr val="F5F1EB"/>
           </a:solidFill>
           <a:ln w="12700">
             <a:solidFill>
-              <a:srgbClr val="8B949E"/>
+              <a:srgbClr val="908880"/>
             </a:solidFill>
             <a:prstDash val="solid"/>
           </a:ln>
@@ -9394,7 +9394,7 @@
             <a:r>
               <a:rPr lang="en-US" sz="950" b="1" dirty="0">
                 <a:solidFill>
-                  <a:srgbClr val="E6EDF3"/>
+                  <a:srgbClr val="2D2926"/>
                 </a:solidFill>
                 <a:latin typeface="Calibri" pitchFamily="34" charset="0"/>
                 <a:ea typeface="Calibri" pitchFamily="34" charset="-122"/>
@@ -9423,7 +9423,7 @@
           <a:noFill/>
           <a:ln w="19050">
             <a:solidFill>
-              <a:srgbClr val="1F6FEB"/>
+              <a:srgbClr val="5B8DB8"/>
             </a:solidFill>
             <a:prstDash val="solid"/>
             <a:tailEnd type="arrow"/>
@@ -9432,14 +9432,41 @@
       </p:sp>
       <p:sp>
         <p:nvSpPr>
-          <p:cNvPr id="10" name="Text 8"/>
-          <p:cNvSpPr/>
-          <p:nvPr/>
-        </p:nvSpPr>
-        <p:spPr>
-          <a:xfrm>
-            <a:off x="905256" y="877824"/>
-            <a:ext cx="365760" cy="182880"/>
+          <p:cNvPr id="10" name="Shape 8"/>
+          <p:cNvSpPr/>
+          <p:nvPr/>
+        </p:nvSpPr>
+        <p:spPr>
+          <a:xfrm>
+            <a:off x="813816" y="859536"/>
+            <a:ext cx="548640" cy="201168"/>
+          </a:xfrm>
+          <a:prstGeom prst="roundRect">
+            <a:avLst>
+              <a:gd name="adj" fmla="val 27273"/>
+            </a:avLst>
+          </a:prstGeom>
+          <a:solidFill>
+            <a:srgbClr val="F5F1EB"/>
+          </a:solidFill>
+          <a:ln w="9525">
+            <a:solidFill>
+              <a:srgbClr val="5B8DB8"/>
+            </a:solidFill>
+            <a:prstDash val="solid"/>
+          </a:ln>
+        </p:spPr>
+      </p:sp>
+      <p:sp>
+        <p:nvSpPr>
+          <p:cNvPr id="11" name="Text 9"/>
+          <p:cNvSpPr/>
+          <p:nvPr/>
+        </p:nvSpPr>
+        <p:spPr>
+          <a:xfrm>
+            <a:off x="813816" y="859536"/>
+            <a:ext cx="548640" cy="201168"/>
           </a:xfrm>
           <a:prstGeom prst="rect">
             <a:avLst/>
@@ -9455,9 +9482,9 @@
               <a:buNone/>
             </a:pPr>
             <a:r>
-              <a:rPr lang="en-US" sz="800" dirty="0">
-                <a:solidFill>
-                  <a:srgbClr val="1F6FEB"/>
+              <a:rPr lang="en-US" sz="750" b="1" dirty="0">
+                <a:solidFill>
+                  <a:srgbClr val="5B8DB8"/>
                 </a:solidFill>
                 <a:latin typeface="Consolas" pitchFamily="34" charset="0"/>
                 <a:ea typeface="Consolas" pitchFamily="34" charset="-122"/>
@@ -9465,13 +9492,13 @@
               </a:rPr>
               <a:t>GET /checkout</a:t>
             </a:r>
-            <a:endParaRPr lang="en-US" sz="800" dirty="0"/>
-          </a:p>
-        </p:txBody>
-      </p:sp>
-      <p:sp>
-        <p:nvSpPr>
-          <p:cNvPr id="11" name="Shape 9"/>
+            <a:endParaRPr lang="en-US" sz="750" dirty="0"/>
+          </a:p>
+        </p:txBody>
+      </p:sp>
+      <p:sp>
+        <p:nvSpPr>
+          <p:cNvPr id="12" name="Shape 10"/>
           <p:cNvSpPr/>
           <p:nvPr/>
         </p:nvSpPr>
@@ -9486,11 +9513,11 @@
             </a:avLst>
           </a:prstGeom>
           <a:solidFill>
-            <a:srgbClr val="161B22"/>
+            <a:srgbClr val="F5F1EB"/>
           </a:solidFill>
           <a:ln w="12700">
             <a:solidFill>
-              <a:srgbClr val="1F6FEB"/>
+              <a:srgbClr val="5B8DB8"/>
             </a:solidFill>
             <a:prstDash val="solid"/>
           </a:ln>
@@ -9498,7 +9525,7 @@
       </p:sp>
       <p:sp>
         <p:nvSpPr>
-          <p:cNvPr id="12" name="Text 10"/>
+          <p:cNvPr id="13" name="Text 11"/>
           <p:cNvSpPr/>
           <p:nvPr/>
         </p:nvSpPr>
@@ -9534,7 +9561,7 @@
       </p:sp>
       <p:sp>
         <p:nvSpPr>
-          <p:cNvPr id="13" name="Text 11"/>
+          <p:cNvPr id="14" name="Text 12"/>
           <p:cNvSpPr/>
           <p:nvPr/>
         </p:nvSpPr>
@@ -9559,7 +9586,7 @@
             <a:r>
               <a:rPr lang="en-US" sz="950" b="1" dirty="0">
                 <a:solidFill>
-                  <a:srgbClr val="E6EDF3"/>
+                  <a:srgbClr val="2D2926"/>
                 </a:solidFill>
                 <a:latin typeface="Calibri" pitchFamily="34" charset="0"/>
                 <a:ea typeface="Calibri" pitchFamily="34" charset="-122"/>
@@ -9573,7 +9600,7 @@
       </p:sp>
       <p:sp>
         <p:nvSpPr>
-          <p:cNvPr id="14" name="Shape 12"/>
+          <p:cNvPr id="15" name="Shape 13"/>
           <p:cNvSpPr/>
           <p:nvPr/>
         </p:nvSpPr>
@@ -9588,7 +9615,7 @@
           <a:noFill/>
           <a:ln w="19050">
             <a:solidFill>
-              <a:srgbClr val="238636"/>
+              <a:srgbClr val="5A9B6E"/>
             </a:solidFill>
             <a:prstDash val="solid"/>
             <a:tailEnd type="arrow"/>
@@ -9597,14 +9624,41 @@
       </p:sp>
       <p:sp>
         <p:nvSpPr>
-          <p:cNvPr id="15" name="Text 13"/>
-          <p:cNvSpPr/>
-          <p:nvPr/>
-        </p:nvSpPr>
-        <p:spPr>
-          <a:xfrm>
-            <a:off x="2002536" y="877824"/>
-            <a:ext cx="365760" cy="182880"/>
+          <p:cNvPr id="16" name="Shape 14"/>
+          <p:cNvSpPr/>
+          <p:nvPr/>
+        </p:nvSpPr>
+        <p:spPr>
+          <a:xfrm>
+            <a:off x="1911096" y="859536"/>
+            <a:ext cx="548640" cy="201168"/>
+          </a:xfrm>
+          <a:prstGeom prst="roundRect">
+            <a:avLst>
+              <a:gd name="adj" fmla="val 27273"/>
+            </a:avLst>
+          </a:prstGeom>
+          <a:solidFill>
+            <a:srgbClr val="F5F1EB"/>
+          </a:solidFill>
+          <a:ln w="9525">
+            <a:solidFill>
+              <a:srgbClr val="5A9B6E"/>
+            </a:solidFill>
+            <a:prstDash val="solid"/>
+          </a:ln>
+        </p:spPr>
+      </p:sp>
+      <p:sp>
+        <p:nvSpPr>
+          <p:cNvPr id="17" name="Text 15"/>
+          <p:cNvSpPr/>
+          <p:nvPr/>
+        </p:nvSpPr>
+        <p:spPr>
+          <a:xfrm>
+            <a:off x="1911096" y="859536"/>
+            <a:ext cx="548640" cy="201168"/>
           </a:xfrm>
           <a:prstGeom prst="rect">
             <a:avLst/>
@@ -9620,9 +9674,9 @@
               <a:buNone/>
             </a:pPr>
             <a:r>
-              <a:rPr lang="en-US" sz="800" dirty="0">
-                <a:solidFill>
-                  <a:srgbClr val="238636"/>
+              <a:rPr lang="en-US" sz="750" b="1" dirty="0">
+                <a:solidFill>
+                  <a:srgbClr val="5A9B6E"/>
                 </a:solidFill>
                 <a:latin typeface="Consolas" pitchFamily="34" charset="0"/>
                 <a:ea typeface="Consolas" pitchFamily="34" charset="-122"/>
@@ -9630,13 +9684,13 @@
               </a:rPr>
               <a:t>proxy</a:t>
             </a:r>
-            <a:endParaRPr lang="en-US" sz="800" dirty="0"/>
-          </a:p>
-        </p:txBody>
-      </p:sp>
-      <p:sp>
-        <p:nvSpPr>
-          <p:cNvPr id="16" name="Shape 14"/>
+            <a:endParaRPr lang="en-US" sz="750" dirty="0"/>
+          </a:p>
+        </p:txBody>
+      </p:sp>
+      <p:sp>
+        <p:nvSpPr>
+          <p:cNvPr id="18" name="Shape 16"/>
           <p:cNvSpPr/>
           <p:nvPr/>
         </p:nvSpPr>
@@ -9651,11 +9705,11 @@
             </a:avLst>
           </a:prstGeom>
           <a:solidFill>
-            <a:srgbClr val="161B22"/>
+            <a:srgbClr val="F5F1EB"/>
           </a:solidFill>
           <a:ln w="12700">
             <a:solidFill>
-              <a:srgbClr val="238636"/>
+              <a:srgbClr val="5A9B6E"/>
             </a:solidFill>
             <a:prstDash val="solid"/>
           </a:ln>
@@ -9663,7 +9717,7 @@
       </p:sp>
       <p:sp>
         <p:nvSpPr>
-          <p:cNvPr id="17" name="Text 15"/>
+          <p:cNvPr id="19" name="Text 17"/>
           <p:cNvSpPr/>
           <p:nvPr/>
         </p:nvSpPr>
@@ -9699,7 +9753,7 @@
       </p:sp>
       <p:sp>
         <p:nvSpPr>
-          <p:cNvPr id="18" name="Text 16"/>
+          <p:cNvPr id="20" name="Text 18"/>
           <p:cNvSpPr/>
           <p:nvPr/>
         </p:nvSpPr>
@@ -9724,7 +9778,7 @@
             <a:r>
               <a:rPr lang="en-US" sz="950" b="1" dirty="0">
                 <a:solidFill>
-                  <a:srgbClr val="E6EDF3"/>
+                  <a:srgbClr val="2D2926"/>
                 </a:solidFill>
                 <a:latin typeface="Calibri" pitchFamily="34" charset="0"/>
                 <a:ea typeface="Calibri" pitchFamily="34" charset="-122"/>
@@ -9738,7 +9792,7 @@
       </p:sp>
       <p:sp>
         <p:nvSpPr>
-          <p:cNvPr id="19" name="Shape 17"/>
+          <p:cNvPr id="21" name="Shape 19"/>
           <p:cNvSpPr/>
           <p:nvPr/>
         </p:nvSpPr>
@@ -9753,7 +9807,7 @@
           <a:noFill/>
           <a:ln w="19050">
             <a:solidFill>
-              <a:srgbClr val="238636"/>
+              <a:srgbClr val="5A9B6E"/>
             </a:solidFill>
             <a:prstDash val="solid"/>
             <a:tailEnd type="arrow"/>
@@ -9762,7 +9816,7 @@
       </p:sp>
       <p:sp>
         <p:nvSpPr>
-          <p:cNvPr id="20" name="Shape 18"/>
+          <p:cNvPr id="22" name="Shape 20"/>
           <p:cNvSpPr/>
           <p:nvPr/>
         </p:nvSpPr>
@@ -9777,11 +9831,11 @@
             </a:avLst>
           </a:prstGeom>
           <a:solidFill>
-            <a:srgbClr val="161B22"/>
+            <a:srgbClr val="F5F1EB"/>
           </a:solidFill>
           <a:ln w="12700">
             <a:solidFill>
-              <a:srgbClr val="E36209"/>
+              <a:srgbClr val="C4804A"/>
             </a:solidFill>
             <a:prstDash val="solid"/>
           </a:ln>
@@ -9789,7 +9843,7 @@
       </p:sp>
       <p:sp>
         <p:nvSpPr>
-          <p:cNvPr id="21" name="Text 19"/>
+          <p:cNvPr id="23" name="Text 21"/>
           <p:cNvSpPr/>
           <p:nvPr/>
         </p:nvSpPr>
@@ -9825,7 +9879,7 @@
       </p:sp>
       <p:sp>
         <p:nvSpPr>
-          <p:cNvPr id="22" name="Text 20"/>
+          <p:cNvPr id="24" name="Text 22"/>
           <p:cNvSpPr/>
           <p:nvPr/>
         </p:nvSpPr>
@@ -9850,7 +9904,7 @@
             <a:r>
               <a:rPr lang="en-US" sz="950" b="1" dirty="0">
                 <a:solidFill>
-                  <a:srgbClr val="E6EDF3"/>
+                  <a:srgbClr val="2D2926"/>
                 </a:solidFill>
                 <a:latin typeface="Calibri" pitchFamily="34" charset="0"/>
                 <a:ea typeface="Calibri" pitchFamily="34" charset="-122"/>
@@ -9864,7 +9918,7 @@
       </p:sp>
       <p:sp>
         <p:nvSpPr>
-          <p:cNvPr id="23" name="Shape 21"/>
+          <p:cNvPr id="25" name="Shape 23"/>
           <p:cNvSpPr/>
           <p:nvPr/>
         </p:nvSpPr>
@@ -9879,11 +9933,11 @@
             </a:avLst>
           </a:prstGeom>
           <a:solidFill>
-            <a:srgbClr val="161B22"/>
+            <a:srgbClr val="F5F1EB"/>
           </a:solidFill>
           <a:ln w="12700">
             <a:solidFill>
-              <a:srgbClr val="6E40C9"/>
+              <a:srgbClr val="8B6AB5"/>
             </a:solidFill>
             <a:prstDash val="solid"/>
           </a:ln>
@@ -9891,7 +9945,7 @@
       </p:sp>
       <p:sp>
         <p:nvSpPr>
-          <p:cNvPr id="24" name="Text 22"/>
+          <p:cNvPr id="26" name="Text 24"/>
           <p:cNvSpPr/>
           <p:nvPr/>
         </p:nvSpPr>
@@ -9927,7 +9981,7 @@
       </p:sp>
       <p:sp>
         <p:nvSpPr>
-          <p:cNvPr id="25" name="Text 23"/>
+          <p:cNvPr id="27" name="Text 25"/>
           <p:cNvSpPr/>
           <p:nvPr/>
         </p:nvSpPr>
@@ -9952,7 +10006,7 @@
             <a:r>
               <a:rPr lang="en-US" sz="950" b="1" dirty="0">
                 <a:solidFill>
-                  <a:srgbClr val="E6EDF3"/>
+                  <a:srgbClr val="2D2926"/>
                 </a:solidFill>
                 <a:latin typeface="Calibri" pitchFamily="34" charset="0"/>
                 <a:ea typeface="Calibri" pitchFamily="34" charset="-122"/>
@@ -9966,7 +10020,7 @@
       </p:sp>
       <p:sp>
         <p:nvSpPr>
-          <p:cNvPr id="26" name="Shape 24"/>
+          <p:cNvPr id="28" name="Shape 26"/>
           <p:cNvSpPr/>
           <p:nvPr/>
         </p:nvSpPr>
@@ -9981,11 +10035,11 @@
             </a:avLst>
           </a:prstGeom>
           <a:solidFill>
-            <a:srgbClr val="161B22"/>
+            <a:srgbClr val="F5F1EB"/>
           </a:solidFill>
           <a:ln w="12700">
             <a:solidFill>
-              <a:srgbClr val="D29922"/>
+              <a:srgbClr val="B8892C"/>
             </a:solidFill>
             <a:prstDash val="solid"/>
           </a:ln>
@@ -9993,7 +10047,7 @@
       </p:sp>
       <p:sp>
         <p:nvSpPr>
-          <p:cNvPr id="27" name="Text 25"/>
+          <p:cNvPr id="29" name="Text 27"/>
           <p:cNvSpPr/>
           <p:nvPr/>
         </p:nvSpPr>
@@ -10029,7 +10083,7 @@
       </p:sp>
       <p:sp>
         <p:nvSpPr>
-          <p:cNvPr id="28" name="Text 26"/>
+          <p:cNvPr id="30" name="Text 28"/>
           <p:cNvSpPr/>
           <p:nvPr/>
         </p:nvSpPr>
@@ -10054,7 +10108,7 @@
             <a:r>
               <a:rPr lang="en-US" sz="950" b="1" dirty="0">
                 <a:solidFill>
-                  <a:srgbClr val="E6EDF3"/>
+                  <a:srgbClr val="2D2926"/>
                 </a:solidFill>
                 <a:latin typeface="Calibri" pitchFamily="34" charset="0"/>
                 <a:ea typeface="Calibri" pitchFamily="34" charset="-122"/>
@@ -10068,7 +10122,7 @@
       </p:sp>
       <p:sp>
         <p:nvSpPr>
-          <p:cNvPr id="29" name="Shape 27"/>
+          <p:cNvPr id="31" name="Shape 29"/>
           <p:cNvSpPr/>
           <p:nvPr/>
         </p:nvSpPr>
@@ -10083,11 +10137,11 @@
             </a:avLst>
           </a:prstGeom>
           <a:solidFill>
-            <a:srgbClr val="161B22"/>
+            <a:srgbClr val="F5F1EB"/>
           </a:solidFill>
           <a:ln w="12700">
             <a:solidFill>
-              <a:srgbClr val="6E40C9"/>
+              <a:srgbClr val="8B6AB5"/>
             </a:solidFill>
             <a:prstDash val="solid"/>
           </a:ln>
@@ -10095,7 +10149,7 @@
       </p:sp>
       <p:sp>
         <p:nvSpPr>
-          <p:cNvPr id="30" name="Text 28"/>
+          <p:cNvPr id="32" name="Text 30"/>
           <p:cNvSpPr/>
           <p:nvPr/>
         </p:nvSpPr>
@@ -10120,7 +10174,7 @@
             <a:r>
               <a:rPr lang="en-US" sz="1000" b="1" dirty="0">
                 <a:solidFill>
-                  <a:srgbClr val="6E40C9"/>
+                  <a:srgbClr val="8B6AB5"/>
                 </a:solidFill>
                 <a:latin typeface="Consolas" pitchFamily="34" charset="0"/>
                 <a:ea typeface="Consolas" pitchFamily="34" charset="-122"/>
@@ -10134,7 +10188,7 @@
       </p:sp>
       <p:sp>
         <p:nvSpPr>
-          <p:cNvPr id="31" name="Text 29"/>
+          <p:cNvPr id="33" name="Text 31"/>
           <p:cNvSpPr/>
           <p:nvPr/>
         </p:nvSpPr>
@@ -10159,13 +10213,13 @@
             <a:r>
               <a:rPr lang="en-US" sz="900" dirty="0">
                 <a:solidFill>
-                  <a:srgbClr val="8B949E"/>
-                </a:solidFill>
-                <a:latin typeface="Calibri" pitchFamily="34" charset="0"/>
-                <a:ea typeface="Calibri" pitchFamily="34" charset="-122"/>
-                <a:cs typeface="Calibri" pitchFamily="34" charset="-120"/>
-              </a:rPr>
-              <a:t>貫穿整個請求鏈路</a:t>
+                  <a:srgbClr val="8A8078"/>
+                </a:solidFill>
+                <a:latin typeface="Calibri" pitchFamily="34" charset="0"/>
+                <a:ea typeface="Calibri" pitchFamily="34" charset="-122"/>
+                <a:cs typeface="Calibri" pitchFamily="34" charset="-120"/>
+              </a:rPr>
+              <a:t>Spans the entire request chain</a:t>
             </a:r>
             <a:endParaRPr lang="en-US" sz="900" dirty="0"/>
           </a:p>
@@ -10173,7 +10227,7 @@
       </p:sp>
       <p:sp>
         <p:nvSpPr>
-          <p:cNvPr id="32" name="Shape 30"/>
+          <p:cNvPr id="34" name="Shape 32"/>
           <p:cNvSpPr/>
           <p:nvPr/>
         </p:nvSpPr>
@@ -10192,7 +10246,7 @@
           </a:solidFill>
           <a:ln w="12700">
             <a:solidFill>
-              <a:srgbClr val="1F6FEB"/>
+              <a:srgbClr val="5B8DB8"/>
             </a:solidFill>
             <a:prstDash val="solid"/>
           </a:ln>
@@ -10200,7 +10254,7 @@
       </p:sp>
       <p:sp>
         <p:nvSpPr>
-          <p:cNvPr id="33" name="Text 31"/>
+          <p:cNvPr id="35" name="Text 33"/>
           <p:cNvSpPr/>
           <p:nvPr/>
         </p:nvSpPr>
@@ -10225,7 +10279,7 @@
             <a:r>
               <a:rPr lang="en-US" sz="800" dirty="0">
                 <a:solidFill>
-                  <a:srgbClr val="8B949E"/>
+                  <a:srgbClr val="8A8078"/>
                 </a:solidFill>
                 <a:latin typeface="Calibri" pitchFamily="34" charset="0"/>
                 <a:ea typeface="Calibri" pitchFamily="34" charset="-122"/>
@@ -10239,7 +10293,7 @@
       </p:sp>
       <p:sp>
         <p:nvSpPr>
-          <p:cNvPr id="34" name="Shape 32"/>
+          <p:cNvPr id="36" name="Shape 34"/>
           <p:cNvSpPr/>
           <p:nvPr/>
         </p:nvSpPr>
@@ -10258,7 +10312,7 @@
           </a:solidFill>
           <a:ln w="12700">
             <a:solidFill>
-              <a:srgbClr val="238636"/>
+              <a:srgbClr val="5A9B6E"/>
             </a:solidFill>
             <a:prstDash val="solid"/>
           </a:ln>
@@ -10266,7 +10320,7 @@
       </p:sp>
       <p:sp>
         <p:nvSpPr>
-          <p:cNvPr id="35" name="Text 33"/>
+          <p:cNvPr id="37" name="Text 35"/>
           <p:cNvSpPr/>
           <p:nvPr/>
         </p:nvSpPr>
@@ -10291,7 +10345,7 @@
             <a:r>
               <a:rPr lang="en-US" sz="800" dirty="0">
                 <a:solidFill>
-                  <a:srgbClr val="8B949E"/>
+                  <a:srgbClr val="8A8078"/>
                 </a:solidFill>
                 <a:latin typeface="Calibri" pitchFamily="34" charset="0"/>
                 <a:ea typeface="Calibri" pitchFamily="34" charset="-122"/>
@@ -10305,7 +10359,7 @@
       </p:sp>
       <p:sp>
         <p:nvSpPr>
-          <p:cNvPr id="36" name="Shape 34"/>
+          <p:cNvPr id="38" name="Shape 36"/>
           <p:cNvSpPr/>
           <p:nvPr/>
         </p:nvSpPr>
@@ -10320,11 +10374,11 @@
             </a:avLst>
           </a:prstGeom>
           <a:solidFill>
-            <a:srgbClr val="2A0F0F"/>
+            <a:srgbClr val="F8ECEC"/>
           </a:solidFill>
           <a:ln w="12700">
             <a:solidFill>
-              <a:srgbClr val="E36209"/>
+              <a:srgbClr val="C4804A"/>
             </a:solidFill>
             <a:prstDash val="solid"/>
           </a:ln>
@@ -10332,7 +10386,7 @@
       </p:sp>
       <p:sp>
         <p:nvSpPr>
-          <p:cNvPr id="37" name="Text 35"/>
+          <p:cNvPr id="39" name="Text 37"/>
           <p:cNvSpPr/>
           <p:nvPr/>
         </p:nvSpPr>
@@ -10357,7 +10411,7 @@
             <a:r>
               <a:rPr lang="en-US" sz="800" dirty="0">
                 <a:solidFill>
-                  <a:srgbClr val="8B949E"/>
+                  <a:srgbClr val="8A8078"/>
                 </a:solidFill>
                 <a:latin typeface="Calibri" pitchFamily="34" charset="0"/>
                 <a:ea typeface="Calibri" pitchFamily="34" charset="-122"/>
@@ -10371,7 +10425,7 @@
       </p:sp>
       <p:sp>
         <p:nvSpPr>
-          <p:cNvPr id="38" name="Shape 36"/>
+          <p:cNvPr id="40" name="Shape 38"/>
           <p:cNvSpPr/>
           <p:nvPr/>
         </p:nvSpPr>
@@ -10390,7 +10444,7 @@
           </a:solidFill>
           <a:ln w="12700">
             <a:solidFill>
-              <a:srgbClr val="6E40C9"/>
+              <a:srgbClr val="8B6AB5"/>
             </a:solidFill>
             <a:prstDash val="solid"/>
           </a:ln>
@@ -10398,7 +10452,7 @@
       </p:sp>
       <p:sp>
         <p:nvSpPr>
-          <p:cNvPr id="39" name="Text 37"/>
+          <p:cNvPr id="41" name="Text 39"/>
           <p:cNvSpPr/>
           <p:nvPr/>
         </p:nvSpPr>
@@ -10423,7 +10477,7 @@
             <a:r>
               <a:rPr lang="en-US" sz="800" dirty="0">
                 <a:solidFill>
-                  <a:srgbClr val="8B949E"/>
+                  <a:srgbClr val="8A8078"/>
                 </a:solidFill>
                 <a:latin typeface="Calibri" pitchFamily="34" charset="0"/>
                 <a:ea typeface="Calibri" pitchFamily="34" charset="-122"/>
@@ -10437,7 +10491,7 @@
       </p:sp>
       <p:sp>
         <p:nvSpPr>
-          <p:cNvPr id="40" name="Shape 38"/>
+          <p:cNvPr id="42" name="Shape 40"/>
           <p:cNvSpPr/>
           <p:nvPr/>
         </p:nvSpPr>
@@ -10452,11 +10506,11 @@
             </a:avLst>
           </a:prstGeom>
           <a:solidFill>
-            <a:srgbClr val="2A1F00"/>
+            <a:srgbClr val="F3EDE0"/>
           </a:solidFill>
           <a:ln w="12700">
             <a:solidFill>
-              <a:srgbClr val="D29922"/>
+              <a:srgbClr val="B8892C"/>
             </a:solidFill>
             <a:prstDash val="solid"/>
           </a:ln>
@@ -10464,7 +10518,7 @@
       </p:sp>
       <p:sp>
         <p:nvSpPr>
-          <p:cNvPr id="41" name="Text 39"/>
+          <p:cNvPr id="43" name="Text 41"/>
           <p:cNvSpPr/>
           <p:nvPr/>
         </p:nvSpPr>
@@ -10489,7 +10543,7 @@
             <a:r>
               <a:rPr lang="en-US" sz="800" dirty="0">
                 <a:solidFill>
-                  <a:srgbClr val="8B949E"/>
+                  <a:srgbClr val="8A8078"/>
                 </a:solidFill>
                 <a:latin typeface="Calibri" pitchFamily="34" charset="0"/>
                 <a:ea typeface="Calibri" pitchFamily="34" charset="-122"/>
@@ -10503,7 +10557,7 @@
       </p:sp>
       <p:sp>
         <p:nvSpPr>
-          <p:cNvPr id="42" name="Text 40"/>
+          <p:cNvPr id="44" name="Text 42"/>
           <p:cNvSpPr/>
           <p:nvPr/>
         </p:nvSpPr>
@@ -10528,13 +10582,13 @@
             <a:r>
               <a:rPr lang="en-US" sz="900" b="1" dirty="0">
                 <a:solidFill>
-                  <a:srgbClr val="F85149"/>
-                </a:solidFill>
-                <a:latin typeface="Calibri" pitchFamily="34" charset="0"/>
-                <a:ea typeface="Calibri" pitchFamily="34" charset="-122"/>
-                <a:cs typeface="Calibri" pitchFamily="34" charset="-120"/>
-              </a:rPr>
-              <a:t>⚠️ DB query: 245ms — 瓶頸！</a:t>
+                  <a:srgbClr val="C4605B"/>
+                </a:solidFill>
+                <a:latin typeface="Calibri" pitchFamily="34" charset="0"/>
+                <a:ea typeface="Calibri" pitchFamily="34" charset="-122"/>
+                <a:cs typeface="Calibri" pitchFamily="34" charset="-120"/>
+              </a:rPr>
+              <a:t>⚠️ DB query: 245ms — Bottleneck!</a:t>
             </a:r>
             <a:endParaRPr lang="en-US" sz="900" dirty="0"/>
           </a:p>
@@ -10542,7 +10596,7 @@
       </p:sp>
       <p:sp>
         <p:nvSpPr>
-          <p:cNvPr id="43" name="Shape 41"/>
+          <p:cNvPr id="45" name="Shape 43"/>
           <p:cNvSpPr/>
           <p:nvPr/>
         </p:nvSpPr>
@@ -10557,18 +10611,18 @@
             </a:avLst>
           </a:prstGeom>
           <a:solidFill>
-            <a:srgbClr val="0D1117"/>
+            <a:srgbClr val="2D2926"/>
           </a:solidFill>
           <a:ln w="12700">
             <a:solidFill>
-              <a:srgbClr val="30363D"/>
+              <a:srgbClr val="D6CCBF"/>
             </a:solidFill>
             <a:prstDash val="solid"/>
           </a:ln>
           <a:effectLst>
             <a:outerShdw sx="100000" sy="100000" kx="0" ky="0" algn="bl" rotWithShape="0" blurRad="127000" dist="50800" dir="2700000">
-              <a:srgbClr val="000000">
-                <a:alpha val="50000"/>
+              <a:srgbClr val="9E9488">
+                <a:alpha val="15000"/>
               </a:srgbClr>
             </a:outerShdw>
           </a:effectLst>
@@ -10576,7 +10630,7 @@
       </p:sp>
       <p:sp>
         <p:nvSpPr>
-          <p:cNvPr id="44" name="Shape 42"/>
+          <p:cNvPr id="46" name="Shape 44"/>
           <p:cNvSpPr/>
           <p:nvPr/>
         </p:nvSpPr>
@@ -10591,11 +10645,11 @@
             </a:avLst>
           </a:prstGeom>
           <a:solidFill>
-            <a:srgbClr val="1C2128"/>
+            <a:srgbClr val="ECE6DD"/>
           </a:solidFill>
           <a:ln w="6350">
             <a:solidFill>
-              <a:srgbClr val="30363D"/>
+              <a:srgbClr val="D6CCBF"/>
             </a:solidFill>
             <a:prstDash val="solid"/>
           </a:ln>
@@ -10603,7 +10657,7 @@
       </p:sp>
       <p:sp>
         <p:nvSpPr>
-          <p:cNvPr id="45" name="Text 43"/>
+          <p:cNvPr id="47" name="Text 45"/>
           <p:cNvSpPr/>
           <p:nvPr/>
         </p:nvSpPr>
@@ -10628,7 +10682,7 @@
             <a:r>
               <a:rPr lang="en-US" sz="800" b="1" dirty="0">
                 <a:solidFill>
-                  <a:srgbClr val="8B949E"/>
+                  <a:srgbClr val="8A8078"/>
                 </a:solidFill>
                 <a:latin typeface="Consolas" pitchFamily="34" charset="0"/>
                 <a:ea typeface="Consolas" pitchFamily="34" charset="-122"/>
@@ -10642,7 +10696,7 @@
       </p:sp>
       <p:sp>
         <p:nvSpPr>
-          <p:cNvPr id="46" name="Text 44"/>
+          <p:cNvPr id="48" name="Text 46"/>
           <p:cNvSpPr/>
           <p:nvPr/>
         </p:nvSpPr>
@@ -10670,7 +10724,7 @@
             <a:r>
               <a:rPr lang="en-US" sz="950" dirty="0">
                 <a:solidFill>
-                  <a:srgbClr val="E6EDF3"/>
+                  <a:srgbClr val="2D2926"/>
                 </a:solidFill>
                 <a:latin typeface="Consolas" pitchFamily="34" charset="0"/>
                 <a:ea typeface="Consolas" pitchFamily="34" charset="-122"/>
@@ -10699,7 +10753,7 @@
             <a:r>
               <a:rPr lang="en-US" sz="950" dirty="0">
                 <a:solidFill>
-                  <a:srgbClr val="E6EDF3"/>
+                  <a:srgbClr val="2D2926"/>
                 </a:solidFill>
                 <a:latin typeface="Consolas" pitchFamily="34" charset="0"/>
                 <a:ea typeface="Consolas" pitchFamily="34" charset="-122"/>
@@ -10728,7 +10782,7 @@
             <a:r>
               <a:rPr lang="en-US" sz="950" dirty="0">
                 <a:solidFill>
-                  <a:srgbClr val="E6EDF3"/>
+                  <a:srgbClr val="2D2926"/>
                 </a:solidFill>
                 <a:latin typeface="Consolas" pitchFamily="34" charset="0"/>
                 <a:ea typeface="Consolas" pitchFamily="34" charset="-122"/>
@@ -10748,7 +10802,7 @@
             <a:r>
               <a:rPr lang="en-US" sz="950" dirty="0">
                 <a:solidFill>
-                  <a:srgbClr val="E6EDF3"/>
+                  <a:srgbClr val="2D2926"/>
                 </a:solidFill>
                 <a:latin typeface="Consolas" pitchFamily="34" charset="0"/>
                 <a:ea typeface="Consolas" pitchFamily="34" charset="-122"/>
@@ -10768,7 +10822,7 @@
             <a:r>
               <a:rPr lang="en-US" sz="950" dirty="0">
                 <a:solidFill>
-                  <a:srgbClr val="E6EDF3"/>
+                  <a:srgbClr val="2D2926"/>
                 </a:solidFill>
                 <a:latin typeface="Consolas" pitchFamily="34" charset="0"/>
                 <a:ea typeface="Consolas" pitchFamily="34" charset="-122"/>
@@ -10788,7 +10842,7 @@
             <a:r>
               <a:rPr lang="en-US" sz="950" dirty="0">
                 <a:solidFill>
-                  <a:srgbClr val="E6EDF3"/>
+                  <a:srgbClr val="2D2926"/>
                 </a:solidFill>
                 <a:latin typeface="Consolas" pitchFamily="34" charset="0"/>
                 <a:ea typeface="Consolas" pitchFamily="34" charset="-122"/>
@@ -10808,7 +10862,7 @@
             <a:r>
               <a:rPr lang="en-US" sz="950" dirty="0">
                 <a:solidFill>
-                  <a:srgbClr val="E6EDF3"/>
+                  <a:srgbClr val="2D2926"/>
                 </a:solidFill>
                 <a:latin typeface="Consolas" pitchFamily="34" charset="0"/>
                 <a:ea typeface="Consolas" pitchFamily="34" charset="-122"/>
@@ -10828,7 +10882,7 @@
             <a:r>
               <a:rPr lang="en-US" sz="950" dirty="0">
                 <a:solidFill>
-                  <a:srgbClr val="E6EDF3"/>
+                  <a:srgbClr val="2D2926"/>
                 </a:solidFill>
                 <a:latin typeface="Consolas" pitchFamily="34" charset="0"/>
                 <a:ea typeface="Consolas" pitchFamily="34" charset="-122"/>
@@ -10848,13 +10902,13 @@
             <a:r>
               <a:rPr lang="en-US" sz="950" dirty="0">
                 <a:solidFill>
-                  <a:srgbClr val="E6EDF3"/>
+                  <a:srgbClr val="2D2926"/>
                 </a:solidFill>
                 <a:latin typeface="Consolas" pitchFamily="34" charset="0"/>
                 <a:ea typeface="Consolas" pitchFamily="34" charset="-122"/>
                 <a:cs typeface="Consolas" pitchFamily="34" charset="-120"/>
               </a:rPr>
-              <a:t>            result = await db.fetch_cart(user_id)  # 自動記錄時間</a:t>
+              <a:t>            result = await db.fetch_cart(user_id)  # Auto-records duration</a:t>
             </a:r>
             <a:endParaRPr lang="en-US" sz="950" dirty="0"/>
           </a:p>
@@ -10868,7 +10922,7 @@
             <a:r>
               <a:rPr lang="en-US" sz="950" dirty="0">
                 <a:solidFill>
-                  <a:srgbClr val="E6EDF3"/>
+                  <a:srgbClr val="2D2926"/>
                 </a:solidFill>
                 <a:latin typeface="Consolas" pitchFamily="34" charset="0"/>
                 <a:ea typeface="Consolas" pitchFamily="34" charset="-122"/>
@@ -10888,7 +10942,7 @@
             <a:r>
               <a:rPr lang="en-US" sz="950" dirty="0">
                 <a:solidFill>
-                  <a:srgbClr val="E6EDF3"/>
+                  <a:srgbClr val="2D2926"/>
                 </a:solidFill>
                 <a:latin typeface="Consolas" pitchFamily="34" charset="0"/>
                 <a:ea typeface="Consolas" pitchFamily="34" charset="-122"/>
@@ -10902,7 +10956,7 @@
       </p:sp>
       <p:sp>
         <p:nvSpPr>
-          <p:cNvPr id="47" name="Shape 45"/>
+          <p:cNvPr id="49" name="Shape 47"/>
           <p:cNvSpPr/>
           <p:nvPr/>
         </p:nvSpPr>
@@ -10917,11 +10971,11 @@
             </a:avLst>
           </a:prstGeom>
           <a:solidFill>
-            <a:srgbClr val="0A1929"/>
+            <a:srgbClr val="EAF0F7"/>
           </a:solidFill>
           <a:ln w="9525">
             <a:solidFill>
-              <a:srgbClr val="58A6FF"/>
+              <a:srgbClr val="4A7FB5"/>
             </a:solidFill>
             <a:prstDash val="solid"/>
           </a:ln>
@@ -10929,7 +10983,7 @@
       </p:sp>
       <p:sp>
         <p:nvSpPr>
-          <p:cNvPr id="48" name="Text 46"/>
+          <p:cNvPr id="50" name="Text 48"/>
           <p:cNvSpPr/>
           <p:nvPr/>
         </p:nvSpPr>
@@ -10954,13 +11008,13 @@
             <a:r>
               <a:rPr lang="en-US" sz="1000" i="1" dirty="0">
                 <a:solidFill>
-                  <a:srgbClr val="8B949E"/>
-                </a:solidFill>
-                <a:latin typeface="Calibri" pitchFamily="34" charset="0"/>
-                <a:ea typeface="Calibri" pitchFamily="34" charset="-122"/>
-                <a:cs typeface="Calibri" pitchFamily="34" charset="-120"/>
-              </a:rPr>
-              <a:t>💡  沒有 Tracing 的分散式系統，除錯就像蒙眼猜謎 — OpenTelemetry 是現代標準</a:t>
+                  <a:srgbClr val="8A8078"/>
+                </a:solidFill>
+                <a:latin typeface="Calibri" pitchFamily="34" charset="0"/>
+                <a:ea typeface="Calibri" pitchFamily="34" charset="-122"/>
+                <a:cs typeface="Calibri" pitchFamily="34" charset="-120"/>
+              </a:rPr>
+              <a:t>💡  Debugging a distributed system without tracing is like solving a puzzle blindfolded — OpenTelemetry is the modern standard</a:t>
             </a:r>
             <a:endParaRPr lang="en-US" sz="1000" dirty="0"/>
           </a:p>
@@ -10980,7 +11034,7 @@
     <p:bg>
       <p:bgPr>
         <a:solidFill>
-          <a:srgbClr val="0D1117"/>
+          <a:srgbClr val="FFFDF8"/>
         </a:solidFill>
       </p:bgPr>
     </p:bg>
@@ -11013,11 +11067,11 @@
             <a:avLst/>
           </a:prstGeom>
           <a:solidFill>
-            <a:srgbClr val="161B22"/>
+            <a:srgbClr val="F5F1EB"/>
           </a:solidFill>
           <a:ln w="6350">
             <a:solidFill>
-              <a:srgbClr val="30363D"/>
+              <a:srgbClr val="D6CCBF"/>
             </a:solidFill>
             <a:prstDash val="solid"/>
           </a:ln>
@@ -11038,11 +11092,11 @@
             <a:avLst/>
           </a:prstGeom>
           <a:solidFill>
-            <a:srgbClr val="58A6FF"/>
+            <a:srgbClr val="4A7FB5"/>
           </a:solidFill>
           <a:ln w="12700">
             <a:solidFill>
-              <a:srgbClr val="58A6FF"/>
+              <a:srgbClr val="4A7FB5"/>
             </a:solidFill>
             <a:prstDash val="solid"/>
           </a:ln>
@@ -11075,13 +11129,13 @@
             <a:r>
               <a:rPr lang="en-US" sz="1600" b="1" dirty="0">
                 <a:solidFill>
-                  <a:srgbClr val="E6EDF3"/>
-                </a:solidFill>
-                <a:latin typeface="Calibri" pitchFamily="34" charset="0"/>
-                <a:ea typeface="Calibri" pitchFamily="34" charset="-122"/>
-                <a:cs typeface="Calibri" pitchFamily="34" charset="-120"/>
-              </a:rPr>
-              <a:t>SRE：把維運當成軟體工程問題來解決</a:t>
+                  <a:srgbClr val="2D2926"/>
+                </a:solidFill>
+                <a:latin typeface="Calibri" pitchFamily="34" charset="0"/>
+                <a:ea typeface="Calibri" pitchFamily="34" charset="-122"/>
+                <a:cs typeface="Calibri" pitchFamily="34" charset="-120"/>
+              </a:rPr>
+              <a:t>SRE: Treating Operations as a Software Engineering Problem</a:t>
             </a:r>
             <a:endParaRPr lang="en-US" sz="1600" dirty="0"/>
           </a:p>
@@ -11114,13 +11168,13 @@
             <a:r>
               <a:rPr lang="en-US" sz="850" dirty="0">
                 <a:solidFill>
-                  <a:srgbClr val="8B949E"/>
-                </a:solidFill>
-                <a:latin typeface="Calibri" pitchFamily="34" charset="0"/>
-                <a:ea typeface="Calibri" pitchFamily="34" charset="-122"/>
-                <a:cs typeface="Calibri" pitchFamily="34" charset="-120"/>
-              </a:rPr>
-              <a:t>PART 6  ·  48 / 50</a:t>
+                  <a:srgbClr val="8A8078"/>
+                </a:solidFill>
+                <a:latin typeface="Calibri" pitchFamily="34" charset="0"/>
+                <a:ea typeface="Calibri" pitchFamily="34" charset="-122"/>
+                <a:cs typeface="Calibri" pitchFamily="34" charset="-120"/>
+              </a:rPr>
+              <a:t>PART 6</a:t>
             </a:r>
             <a:endParaRPr lang="en-US" sz="850" dirty="0"/>
           </a:p>
@@ -11153,13 +11207,13 @@
             <a:r>
               <a:rPr lang="en-US" sz="1300" b="1" dirty="0">
                 <a:solidFill>
-                  <a:srgbClr val="58A6FF"/>
-                </a:solidFill>
-                <a:latin typeface="Calibri" pitchFamily="34" charset="0"/>
-                <a:ea typeface="Calibri" pitchFamily="34" charset="-122"/>
-                <a:cs typeface="Calibri" pitchFamily="34" charset="-120"/>
-              </a:rPr>
-              <a:t>SRE 的核心工作</a:t>
+                  <a:srgbClr val="4A7FB5"/>
+                </a:solidFill>
+                <a:latin typeface="Calibri" pitchFamily="34" charset="0"/>
+                <a:ea typeface="Calibri" pitchFamily="34" charset="-122"/>
+                <a:cs typeface="Calibri" pitchFamily="34" charset="-120"/>
+              </a:rPr>
+              <a:t>Core SRE Responsibilities</a:t>
             </a:r>
             <a:endParaRPr lang="en-US" sz="1300" dirty="0"/>
           </a:p>
@@ -11182,11 +11236,11 @@
             </a:avLst>
           </a:prstGeom>
           <a:solidFill>
-            <a:srgbClr val="161B22"/>
+            <a:srgbClr val="F5F1EB"/>
           </a:solidFill>
           <a:ln w="19050">
             <a:solidFill>
-              <a:srgbClr val="3FB950"/>
+              <a:srgbClr val="4A9968"/>
             </a:solidFill>
             <a:prstDash val="solid"/>
           </a:ln>
@@ -11219,13 +11273,13 @@
             <a:r>
               <a:rPr lang="en-US" sz="1050" b="1" dirty="0">
                 <a:solidFill>
-                  <a:srgbClr val="3FB950"/>
-                </a:solidFill>
-                <a:latin typeface="Calibri" pitchFamily="34" charset="0"/>
-                <a:ea typeface="Calibri" pitchFamily="34" charset="-122"/>
-                <a:cs typeface="Calibri" pitchFamily="34" charset="-120"/>
-              </a:rPr>
-              <a:t>🔧 消除 Toil — 把重複手動工作自動化</a:t>
+                  <a:srgbClr val="4A9968"/>
+                </a:solidFill>
+                <a:latin typeface="Calibri" pitchFamily="34" charset="0"/>
+                <a:ea typeface="Calibri" pitchFamily="34" charset="-122"/>
+                <a:cs typeface="Calibri" pitchFamily="34" charset="-120"/>
+              </a:rPr>
+              <a:t>🔧 Eliminate Toil — Automate repetitive manual work</a:t>
             </a:r>
             <a:endParaRPr lang="en-US" sz="1050" dirty="0"/>
           </a:p>
@@ -11248,11 +11302,11 @@
             </a:avLst>
           </a:prstGeom>
           <a:solidFill>
-            <a:srgbClr val="161B22"/>
+            <a:srgbClr val="F5F1EB"/>
           </a:solidFill>
           <a:ln w="19050">
             <a:solidFill>
-              <a:srgbClr val="58A6FF"/>
+              <a:srgbClr val="4A7FB5"/>
             </a:solidFill>
             <a:prstDash val="solid"/>
           </a:ln>
@@ -11285,13 +11339,13 @@
             <a:r>
               <a:rPr lang="en-US" sz="1050" b="1" dirty="0">
                 <a:solidFill>
-                  <a:srgbClr val="58A6FF"/>
-                </a:solidFill>
-                <a:latin typeface="Calibri" pitchFamily="34" charset="0"/>
-                <a:ea typeface="Calibri" pitchFamily="34" charset="-122"/>
-                <a:cs typeface="Calibri" pitchFamily="34" charset="-120"/>
-              </a:rPr>
-              <a:t>📊 SLI/SLO/Error Budget 管理</a:t>
+                  <a:srgbClr val="4A7FB5"/>
+                </a:solidFill>
+                <a:latin typeface="Calibri" pitchFamily="34" charset="0"/>
+                <a:ea typeface="Calibri" pitchFamily="34" charset="-122"/>
+                <a:cs typeface="Calibri" pitchFamily="34" charset="-120"/>
+              </a:rPr>
+              <a:t>📊 SLI/SLO/Error Budget Management</a:t>
             </a:r>
             <a:endParaRPr lang="en-US" sz="1050" dirty="0"/>
           </a:p>
@@ -11314,11 +11368,11 @@
             </a:avLst>
           </a:prstGeom>
           <a:solidFill>
-            <a:srgbClr val="161B22"/>
+            <a:srgbClr val="F5F1EB"/>
           </a:solidFill>
           <a:ln w="19050">
             <a:solidFill>
-              <a:srgbClr val="F85149"/>
+              <a:srgbClr val="C4605B"/>
             </a:solidFill>
             <a:prstDash val="solid"/>
           </a:ln>
@@ -11351,13 +11405,13 @@
             <a:r>
               <a:rPr lang="en-US" sz="1050" b="1" dirty="0">
                 <a:solidFill>
-                  <a:srgbClr val="F85149"/>
-                </a:solidFill>
-                <a:latin typeface="Calibri" pitchFamily="34" charset="0"/>
-                <a:ea typeface="Calibri" pitchFamily="34" charset="-122"/>
-                <a:cs typeface="Calibri" pitchFamily="34" charset="-120"/>
-              </a:rPr>
-              <a:t>🚨 Incident Response 與 On-Call</a:t>
+                  <a:srgbClr val="C4605B"/>
+                </a:solidFill>
+                <a:latin typeface="Calibri" pitchFamily="34" charset="0"/>
+                <a:ea typeface="Calibri" pitchFamily="34" charset="-122"/>
+                <a:cs typeface="Calibri" pitchFamily="34" charset="-120"/>
+              </a:rPr>
+              <a:t>🚨 Incident Response &amp; On-Call</a:t>
             </a:r>
             <a:endParaRPr lang="en-US" sz="1050" dirty="0"/>
           </a:p>
@@ -11380,11 +11434,11 @@
             </a:avLst>
           </a:prstGeom>
           <a:solidFill>
-            <a:srgbClr val="161B22"/>
+            <a:srgbClr val="F5F1EB"/>
           </a:solidFill>
           <a:ln w="19050">
             <a:solidFill>
-              <a:srgbClr val="D29922"/>
+              <a:srgbClr val="B8892C"/>
             </a:solidFill>
             <a:prstDash val="solid"/>
           </a:ln>
@@ -11417,13 +11471,13 @@
             <a:r>
               <a:rPr lang="en-US" sz="1050" b="1" dirty="0">
                 <a:solidFill>
-                  <a:srgbClr val="D29922"/>
-                </a:solidFill>
-                <a:latin typeface="Calibri" pitchFamily="34" charset="0"/>
-                <a:ea typeface="Calibri" pitchFamily="34" charset="-122"/>
-                <a:cs typeface="Calibri" pitchFamily="34" charset="-120"/>
-              </a:rPr>
-              <a:t>📝 Postmortem 文化 — Blameless</a:t>
+                  <a:srgbClr val="B8892C"/>
+                </a:solidFill>
+                <a:latin typeface="Calibri" pitchFamily="34" charset="0"/>
+                <a:ea typeface="Calibri" pitchFamily="34" charset="-122"/>
+                <a:cs typeface="Calibri" pitchFamily="34" charset="-120"/>
+              </a:rPr>
+              <a:t>📝 Postmortem Culture — Blameless</a:t>
             </a:r>
             <a:endParaRPr lang="en-US" sz="1050" dirty="0"/>
           </a:p>
@@ -11446,11 +11500,11 @@
             </a:avLst>
           </a:prstGeom>
           <a:solidFill>
-            <a:srgbClr val="161B22"/>
+            <a:srgbClr val="F5F1EB"/>
           </a:solidFill>
           <a:ln w="19050">
             <a:solidFill>
-              <a:srgbClr val="6E40C9"/>
+              <a:srgbClr val="8B6AB5"/>
             </a:solidFill>
             <a:prstDash val="solid"/>
           </a:ln>
@@ -11483,13 +11537,13 @@
             <a:r>
               <a:rPr lang="en-US" sz="1050" b="1" dirty="0">
                 <a:solidFill>
-                  <a:srgbClr val="6E40C9"/>
-                </a:solidFill>
-                <a:latin typeface="Calibri" pitchFamily="34" charset="0"/>
-                <a:ea typeface="Calibri" pitchFamily="34" charset="-122"/>
-                <a:cs typeface="Calibri" pitchFamily="34" charset="-120"/>
-              </a:rPr>
-              <a:t>🏗️ 打造更可靠的系統架構</a:t>
+                  <a:srgbClr val="8B6AB5"/>
+                </a:solidFill>
+                <a:latin typeface="Calibri" pitchFamily="34" charset="0"/>
+                <a:ea typeface="Calibri" pitchFamily="34" charset="-122"/>
+                <a:cs typeface="Calibri" pitchFamily="34" charset="-120"/>
+              </a:rPr>
+              <a:t>🏗️ Build more reliable system architectures</a:t>
             </a:r>
             <a:endParaRPr lang="en-US" sz="1050" dirty="0"/>
           </a:p>
@@ -11512,11 +11566,11 @@
             </a:avLst>
           </a:prstGeom>
           <a:solidFill>
-            <a:srgbClr val="161B22"/>
+            <a:srgbClr val="F5F1EB"/>
           </a:solidFill>
           <a:ln w="19050">
             <a:solidFill>
-              <a:srgbClr val="D29922"/>
+              <a:srgbClr val="B8892C"/>
             </a:solidFill>
             <a:prstDash val="solid"/>
           </a:ln>
@@ -11549,13 +11603,13 @@
             <a:r>
               <a:rPr lang="en-US" sz="1100" b="1" dirty="0">
                 <a:solidFill>
-                  <a:srgbClr val="D29922"/>
-                </a:solidFill>
-                <a:latin typeface="Calibri" pitchFamily="34" charset="0"/>
-                <a:ea typeface="Calibri" pitchFamily="34" charset="-122"/>
-                <a:cs typeface="Calibri" pitchFamily="34" charset="-120"/>
-              </a:rPr>
-              <a:t>Toil 預算: &lt; 50% 工作時間</a:t>
+                  <a:srgbClr val="B8892C"/>
+                </a:solidFill>
+                <a:latin typeface="Calibri" pitchFamily="34" charset="0"/>
+                <a:ea typeface="Calibri" pitchFamily="34" charset="-122"/>
+                <a:cs typeface="Calibri" pitchFamily="34" charset="-120"/>
+              </a:rPr>
+              <a:t>Toil Budget: &lt; 50% of work time</a:t>
             </a:r>
             <a:endParaRPr lang="en-US" sz="1100" dirty="0"/>
           </a:p>
@@ -11588,13 +11642,13 @@
             <a:r>
               <a:rPr lang="en-US" sz="900" dirty="0">
                 <a:solidFill>
-                  <a:srgbClr val="8B949E"/>
-                </a:solidFill>
-                <a:latin typeface="Calibri" pitchFamily="34" charset="0"/>
-                <a:ea typeface="Calibri" pitchFamily="34" charset="-122"/>
-                <a:cs typeface="Calibri" pitchFamily="34" charset="-120"/>
-              </a:rPr>
-              <a:t>超過 50% → SRE 幫你自動化，直到降到 50% 以下</a:t>
+                  <a:srgbClr val="8A8078"/>
+                </a:solidFill>
+                <a:latin typeface="Calibri" pitchFamily="34" charset="0"/>
+                <a:ea typeface="Calibri" pitchFamily="34" charset="-122"/>
+                <a:cs typeface="Calibri" pitchFamily="34" charset="-120"/>
+              </a:rPr>
+              <a:t>Exceeds 50% → SRE automates until it drops below 50%</a:t>
             </a:r>
             <a:endParaRPr lang="en-US" sz="900" dirty="0"/>
           </a:p>
@@ -11617,11 +11671,11 @@
             </a:avLst>
           </a:prstGeom>
           <a:solidFill>
-            <a:srgbClr val="1C2128"/>
+            <a:srgbClr val="ECE6DD"/>
           </a:solidFill>
           <a:ln w="12700">
             <a:solidFill>
-              <a:srgbClr val="30363D"/>
+              <a:srgbClr val="D6CCBF"/>
             </a:solidFill>
             <a:prstDash val="solid"/>
           </a:ln>
@@ -11682,7 +11736,7 @@
             <a:r>
               <a:rPr lang="en-US" sz="1000" b="1" dirty="0">
                 <a:solidFill>
-                  <a:srgbClr val="E6EDF3"/>
+                  <a:srgbClr val="2D2926"/>
                 </a:solidFill>
                 <a:latin typeface="Calibri" pitchFamily="34" charset="0"/>
                 <a:ea typeface="Calibri" pitchFamily="34" charset="-122"/>
@@ -11721,7 +11775,7 @@
             <a:r>
               <a:rPr lang="en-US" sz="1000" b="1" dirty="0">
                 <a:solidFill>
-                  <a:srgbClr val="E6EDF3"/>
+                  <a:srgbClr val="2D2926"/>
                 </a:solidFill>
                 <a:latin typeface="Calibri" pitchFamily="34" charset="0"/>
                 <a:ea typeface="Calibri" pitchFamily="34" charset="-122"/>
@@ -11760,7 +11814,7 @@
             <a:r>
               <a:rPr lang="en-US" sz="1000" b="1" dirty="0">
                 <a:solidFill>
-                  <a:srgbClr val="E6EDF3"/>
+                  <a:srgbClr val="2D2926"/>
                 </a:solidFill>
                 <a:latin typeface="Calibri" pitchFamily="34" charset="0"/>
                 <a:ea typeface="Calibri" pitchFamily="34" charset="-122"/>
@@ -11789,11 +11843,11 @@
             </a:avLst>
           </a:prstGeom>
           <a:solidFill>
-            <a:srgbClr val="161B22"/>
+            <a:srgbClr val="F5F1EB"/>
           </a:solidFill>
           <a:ln w="6350">
             <a:solidFill>
-              <a:srgbClr val="30363D"/>
+              <a:srgbClr val="D6CCBF"/>
             </a:solidFill>
             <a:prstDash val="solid"/>
           </a:ln>
@@ -11826,13 +11880,13 @@
             <a:r>
               <a:rPr lang="en-US" sz="900" b="1" dirty="0">
                 <a:solidFill>
-                  <a:srgbClr val="E6EDF3"/>
-                </a:solidFill>
-                <a:latin typeface="Calibri" pitchFamily="34" charset="0"/>
-                <a:ea typeface="Calibri" pitchFamily="34" charset="-122"/>
-                <a:cs typeface="Calibri" pitchFamily="34" charset="-120"/>
-              </a:rPr>
-              <a:t>主要目標</a:t>
+                  <a:srgbClr val="2D2926"/>
+                </a:solidFill>
+                <a:latin typeface="Calibri" pitchFamily="34" charset="0"/>
+                <a:ea typeface="Calibri" pitchFamily="34" charset="-122"/>
+                <a:cs typeface="Calibri" pitchFamily="34" charset="-120"/>
+              </a:rPr>
+              <a:t>Primary Goal</a:t>
             </a:r>
             <a:endParaRPr lang="en-US" sz="900" dirty="0"/>
           </a:p>
@@ -11865,13 +11919,13 @@
             <a:r>
               <a:rPr lang="en-US" sz="900" dirty="0">
                 <a:solidFill>
-                  <a:srgbClr val="8B949E"/>
-                </a:solidFill>
-                <a:latin typeface="Calibri" pitchFamily="34" charset="0"/>
-                <a:ea typeface="Calibri" pitchFamily="34" charset="-122"/>
-                <a:cs typeface="Calibri" pitchFamily="34" charset="-120"/>
-              </a:rPr>
-              <a:t>穩定</a:t>
+                  <a:srgbClr val="8A8078"/>
+                </a:solidFill>
+                <a:latin typeface="Calibri" pitchFamily="34" charset="0"/>
+                <a:ea typeface="Calibri" pitchFamily="34" charset="-122"/>
+                <a:cs typeface="Calibri" pitchFamily="34" charset="-120"/>
+              </a:rPr>
+              <a:t>Stability</a:t>
             </a:r>
             <a:endParaRPr lang="en-US" sz="900" dirty="0"/>
           </a:p>
@@ -11904,13 +11958,13 @@
             <a:r>
               <a:rPr lang="en-US" sz="900" dirty="0">
                 <a:solidFill>
-                  <a:srgbClr val="58A6FF"/>
-                </a:solidFill>
-                <a:latin typeface="Calibri" pitchFamily="34" charset="0"/>
-                <a:ea typeface="Calibri" pitchFamily="34" charset="-122"/>
-                <a:cs typeface="Calibri" pitchFamily="34" charset="-120"/>
-              </a:rPr>
-              <a:t>速度</a:t>
+                  <a:srgbClr val="4A7FB5"/>
+                </a:solidFill>
+                <a:latin typeface="Calibri" pitchFamily="34" charset="0"/>
+                <a:ea typeface="Calibri" pitchFamily="34" charset="-122"/>
+                <a:cs typeface="Calibri" pitchFamily="34" charset="-120"/>
+              </a:rPr>
+              <a:t>Speed</a:t>
             </a:r>
             <a:endParaRPr lang="en-US" sz="900" dirty="0"/>
           </a:p>
@@ -11943,13 +11997,13 @@
             <a:r>
               <a:rPr lang="en-US" sz="900" dirty="0">
                 <a:solidFill>
-                  <a:srgbClr val="3FB950"/>
-                </a:solidFill>
-                <a:latin typeface="Calibri" pitchFamily="34" charset="0"/>
-                <a:ea typeface="Calibri" pitchFamily="34" charset="-122"/>
-                <a:cs typeface="Calibri" pitchFamily="34" charset="-120"/>
-              </a:rPr>
-              <a:t>可靠性</a:t>
+                  <a:srgbClr val="4A9968"/>
+                </a:solidFill>
+                <a:latin typeface="Calibri" pitchFamily="34" charset="0"/>
+                <a:ea typeface="Calibri" pitchFamily="34" charset="-122"/>
+                <a:cs typeface="Calibri" pitchFamily="34" charset="-120"/>
+              </a:rPr>
+              <a:t>Reliability</a:t>
             </a:r>
             <a:endParaRPr lang="en-US" sz="900" dirty="0"/>
           </a:p>
@@ -11972,11 +12026,11 @@
             </a:avLst>
           </a:prstGeom>
           <a:solidFill>
-            <a:srgbClr val="1C2128"/>
+            <a:srgbClr val="ECE6DD"/>
           </a:solidFill>
           <a:ln w="6350">
             <a:solidFill>
-              <a:srgbClr val="30363D"/>
+              <a:srgbClr val="D6CCBF"/>
             </a:solidFill>
             <a:prstDash val="solid"/>
           </a:ln>
@@ -12009,13 +12063,13 @@
             <a:r>
               <a:rPr lang="en-US" sz="900" b="1" dirty="0">
                 <a:solidFill>
-                  <a:srgbClr val="E6EDF3"/>
-                </a:solidFill>
-                <a:latin typeface="Calibri" pitchFamily="34" charset="0"/>
-                <a:ea typeface="Calibri" pitchFamily="34" charset="-122"/>
-                <a:cs typeface="Calibri" pitchFamily="34" charset="-120"/>
-              </a:rPr>
-              <a:t>自動化</a:t>
+                  <a:srgbClr val="2D2926"/>
+                </a:solidFill>
+                <a:latin typeface="Calibri" pitchFamily="34" charset="0"/>
+                <a:ea typeface="Calibri" pitchFamily="34" charset="-122"/>
+                <a:cs typeface="Calibri" pitchFamily="34" charset="-120"/>
+              </a:rPr>
+              <a:t>Automation</a:t>
             </a:r>
             <a:endParaRPr lang="en-US" sz="900" dirty="0"/>
           </a:p>
@@ -12048,13 +12102,13 @@
             <a:r>
               <a:rPr lang="en-US" sz="900" dirty="0">
                 <a:solidFill>
-                  <a:srgbClr val="F85149"/>
-                </a:solidFill>
-                <a:latin typeface="Calibri" pitchFamily="34" charset="0"/>
-                <a:ea typeface="Calibri" pitchFamily="34" charset="-122"/>
-                <a:cs typeface="Calibri" pitchFamily="34" charset="-120"/>
-              </a:rPr>
-              <a:t>手動 SSH</a:t>
+                  <a:srgbClr val="C4605B"/>
+                </a:solidFill>
+                <a:latin typeface="Calibri" pitchFamily="34" charset="0"/>
+                <a:ea typeface="Calibri" pitchFamily="34" charset="-122"/>
+                <a:cs typeface="Calibri" pitchFamily="34" charset="-120"/>
+              </a:rPr>
+              <a:t>Manual SSH</a:t>
             </a:r>
             <a:endParaRPr lang="en-US" sz="900" dirty="0"/>
           </a:p>
@@ -12087,7 +12141,7 @@
             <a:r>
               <a:rPr lang="en-US" sz="900" dirty="0">
                 <a:solidFill>
-                  <a:srgbClr val="58A6FF"/>
+                  <a:srgbClr val="4A7FB5"/>
                 </a:solidFill>
                 <a:latin typeface="Calibri" pitchFamily="34" charset="0"/>
                 <a:ea typeface="Calibri" pitchFamily="34" charset="-122"/>
@@ -12126,13 +12180,13 @@
             <a:r>
               <a:rPr lang="en-US" sz="900" dirty="0">
                 <a:solidFill>
-                  <a:srgbClr val="3FB950"/>
-                </a:solidFill>
-                <a:latin typeface="Calibri" pitchFamily="34" charset="0"/>
-                <a:ea typeface="Calibri" pitchFamily="34" charset="-122"/>
-                <a:cs typeface="Calibri" pitchFamily="34" charset="-120"/>
-              </a:rPr>
-              <a:t>全自動化</a:t>
+                  <a:srgbClr val="4A9968"/>
+                </a:solidFill>
+                <a:latin typeface="Calibri" pitchFamily="34" charset="0"/>
+                <a:ea typeface="Calibri" pitchFamily="34" charset="-122"/>
+                <a:cs typeface="Calibri" pitchFamily="34" charset="-120"/>
+              </a:rPr>
+              <a:t>Fully Automated</a:t>
             </a:r>
             <a:endParaRPr lang="en-US" sz="900" dirty="0"/>
           </a:p>
@@ -12155,11 +12209,11 @@
             </a:avLst>
           </a:prstGeom>
           <a:solidFill>
-            <a:srgbClr val="161B22"/>
+            <a:srgbClr val="F5F1EB"/>
           </a:solidFill>
           <a:ln w="6350">
             <a:solidFill>
-              <a:srgbClr val="30363D"/>
+              <a:srgbClr val="D6CCBF"/>
             </a:solidFill>
             <a:prstDash val="solid"/>
           </a:ln>
@@ -12192,13 +12246,13 @@
             <a:r>
               <a:rPr lang="en-US" sz="900" b="1" dirty="0">
                 <a:solidFill>
-                  <a:srgbClr val="E6EDF3"/>
-                </a:solidFill>
-                <a:latin typeface="Calibri" pitchFamily="34" charset="0"/>
-                <a:ea typeface="Calibri" pitchFamily="34" charset="-122"/>
-                <a:cs typeface="Calibri" pitchFamily="34" charset="-120"/>
-              </a:rPr>
-              <a:t>故障處理</a:t>
+                  <a:srgbClr val="2D2926"/>
+                </a:solidFill>
+                <a:latin typeface="Calibri" pitchFamily="34" charset="0"/>
+                <a:ea typeface="Calibri" pitchFamily="34" charset="-122"/>
+                <a:cs typeface="Calibri" pitchFamily="34" charset="-120"/>
+              </a:rPr>
+              <a:t>Failure Handling</a:t>
             </a:r>
             <a:endParaRPr lang="en-US" sz="900" dirty="0"/>
           </a:p>
@@ -12231,13 +12285,13 @@
             <a:r>
               <a:rPr lang="en-US" sz="900" dirty="0">
                 <a:solidFill>
-                  <a:srgbClr val="8B949E"/>
-                </a:solidFill>
-                <a:latin typeface="Calibri" pitchFamily="34" charset="0"/>
-                <a:ea typeface="Calibri" pitchFamily="34" charset="-122"/>
-                <a:cs typeface="Calibri" pitchFamily="34" charset="-120"/>
-              </a:rPr>
-              <a:t>修完拉倒</a:t>
+                  <a:srgbClr val="8A8078"/>
+                </a:solidFill>
+                <a:latin typeface="Calibri" pitchFamily="34" charset="0"/>
+                <a:ea typeface="Calibri" pitchFamily="34" charset="-122"/>
+                <a:cs typeface="Calibri" pitchFamily="34" charset="-120"/>
+              </a:rPr>
+              <a:t>Fix &amp; Forget</a:t>
             </a:r>
             <a:endParaRPr lang="en-US" sz="900" dirty="0"/>
           </a:p>
@@ -12270,13 +12324,13 @@
             <a:r>
               <a:rPr lang="en-US" sz="900" dirty="0">
                 <a:solidFill>
-                  <a:srgbClr val="D29922"/>
-                </a:solidFill>
-                <a:latin typeface="Calibri" pitchFamily="34" charset="0"/>
-                <a:ea typeface="Calibri" pitchFamily="34" charset="-122"/>
-                <a:cs typeface="Calibri" pitchFamily="34" charset="-120"/>
-              </a:rPr>
-              <a:t>不一定</a:t>
+                  <a:srgbClr val="B8892C"/>
+                </a:solidFill>
+                <a:latin typeface="Calibri" pitchFamily="34" charset="0"/>
+                <a:ea typeface="Calibri" pitchFamily="34" charset="-122"/>
+                <a:cs typeface="Calibri" pitchFamily="34" charset="-120"/>
+              </a:rPr>
+              <a:t>Inconsistent</a:t>
             </a:r>
             <a:endParaRPr lang="en-US" sz="900" dirty="0"/>
           </a:p>
@@ -12309,13 +12363,13 @@
             <a:r>
               <a:rPr lang="en-US" sz="900" dirty="0">
                 <a:solidFill>
-                  <a:srgbClr val="3FB950"/>
-                </a:solidFill>
-                <a:latin typeface="Calibri" pitchFamily="34" charset="0"/>
-                <a:ea typeface="Calibri" pitchFamily="34" charset="-122"/>
-                <a:cs typeface="Calibri" pitchFamily="34" charset="-120"/>
-              </a:rPr>
-              <a:t>Postmortem 必須</a:t>
+                  <a:srgbClr val="4A9968"/>
+                </a:solidFill>
+                <a:latin typeface="Calibri" pitchFamily="34" charset="0"/>
+                <a:ea typeface="Calibri" pitchFamily="34" charset="-122"/>
+                <a:cs typeface="Calibri" pitchFamily="34" charset="-120"/>
+              </a:rPr>
+              <a:t>Postmortem Required</a:t>
             </a:r>
             <a:endParaRPr lang="en-US" sz="900" dirty="0"/>
           </a:p>
@@ -12338,11 +12392,11 @@
             </a:avLst>
           </a:prstGeom>
           <a:solidFill>
-            <a:srgbClr val="1C2128"/>
+            <a:srgbClr val="ECE6DD"/>
           </a:solidFill>
           <a:ln w="6350">
             <a:solidFill>
-              <a:srgbClr val="30363D"/>
+              <a:srgbClr val="D6CCBF"/>
             </a:solidFill>
             <a:prstDash val="solid"/>
           </a:ln>
@@ -12375,13 +12429,13 @@
             <a:r>
               <a:rPr lang="en-US" sz="900" b="1" dirty="0">
                 <a:solidFill>
-                  <a:srgbClr val="E6EDF3"/>
-                </a:solidFill>
-                <a:latin typeface="Calibri" pitchFamily="34" charset="0"/>
-                <a:ea typeface="Calibri" pitchFamily="34" charset="-122"/>
-                <a:cs typeface="Calibri" pitchFamily="34" charset="-120"/>
-              </a:rPr>
-              <a:t>衡量方式</a:t>
+                  <a:srgbClr val="2D2926"/>
+                </a:solidFill>
+                <a:latin typeface="Calibri" pitchFamily="34" charset="0"/>
+                <a:ea typeface="Calibri" pitchFamily="34" charset="-122"/>
+                <a:cs typeface="Calibri" pitchFamily="34" charset="-120"/>
+              </a:rPr>
+              <a:t>Measurement</a:t>
             </a:r>
             <a:endParaRPr lang="en-US" sz="900" dirty="0"/>
           </a:p>
@@ -12414,13 +12468,13 @@
             <a:r>
               <a:rPr lang="en-US" sz="900" dirty="0">
                 <a:solidFill>
-                  <a:srgbClr val="8B949E"/>
-                </a:solidFill>
-                <a:latin typeface="Calibri" pitchFamily="34" charset="0"/>
-                <a:ea typeface="Calibri" pitchFamily="34" charset="-122"/>
-                <a:cs typeface="Calibri" pitchFamily="34" charset="-120"/>
-              </a:rPr>
-              <a:t>有沒有當機</a:t>
+                  <a:srgbClr val="8A8078"/>
+                </a:solidFill>
+                <a:latin typeface="Calibri" pitchFamily="34" charset="0"/>
+                <a:ea typeface="Calibri" pitchFamily="34" charset="-122"/>
+                <a:cs typeface="Calibri" pitchFamily="34" charset="-120"/>
+              </a:rPr>
+              <a:t>Uptime/Downtime</a:t>
             </a:r>
             <a:endParaRPr lang="en-US" sz="900" dirty="0"/>
           </a:p>
@@ -12453,13 +12507,13 @@
             <a:r>
               <a:rPr lang="en-US" sz="900" dirty="0">
                 <a:solidFill>
-                  <a:srgbClr val="58A6FF"/>
-                </a:solidFill>
-                <a:latin typeface="Calibri" pitchFamily="34" charset="0"/>
-                <a:ea typeface="Calibri" pitchFamily="34" charset="-122"/>
-                <a:cs typeface="Calibri" pitchFamily="34" charset="-120"/>
-              </a:rPr>
-              <a:t>部署頻率</a:t>
+                  <a:srgbClr val="4A7FB5"/>
+                </a:solidFill>
+                <a:latin typeface="Calibri" pitchFamily="34" charset="0"/>
+                <a:ea typeface="Calibri" pitchFamily="34" charset="-122"/>
+                <a:cs typeface="Calibri" pitchFamily="34" charset="-120"/>
+              </a:rPr>
+              <a:t>Deploy Frequency</a:t>
             </a:r>
             <a:endParaRPr lang="en-US" sz="900" dirty="0"/>
           </a:p>
@@ -12492,7 +12546,7 @@
             <a:r>
               <a:rPr lang="en-US" sz="900" dirty="0">
                 <a:solidFill>
-                  <a:srgbClr val="3FB950"/>
+                  <a:srgbClr val="4A9968"/>
                 </a:solidFill>
                 <a:latin typeface="Calibri" pitchFamily="34" charset="0"/>
                 <a:ea typeface="Calibri" pitchFamily="34" charset="-122"/>
@@ -12521,11 +12575,11 @@
             </a:avLst>
           </a:prstGeom>
           <a:solidFill>
-            <a:srgbClr val="0A1929"/>
+            <a:srgbClr val="EAF0F7"/>
           </a:solidFill>
           <a:ln w="9525">
             <a:solidFill>
-              <a:srgbClr val="58A6FF"/>
+              <a:srgbClr val="4A7FB5"/>
             </a:solidFill>
             <a:prstDash val="solid"/>
           </a:ln>
@@ -12558,13 +12612,13 @@
             <a:r>
               <a:rPr lang="en-US" sz="1000" i="1" dirty="0">
                 <a:solidFill>
-                  <a:srgbClr val="8B949E"/>
-                </a:solidFill>
-                <a:latin typeface="Calibri" pitchFamily="34" charset="0"/>
-                <a:ea typeface="Calibri" pitchFamily="34" charset="-122"/>
-                <a:cs typeface="Calibri" pitchFamily="34" charset="-120"/>
-              </a:rPr>
-              <a:t>💡  Google 的 SRE 手冊：「SRE 是把軟體工程師扔進維運問題 — 他們的反應是把一切自動化」</a:t>
+                  <a:srgbClr val="8A8078"/>
+                </a:solidFill>
+                <a:latin typeface="Calibri" pitchFamily="34" charset="0"/>
+                <a:ea typeface="Calibri" pitchFamily="34" charset="-122"/>
+                <a:cs typeface="Calibri" pitchFamily="34" charset="-120"/>
+              </a:rPr>
+              <a:t>💡  Google SRE Handbook: 'SRE is what happens when you ask a software engineer to design an operations team — they automate everything'</a:t>
             </a:r>
             <a:endParaRPr lang="en-US" sz="1000" dirty="0"/>
           </a:p>
@@ -12584,7 +12638,7 @@
     <p:bg>
       <p:bgPr>
         <a:solidFill>
-          <a:srgbClr val="0D1117"/>
+          <a:srgbClr val="FFFDF8"/>
         </a:solidFill>
       </p:bgPr>
     </p:bg>
@@ -12617,11 +12671,11 @@
             <a:avLst/>
           </a:prstGeom>
           <a:solidFill>
-            <a:srgbClr val="161B22"/>
+            <a:srgbClr val="F5F1EB"/>
           </a:solidFill>
           <a:ln w="6350">
             <a:solidFill>
-              <a:srgbClr val="30363D"/>
+              <a:srgbClr val="D6CCBF"/>
             </a:solidFill>
             <a:prstDash val="solid"/>
           </a:ln>
@@ -12642,11 +12696,11 @@
             <a:avLst/>
           </a:prstGeom>
           <a:solidFill>
-            <a:srgbClr val="D29922"/>
+            <a:srgbClr val="B8892C"/>
           </a:solidFill>
           <a:ln w="12700">
             <a:solidFill>
-              <a:srgbClr val="D29922"/>
+              <a:srgbClr val="B8892C"/>
             </a:solidFill>
             <a:prstDash val="solid"/>
           </a:ln>
@@ -12679,13 +12733,13 @@
             <a:r>
               <a:rPr lang="en-US" sz="1600" b="1" dirty="0">
                 <a:solidFill>
-                  <a:srgbClr val="E6EDF3"/>
-                </a:solidFill>
-                <a:latin typeface="Calibri" pitchFamily="34" charset="0"/>
-                <a:ea typeface="Calibri" pitchFamily="34" charset="-122"/>
-                <a:cs typeface="Calibri" pitchFamily="34" charset="-120"/>
-              </a:rPr>
-              <a:t>Postmortem：從故障中學習，而不是追責</a:t>
+                  <a:srgbClr val="2D2926"/>
+                </a:solidFill>
+                <a:latin typeface="Calibri" pitchFamily="34" charset="0"/>
+                <a:ea typeface="Calibri" pitchFamily="34" charset="-122"/>
+                <a:cs typeface="Calibri" pitchFamily="34" charset="-120"/>
+              </a:rPr>
+              <a:t>Blameless Postmortem: Learning from Failures</a:t>
             </a:r>
             <a:endParaRPr lang="en-US" sz="1600" dirty="0"/>
           </a:p>
@@ -12718,13 +12772,13 @@
             <a:r>
               <a:rPr lang="en-US" sz="850" dirty="0">
                 <a:solidFill>
-                  <a:srgbClr val="8B949E"/>
-                </a:solidFill>
-                <a:latin typeface="Calibri" pitchFamily="34" charset="0"/>
-                <a:ea typeface="Calibri" pitchFamily="34" charset="-122"/>
-                <a:cs typeface="Calibri" pitchFamily="34" charset="-120"/>
-              </a:rPr>
-              <a:t>PART 6  ·  49 / 50</a:t>
+                  <a:srgbClr val="8A8078"/>
+                </a:solidFill>
+                <a:latin typeface="Calibri" pitchFamily="34" charset="0"/>
+                <a:ea typeface="Calibri" pitchFamily="34" charset="-122"/>
+                <a:cs typeface="Calibri" pitchFamily="34" charset="-120"/>
+              </a:rPr>
+              <a:t>PART 6</a:t>
             </a:r>
             <a:endParaRPr lang="en-US" sz="850" dirty="0"/>
           </a:p>
@@ -12757,7 +12811,7 @@
             <a:r>
               <a:rPr lang="en-US" sz="1300" b="1" dirty="0">
                 <a:solidFill>
-                  <a:srgbClr val="D29922"/>
+                  <a:srgbClr val="B8892C"/>
                 </a:solidFill>
                 <a:latin typeface="Calibri" pitchFamily="34" charset="0"/>
                 <a:ea typeface="Calibri" pitchFamily="34" charset="-122"/>
@@ -12796,13 +12850,13 @@
             <a:r>
               <a:rPr lang="en-US" sz="1000" dirty="0">
                 <a:solidFill>
-                  <a:srgbClr val="8B949E"/>
-                </a:solidFill>
-                <a:latin typeface="Calibri" pitchFamily="34" charset="0"/>
-                <a:ea typeface="Calibri" pitchFamily="34" charset="-122"/>
-                <a:cs typeface="Calibri" pitchFamily="34" charset="-120"/>
-              </a:rPr>
-              <a:t>不找兇手，找根本原因 (Root Cause)</a:t>
+                  <a:srgbClr val="8A8078"/>
+                </a:solidFill>
+                <a:latin typeface="Calibri" pitchFamily="34" charset="0"/>
+                <a:ea typeface="Calibri" pitchFamily="34" charset="-122"/>
+                <a:cs typeface="Calibri" pitchFamily="34" charset="-120"/>
+              </a:rPr>
+              <a:t>Find the root cause, not someone to blame</a:t>
             </a:r>
             <a:endParaRPr lang="en-US" sz="1000" dirty="0"/>
           </a:p>
@@ -12825,11 +12879,11 @@
             </a:avLst>
           </a:prstGeom>
           <a:solidFill>
-            <a:srgbClr val="0F2A1A"/>
+            <a:srgbClr val="E5F0E9"/>
           </a:solidFill>
           <a:ln w="19050">
             <a:solidFill>
-              <a:srgbClr val="3FB950"/>
+              <a:srgbClr val="4A9968"/>
             </a:solidFill>
             <a:prstDash val="solid"/>
           </a:ln>
@@ -12862,13 +12916,13 @@
             <a:r>
               <a:rPr lang="en-US" sz="1050" b="1" dirty="0">
                 <a:solidFill>
-                  <a:srgbClr val="3FB950"/>
-                </a:solidFill>
-                <a:latin typeface="Calibri" pitchFamily="34" charset="0"/>
-                <a:ea typeface="Calibri" pitchFamily="34" charset="-122"/>
-                <a:cs typeface="Calibri" pitchFamily="34" charset="-120"/>
-              </a:rPr>
-              <a:t>✅ 描述事實，不指責個人</a:t>
+                  <a:srgbClr val="4A9968"/>
+                </a:solidFill>
+                <a:latin typeface="Calibri" pitchFamily="34" charset="0"/>
+                <a:ea typeface="Calibri" pitchFamily="34" charset="-122"/>
+                <a:cs typeface="Calibri" pitchFamily="34" charset="-120"/>
+              </a:rPr>
+              <a:t>✅ Describe facts, don't blame individuals</a:t>
             </a:r>
             <a:endParaRPr lang="en-US" sz="1050" dirty="0"/>
           </a:p>
@@ -12891,11 +12945,11 @@
             </a:avLst>
           </a:prstGeom>
           <a:solidFill>
-            <a:srgbClr val="0F2A1A"/>
+            <a:srgbClr val="E5F0E9"/>
           </a:solidFill>
           <a:ln w="19050">
             <a:solidFill>
-              <a:srgbClr val="3FB950"/>
+              <a:srgbClr val="4A9968"/>
             </a:solidFill>
             <a:prstDash val="solid"/>
           </a:ln>
@@ -12928,13 +12982,13 @@
             <a:r>
               <a:rPr lang="en-US" sz="1050" b="1" dirty="0">
                 <a:solidFill>
-                  <a:srgbClr val="3FB950"/>
-                </a:solidFill>
-                <a:latin typeface="Calibri" pitchFamily="34" charset="0"/>
-                <a:ea typeface="Calibri" pitchFamily="34" charset="-122"/>
-                <a:cs typeface="Calibri" pitchFamily="34" charset="-120"/>
-              </a:rPr>
-              <a:t>✅ 5-Why 根本原因分析</a:t>
+                  <a:srgbClr val="4A9968"/>
+                </a:solidFill>
+                <a:latin typeface="Calibri" pitchFamily="34" charset="0"/>
+                <a:ea typeface="Calibri" pitchFamily="34" charset="-122"/>
+                <a:cs typeface="Calibri" pitchFamily="34" charset="-120"/>
+              </a:rPr>
+              <a:t>✅ 5-Why root cause analysis</a:t>
             </a:r>
             <a:endParaRPr lang="en-US" sz="1050" dirty="0"/>
           </a:p>
@@ -12957,11 +13011,11 @@
             </a:avLst>
           </a:prstGeom>
           <a:solidFill>
-            <a:srgbClr val="0F2A1A"/>
+            <a:srgbClr val="E5F0E9"/>
           </a:solidFill>
           <a:ln w="19050">
             <a:solidFill>
-              <a:srgbClr val="3FB950"/>
+              <a:srgbClr val="4A9968"/>
             </a:solidFill>
             <a:prstDash val="solid"/>
           </a:ln>
@@ -12994,13 +13048,13 @@
             <a:r>
               <a:rPr lang="en-US" sz="1050" b="1" dirty="0">
                 <a:solidFill>
-                  <a:srgbClr val="3FB950"/>
-                </a:solidFill>
-                <a:latin typeface="Calibri" pitchFamily="34" charset="0"/>
-                <a:ea typeface="Calibri" pitchFamily="34" charset="-122"/>
-                <a:cs typeface="Calibri" pitchFamily="34" charset="-120"/>
-              </a:rPr>
-              <a:t>✅ 系統性改善，而非懲罰</a:t>
+                  <a:srgbClr val="4A9968"/>
+                </a:solidFill>
+                <a:latin typeface="Calibri" pitchFamily="34" charset="0"/>
+                <a:ea typeface="Calibri" pitchFamily="34" charset="-122"/>
+                <a:cs typeface="Calibri" pitchFamily="34" charset="-120"/>
+              </a:rPr>
+              <a:t>✅ Systemic improvement, not punishment</a:t>
             </a:r>
             <a:endParaRPr lang="en-US" sz="1050" dirty="0"/>
           </a:p>
@@ -13023,11 +13077,11 @@
             </a:avLst>
           </a:prstGeom>
           <a:solidFill>
-            <a:srgbClr val="0F2A1A"/>
+            <a:srgbClr val="E5F0E9"/>
           </a:solidFill>
           <a:ln w="19050">
             <a:solidFill>
-              <a:srgbClr val="3FB950"/>
+              <a:srgbClr val="4A9968"/>
             </a:solidFill>
             <a:prstDash val="solid"/>
           </a:ln>
@@ -13060,13 +13114,13 @@
             <a:r>
               <a:rPr lang="en-US" sz="1050" b="1" dirty="0">
                 <a:solidFill>
-                  <a:srgbClr val="3FB950"/>
-                </a:solidFill>
-                <a:latin typeface="Calibri" pitchFamily="34" charset="0"/>
-                <a:ea typeface="Calibri" pitchFamily="34" charset="-122"/>
-                <a:cs typeface="Calibri" pitchFamily="34" charset="-120"/>
-              </a:rPr>
-              <a:t>✅ 公開分享學習成果</a:t>
+                  <a:srgbClr val="4A9968"/>
+                </a:solidFill>
+                <a:latin typeface="Calibri" pitchFamily="34" charset="0"/>
+                <a:ea typeface="Calibri" pitchFamily="34" charset="-122"/>
+                <a:cs typeface="Calibri" pitchFamily="34" charset="-120"/>
+              </a:rPr>
+              <a:t>✅ Share learnings openly</a:t>
             </a:r>
             <a:endParaRPr lang="en-US" sz="1050" dirty="0"/>
           </a:p>
@@ -13089,11 +13143,11 @@
             </a:avLst>
           </a:prstGeom>
           <a:solidFill>
-            <a:srgbClr val="2A0F0F"/>
+            <a:srgbClr val="F8ECEC"/>
           </a:solidFill>
           <a:ln w="19050">
             <a:solidFill>
-              <a:srgbClr val="F85149"/>
+              <a:srgbClr val="C4605B"/>
             </a:solidFill>
             <a:prstDash val="solid"/>
           </a:ln>
@@ -13126,13 +13180,13 @@
             <a:r>
               <a:rPr lang="en-US" sz="1100" b="1" dirty="0">
                 <a:solidFill>
-                  <a:srgbClr val="F85149"/>
-                </a:solidFill>
-                <a:latin typeface="Calibri" pitchFamily="34" charset="0"/>
-                <a:ea typeface="Calibri" pitchFamily="34" charset="-122"/>
-                <a:cs typeface="Calibri" pitchFamily="34" charset="-120"/>
-              </a:rPr>
-              <a:t>❌ 禁止: 「都是 XXX 的錯」</a:t>
+                  <a:srgbClr val="C4605B"/>
+                </a:solidFill>
+                <a:latin typeface="Calibri" pitchFamily="34" charset="0"/>
+                <a:ea typeface="Calibri" pitchFamily="34" charset="-122"/>
+                <a:cs typeface="Calibri" pitchFamily="34" charset="-120"/>
+              </a:rPr>
+              <a:t>❌ Forbidden: 'It was all XXX's fault'</a:t>
             </a:r>
             <a:endParaRPr lang="en-US" sz="1100" dirty="0"/>
           </a:p>
@@ -13155,18 +13209,18 @@
             </a:avLst>
           </a:prstGeom>
           <a:solidFill>
-            <a:srgbClr val="0D1117"/>
+            <a:srgbClr val="2D2926"/>
           </a:solidFill>
           <a:ln w="12700">
             <a:solidFill>
-              <a:srgbClr val="30363D"/>
+              <a:srgbClr val="D6CCBF"/>
             </a:solidFill>
             <a:prstDash val="solid"/>
           </a:ln>
           <a:effectLst>
             <a:outerShdw sx="100000" sy="100000" kx="0" ky="0" algn="bl" rotWithShape="0" blurRad="127000" dist="50800" dir="2700000">
-              <a:srgbClr val="000000">
-                <a:alpha val="50000"/>
+              <a:srgbClr val="9E9488">
+                <a:alpha val="15000"/>
               </a:srgbClr>
             </a:outerShdw>
           </a:effectLst>
@@ -13189,11 +13243,11 @@
             </a:avLst>
           </a:prstGeom>
           <a:solidFill>
-            <a:srgbClr val="1C2128"/>
+            <a:srgbClr val="ECE6DD"/>
           </a:solidFill>
           <a:ln w="6350">
             <a:solidFill>
-              <a:srgbClr val="30363D"/>
+              <a:srgbClr val="D6CCBF"/>
             </a:solidFill>
             <a:prstDash val="solid"/>
           </a:ln>
@@ -13226,7 +13280,7 @@
             <a:r>
               <a:rPr lang="en-US" sz="800" b="1" dirty="0">
                 <a:solidFill>
-                  <a:srgbClr val="8B949E"/>
+                  <a:srgbClr val="8A8078"/>
                 </a:solidFill>
                 <a:latin typeface="Consolas" pitchFamily="34" charset="0"/>
                 <a:ea typeface="Consolas" pitchFamily="34" charset="-122"/>
@@ -13268,7 +13322,7 @@
             <a:r>
               <a:rPr lang="en-US" sz="950" dirty="0">
                 <a:solidFill>
-                  <a:srgbClr val="E6EDF3"/>
+                  <a:srgbClr val="2D2926"/>
                 </a:solidFill>
                 <a:latin typeface="Consolas" pitchFamily="34" charset="0"/>
                 <a:ea typeface="Consolas" pitchFamily="34" charset="-122"/>
@@ -13288,7 +13342,7 @@
             <a:r>
               <a:rPr lang="en-US" sz="950" dirty="0">
                 <a:solidFill>
-                  <a:srgbClr val="E6EDF3"/>
+                  <a:srgbClr val="2D2926"/>
                 </a:solidFill>
                 <a:latin typeface="Consolas" pitchFamily="34" charset="0"/>
                 <a:ea typeface="Consolas" pitchFamily="34" charset="-122"/>
@@ -13308,7 +13362,7 @@
             <a:r>
               <a:rPr lang="en-US" sz="950" dirty="0">
                 <a:solidFill>
-                  <a:srgbClr val="E6EDF3"/>
+                  <a:srgbClr val="2D2926"/>
                 </a:solidFill>
                 <a:latin typeface="Consolas" pitchFamily="34" charset="0"/>
                 <a:ea typeface="Consolas" pitchFamily="34" charset="-122"/>
@@ -13328,13 +13382,13 @@
             <a:r>
               <a:rPr lang="en-US" sz="950" dirty="0">
                 <a:solidFill>
-                  <a:srgbClr val="E6EDF3"/>
+                  <a:srgbClr val="2D2926"/>
                 </a:solidFill>
                 <a:latin typeface="Consolas" pitchFamily="34" charset="0"/>
                 <a:ea typeface="Consolas" pitchFamily="34" charset="-122"/>
                 <a:cs typeface="Consolas" pitchFamily="34" charset="-120"/>
               </a:rPr>
-              <a:t>- Impact: 全球 23% 用戶無法登入</a:t>
+              <a:t>- Impact: 23% of global users unable to log in</a:t>
             </a:r>
             <a:endParaRPr lang="en-US" sz="950" dirty="0"/>
           </a:p>
@@ -13348,7 +13402,7 @@
             <a:r>
               <a:rPr lang="en-US" sz="950" dirty="0">
                 <a:solidFill>
-                  <a:srgbClr val="E6EDF3"/>
+                  <a:srgbClr val="2D2926"/>
                 </a:solidFill>
                 <a:latin typeface="Consolas" pitchFamily="34" charset="0"/>
                 <a:ea typeface="Consolas" pitchFamily="34" charset="-122"/>
@@ -13377,7 +13431,7 @@
             <a:r>
               <a:rPr lang="en-US" sz="950" dirty="0">
                 <a:solidFill>
-                  <a:srgbClr val="E6EDF3"/>
+                  <a:srgbClr val="2D2926"/>
                 </a:solidFill>
                 <a:latin typeface="Consolas" pitchFamily="34" charset="0"/>
                 <a:ea typeface="Consolas" pitchFamily="34" charset="-122"/>
@@ -13397,7 +13451,7 @@
             <a:r>
               <a:rPr lang="en-US" sz="950" dirty="0">
                 <a:solidFill>
-                  <a:srgbClr val="E6EDF3"/>
+                  <a:srgbClr val="2D2926"/>
                 </a:solidFill>
                 <a:latin typeface="Consolas" pitchFamily="34" charset="0"/>
                 <a:ea typeface="Consolas" pitchFamily="34" charset="-122"/>
@@ -13417,7 +13471,7 @@
             <a:r>
               <a:rPr lang="en-US" sz="950" dirty="0">
                 <a:solidFill>
-                  <a:srgbClr val="E6EDF3"/>
+                  <a:srgbClr val="2D2926"/>
                 </a:solidFill>
                 <a:latin typeface="Consolas" pitchFamily="34" charset="0"/>
                 <a:ea typeface="Consolas" pitchFamily="34" charset="-122"/>
@@ -13437,7 +13491,7 @@
             <a:r>
               <a:rPr lang="en-US" sz="950" dirty="0">
                 <a:solidFill>
-                  <a:srgbClr val="E6EDF3"/>
+                  <a:srgbClr val="2D2926"/>
                 </a:solidFill>
                 <a:latin typeface="Consolas" pitchFamily="34" charset="0"/>
                 <a:ea typeface="Consolas" pitchFamily="34" charset="-122"/>
@@ -13457,7 +13511,7 @@
             <a:r>
               <a:rPr lang="en-US" sz="950" dirty="0">
                 <a:solidFill>
-                  <a:srgbClr val="E6EDF3"/>
+                  <a:srgbClr val="2D2926"/>
                 </a:solidFill>
                 <a:latin typeface="Consolas" pitchFamily="34" charset="0"/>
                 <a:ea typeface="Consolas" pitchFamily="34" charset="-122"/>
@@ -13486,7 +13540,7 @@
             <a:r>
               <a:rPr lang="en-US" sz="950" dirty="0">
                 <a:solidFill>
-                  <a:srgbClr val="E6EDF3"/>
+                  <a:srgbClr val="2D2926"/>
                 </a:solidFill>
                 <a:latin typeface="Consolas" pitchFamily="34" charset="0"/>
                 <a:ea typeface="Consolas" pitchFamily="34" charset="-122"/>
@@ -13506,13 +13560,13 @@
             <a:r>
               <a:rPr lang="en-US" sz="950" dirty="0">
                 <a:solidFill>
-                  <a:srgbClr val="E6EDF3"/>
+                  <a:srgbClr val="2D2926"/>
                 </a:solidFill>
                 <a:latin typeface="Consolas" pitchFamily="34" charset="0"/>
                 <a:ea typeface="Consolas" pitchFamily="34" charset="-122"/>
                 <a:cs typeface="Consolas" pitchFamily="34" charset="-120"/>
               </a:rPr>
-              <a:t>DB migration script 鎖住了 users table</a:t>
+              <a:t>DB migration script locked the users table</a:t>
             </a:r>
             <a:endParaRPr lang="en-US" sz="950" dirty="0"/>
           </a:p>
@@ -13526,13 +13580,13 @@
             <a:r>
               <a:rPr lang="en-US" sz="950" dirty="0">
                 <a:solidFill>
-                  <a:srgbClr val="E6EDF3"/>
+                  <a:srgbClr val="2D2926"/>
                 </a:solidFill>
                 <a:latin typeface="Consolas" pitchFamily="34" charset="0"/>
                 <a:ea typeface="Consolas" pitchFamily="34" charset="-122"/>
                 <a:cs typeface="Consolas" pitchFamily="34" charset="-120"/>
               </a:rPr>
-              <a:t>導致所有登入請求 timeout</a:t>
+              <a:t>causing all login requests to timeout</a:t>
             </a:r>
             <a:endParaRPr lang="en-US" sz="950" dirty="0"/>
           </a:p>
@@ -13555,7 +13609,7 @@
             <a:r>
               <a:rPr lang="en-US" sz="950" dirty="0">
                 <a:solidFill>
-                  <a:srgbClr val="E6EDF3"/>
+                  <a:srgbClr val="2D2926"/>
                 </a:solidFill>
                 <a:latin typeface="Consolas" pitchFamily="34" charset="0"/>
                 <a:ea typeface="Consolas" pitchFamily="34" charset="-122"/>
@@ -13575,13 +13629,13 @@
             <a:r>
               <a:rPr lang="en-US" sz="950" dirty="0">
                 <a:solidFill>
-                  <a:srgbClr val="E6EDF3"/>
+                  <a:srgbClr val="2D2926"/>
                 </a:solidFill>
                 <a:latin typeface="Consolas" pitchFamily="34" charset="0"/>
                 <a:ea typeface="Consolas" pitchFamily="34" charset="-122"/>
                 <a:cs typeface="Consolas" pitchFamily="34" charset="-120"/>
               </a:rPr>
-              <a:t>[ ] 加入 DB migration smoke test</a:t>
+              <a:t>[ ] Add DB migration smoke test</a:t>
             </a:r>
             <a:endParaRPr lang="en-US" sz="950" dirty="0"/>
           </a:p>
@@ -13595,13 +13649,13 @@
             <a:r>
               <a:rPr lang="en-US" sz="950" dirty="0">
                 <a:solidFill>
-                  <a:srgbClr val="E6EDF3"/>
+                  <a:srgbClr val="2D2926"/>
                 </a:solidFill>
                 <a:latin typeface="Consolas" pitchFamily="34" charset="0"/>
                 <a:ea typeface="Consolas" pitchFamily="34" charset="-122"/>
                 <a:cs typeface="Consolas" pitchFamily="34" charset="-120"/>
               </a:rPr>
-              <a:t>[ ] Migration 改在 Maintenance window</a:t>
+              <a:t>[ ] Schedule migrations during maintenance window</a:t>
             </a:r>
             <a:endParaRPr lang="en-US" sz="950" dirty="0"/>
           </a:p>
@@ -13615,13 +13669,13 @@
             <a:r>
               <a:rPr lang="en-US" sz="950" dirty="0">
                 <a:solidFill>
-                  <a:srgbClr val="E6EDF3"/>
+                  <a:srgbClr val="2D2926"/>
                 </a:solidFill>
                 <a:latin typeface="Consolas" pitchFamily="34" charset="0"/>
                 <a:ea typeface="Consolas" pitchFamily="34" charset="-122"/>
                 <a:cs typeface="Consolas" pitchFamily="34" charset="-120"/>
               </a:rPr>
-              <a:t>[ ] 改善 Rollback SOP</a:t>
+              <a:t>[ ] Improve rollback SOP</a:t>
             </a:r>
             <a:endParaRPr lang="en-US" sz="950" dirty="0"/>
           </a:p>
@@ -13641,7 +13695,7 @@
     <p:bg>
       <p:bgPr>
         <a:solidFill>
-          <a:srgbClr val="0D1117"/>
+          <a:srgbClr val="FFFDF8"/>
         </a:solidFill>
       </p:bgPr>
     </p:bg>
@@ -13674,11 +13728,11 @@
             <a:avLst/>
           </a:prstGeom>
           <a:solidFill>
-            <a:srgbClr val="161B22"/>
+            <a:srgbClr val="F5F1EB"/>
           </a:solidFill>
           <a:ln w="6350">
             <a:solidFill>
-              <a:srgbClr val="30363D"/>
+              <a:srgbClr val="D6CCBF"/>
             </a:solidFill>
             <a:prstDash val="solid"/>
           </a:ln>
@@ -13699,11 +13753,11 @@
             <a:avLst/>
           </a:prstGeom>
           <a:solidFill>
-            <a:srgbClr val="58A6FF"/>
+            <a:srgbClr val="4A7FB5"/>
           </a:solidFill>
           <a:ln w="12700">
             <a:solidFill>
-              <a:srgbClr val="58A6FF"/>
+              <a:srgbClr val="4A7FB5"/>
             </a:solidFill>
             <a:prstDash val="solid"/>
           </a:ln>
@@ -13736,13 +13790,13 @@
             <a:r>
               <a:rPr lang="en-US" sz="1600" b="1" dirty="0">
                 <a:solidFill>
-                  <a:srgbClr val="E6EDF3"/>
-                </a:solidFill>
-                <a:latin typeface="Calibri" pitchFamily="34" charset="0"/>
-                <a:ea typeface="Calibri" pitchFamily="34" charset="-122"/>
-                <a:cs typeface="Calibri" pitchFamily="34" charset="-120"/>
-              </a:rPr>
-              <a:t>課程總結：你現在已經了解真實世界的部署</a:t>
+                  <a:srgbClr val="2D2926"/>
+                </a:solidFill>
+                <a:latin typeface="Calibri" pitchFamily="34" charset="0"/>
+                <a:ea typeface="Calibri" pitchFamily="34" charset="-122"/>
+                <a:cs typeface="Calibri" pitchFamily="34" charset="-120"/>
+              </a:rPr>
+              <a:t>Course Summary: You Now Understand Real-World Deployment</a:t>
             </a:r>
             <a:endParaRPr lang="en-US" sz="1600" dirty="0"/>
           </a:p>
@@ -13775,13 +13829,13 @@
             <a:r>
               <a:rPr lang="en-US" sz="850" dirty="0">
                 <a:solidFill>
-                  <a:srgbClr val="8B949E"/>
-                </a:solidFill>
-                <a:latin typeface="Calibri" pitchFamily="34" charset="0"/>
-                <a:ea typeface="Calibri" pitchFamily="34" charset="-122"/>
-                <a:cs typeface="Calibri" pitchFamily="34" charset="-120"/>
-              </a:rPr>
-              <a:t>COURSE SUMMARY  ·  50 / 50</a:t>
+                  <a:srgbClr val="8A8078"/>
+                </a:solidFill>
+                <a:latin typeface="Calibri" pitchFamily="34" charset="0"/>
+                <a:ea typeface="Calibri" pitchFamily="34" charset="-122"/>
+                <a:cs typeface="Calibri" pitchFamily="34" charset="-120"/>
+              </a:rPr>
+              <a:t>COURSE SUMMARY</a:t>
             </a:r>
             <a:endParaRPr lang="en-US" sz="850" dirty="0"/>
           </a:p>
@@ -13804,11 +13858,11 @@
             </a:avLst>
           </a:prstGeom>
           <a:solidFill>
-            <a:srgbClr val="161B22"/>
+            <a:srgbClr val="F5F1EB"/>
           </a:solidFill>
           <a:ln w="19050">
             <a:solidFill>
-              <a:srgbClr val="1F6FEB"/>
+              <a:srgbClr val="5B8DB8"/>
             </a:solidFill>
             <a:prstDash val="solid"/>
           </a:ln>
@@ -13841,7 +13895,7 @@
             <a:r>
               <a:rPr lang="en-US" sz="900" b="1" dirty="0">
                 <a:solidFill>
-                  <a:srgbClr val="58A6FF"/>
+                  <a:srgbClr val="4A7FB5"/>
                 </a:solidFill>
                 <a:latin typeface="Calibri" pitchFamily="34" charset="0"/>
                 <a:ea typeface="Calibri" pitchFamily="34" charset="-122"/>
@@ -13880,7 +13934,7 @@
             <a:r>
               <a:rPr lang="en-US" sz="2000" dirty="0">
                 <a:solidFill>
-                  <a:srgbClr val="E6EDF3"/>
+                  <a:srgbClr val="2D2926"/>
                 </a:solidFill>
                 <a:latin typeface="Calibri" pitchFamily="34" charset="0"/>
                 <a:ea typeface="Calibri" pitchFamily="34" charset="-122"/>
@@ -13919,13 +13973,13 @@
             <a:r>
               <a:rPr lang="en-US" sz="1000" b="1" dirty="0">
                 <a:solidFill>
-                  <a:srgbClr val="E6EDF3"/>
-                </a:solidFill>
-                <a:latin typeface="Calibri" pitchFamily="34" charset="0"/>
-                <a:ea typeface="Calibri" pitchFamily="34" charset="-122"/>
-                <a:cs typeface="Calibri" pitchFamily="34" charset="-120"/>
-              </a:rPr>
-              <a:t>傳統部署</a:t>
+                  <a:srgbClr val="2D2926"/>
+                </a:solidFill>
+                <a:latin typeface="Calibri" pitchFamily="34" charset="0"/>
+                <a:ea typeface="Calibri" pitchFamily="34" charset="-122"/>
+                <a:cs typeface="Calibri" pitchFamily="34" charset="-120"/>
+              </a:rPr>
+              <a:t>Traditional Deploy</a:t>
             </a:r>
             <a:endParaRPr lang="en-US" sz="1000" dirty="0"/>
           </a:p>
@@ -13958,13 +14012,13 @@
             <a:r>
               <a:rPr lang="en-US" sz="800" dirty="0">
                 <a:solidFill>
-                  <a:srgbClr val="8B949E"/>
-                </a:solidFill>
-                <a:latin typeface="Calibri" pitchFamily="34" charset="0"/>
-                <a:ea typeface="Calibri" pitchFamily="34" charset="-122"/>
-                <a:cs typeface="Calibri" pitchFamily="34" charset="-120"/>
-              </a:rPr>
-              <a:t>單機→拆分→三層</a:t>
+                  <a:srgbClr val="8A8078"/>
+                </a:solidFill>
+                <a:latin typeface="Calibri" pitchFamily="34" charset="0"/>
+                <a:ea typeface="Calibri" pitchFamily="34" charset="-122"/>
+                <a:cs typeface="Calibri" pitchFamily="34" charset="-120"/>
+              </a:rPr>
+              <a:t>Single→Split→3-Tier</a:t>
             </a:r>
             <a:endParaRPr lang="en-US" sz="800" dirty="0"/>
           </a:p>
@@ -13987,11 +14041,11 @@
             </a:avLst>
           </a:prstGeom>
           <a:solidFill>
-            <a:srgbClr val="161B22"/>
+            <a:srgbClr val="F5F1EB"/>
           </a:solidFill>
           <a:ln w="19050">
             <a:solidFill>
-              <a:srgbClr val="6E40C9"/>
+              <a:srgbClr val="8B6AB5"/>
             </a:solidFill>
             <a:prstDash val="solid"/>
           </a:ln>
@@ -14024,7 +14078,7 @@
             <a:r>
               <a:rPr lang="en-US" sz="900" b="1" dirty="0">
                 <a:solidFill>
-                  <a:srgbClr val="58A6FF"/>
+                  <a:srgbClr val="4A7FB5"/>
                 </a:solidFill>
                 <a:latin typeface="Calibri" pitchFamily="34" charset="0"/>
                 <a:ea typeface="Calibri" pitchFamily="34" charset="-122"/>
@@ -14063,7 +14117,7 @@
             <a:r>
               <a:rPr lang="en-US" sz="2000" dirty="0">
                 <a:solidFill>
-                  <a:srgbClr val="E6EDF3"/>
+                  <a:srgbClr val="2D2926"/>
                 </a:solidFill>
                 <a:latin typeface="Calibri" pitchFamily="34" charset="0"/>
                 <a:ea typeface="Calibri" pitchFamily="34" charset="-122"/>
@@ -14102,7 +14156,7 @@
             <a:r>
               <a:rPr lang="en-US" sz="1000" b="1" dirty="0">
                 <a:solidFill>
-                  <a:srgbClr val="E6EDF3"/>
+                  <a:srgbClr val="2D2926"/>
                 </a:solidFill>
                 <a:latin typeface="Calibri" pitchFamily="34" charset="0"/>
                 <a:ea typeface="Calibri" pitchFamily="34" charset="-122"/>
@@ -14141,7 +14195,7 @@
             <a:r>
               <a:rPr lang="en-US" sz="800" dirty="0">
                 <a:solidFill>
-                  <a:srgbClr val="8B949E"/>
+                  <a:srgbClr val="8A8078"/>
                 </a:solidFill>
                 <a:latin typeface="Calibri" pitchFamily="34" charset="0"/>
                 <a:ea typeface="Calibri" pitchFamily="34" charset="-122"/>
@@ -14170,11 +14224,11 @@
             </a:avLst>
           </a:prstGeom>
           <a:solidFill>
-            <a:srgbClr val="161B22"/>
+            <a:srgbClr val="F5F1EB"/>
           </a:solidFill>
           <a:ln w="19050">
             <a:solidFill>
-              <a:srgbClr val="0D8A6C"/>
+              <a:srgbClr val="4A9B8E"/>
             </a:solidFill>
             <a:prstDash val="solid"/>
           </a:ln>
@@ -14207,7 +14261,7 @@
             <a:r>
               <a:rPr lang="en-US" sz="900" b="1" dirty="0">
                 <a:solidFill>
-                  <a:srgbClr val="58A6FF"/>
+                  <a:srgbClr val="4A7FB5"/>
                 </a:solidFill>
                 <a:latin typeface="Calibri" pitchFamily="34" charset="0"/>
                 <a:ea typeface="Calibri" pitchFamily="34" charset="-122"/>
@@ -14246,7 +14300,7 @@
             <a:r>
               <a:rPr lang="en-US" sz="2000" dirty="0">
                 <a:solidFill>
-                  <a:srgbClr val="E6EDF3"/>
+                  <a:srgbClr val="2D2926"/>
                 </a:solidFill>
                 <a:latin typeface="Calibri" pitchFamily="34" charset="0"/>
                 <a:ea typeface="Calibri" pitchFamily="34" charset="-122"/>
@@ -14285,7 +14339,7 @@
             <a:r>
               <a:rPr lang="en-US" sz="1000" b="1" dirty="0">
                 <a:solidFill>
-                  <a:srgbClr val="E6EDF3"/>
+                  <a:srgbClr val="2D2926"/>
                 </a:solidFill>
                 <a:latin typeface="Calibri" pitchFamily="34" charset="0"/>
                 <a:ea typeface="Calibri" pitchFamily="34" charset="-122"/>
@@ -14324,13 +14378,13 @@
             <a:r>
               <a:rPr lang="en-US" sz="800" dirty="0">
                 <a:solidFill>
-                  <a:srgbClr val="8B949E"/>
-                </a:solidFill>
-                <a:latin typeface="Calibri" pitchFamily="34" charset="0"/>
-                <a:ea typeface="Calibri" pitchFamily="34" charset="-122"/>
-                <a:cs typeface="Calibri" pitchFamily="34" charset="-120"/>
-              </a:rPr>
-              <a:t>一致環境</a:t>
+                  <a:srgbClr val="8A8078"/>
+                </a:solidFill>
+                <a:latin typeface="Calibri" pitchFamily="34" charset="0"/>
+                <a:ea typeface="Calibri" pitchFamily="34" charset="-122"/>
+                <a:cs typeface="Calibri" pitchFamily="34" charset="-120"/>
+              </a:rPr>
+              <a:t>Consistent Env</a:t>
             </a:r>
             <a:endParaRPr lang="en-US" sz="800" dirty="0"/>
           </a:p>
@@ -14353,11 +14407,11 @@
             </a:avLst>
           </a:prstGeom>
           <a:solidFill>
-            <a:srgbClr val="161B22"/>
+            <a:srgbClr val="F5F1EB"/>
           </a:solidFill>
           <a:ln w="19050">
             <a:solidFill>
-              <a:srgbClr val="58A6FF"/>
+              <a:srgbClr val="4A7FB5"/>
             </a:solidFill>
             <a:prstDash val="solid"/>
           </a:ln>
@@ -14390,7 +14444,7 @@
             <a:r>
               <a:rPr lang="en-US" sz="900" b="1" dirty="0">
                 <a:solidFill>
-                  <a:srgbClr val="58A6FF"/>
+                  <a:srgbClr val="4A7FB5"/>
                 </a:solidFill>
                 <a:latin typeface="Calibri" pitchFamily="34" charset="0"/>
                 <a:ea typeface="Calibri" pitchFamily="34" charset="-122"/>
@@ -14429,7 +14483,7 @@
             <a:r>
               <a:rPr lang="en-US" sz="2000" dirty="0">
                 <a:solidFill>
-                  <a:srgbClr val="E6EDF3"/>
+                  <a:srgbClr val="2D2926"/>
                 </a:solidFill>
                 <a:latin typeface="Calibri" pitchFamily="34" charset="0"/>
                 <a:ea typeface="Calibri" pitchFamily="34" charset="-122"/>
@@ -14468,7 +14522,7 @@
             <a:r>
               <a:rPr lang="en-US" sz="1000" b="1" dirty="0">
                 <a:solidFill>
-                  <a:srgbClr val="E6EDF3"/>
+                  <a:srgbClr val="2D2926"/>
                 </a:solidFill>
                 <a:latin typeface="Calibri" pitchFamily="34" charset="0"/>
                 <a:ea typeface="Calibri" pitchFamily="34" charset="-122"/>
@@ -14507,13 +14561,13 @@
             <a:r>
               <a:rPr lang="en-US" sz="800" dirty="0">
                 <a:solidFill>
-                  <a:srgbClr val="8B949E"/>
-                </a:solidFill>
-                <a:latin typeface="Calibri" pitchFamily="34" charset="0"/>
-                <a:ea typeface="Calibri" pitchFamily="34" charset="-122"/>
-                <a:cs typeface="Calibri" pitchFamily="34" charset="-120"/>
-              </a:rPr>
-              <a:t>設計原則</a:t>
+                  <a:srgbClr val="8A8078"/>
+                </a:solidFill>
+                <a:latin typeface="Calibri" pitchFamily="34" charset="0"/>
+                <a:ea typeface="Calibri" pitchFamily="34" charset="-122"/>
+                <a:cs typeface="Calibri" pitchFamily="34" charset="-120"/>
+              </a:rPr>
+              <a:t>Design Principles</a:t>
             </a:r>
             <a:endParaRPr lang="en-US" sz="800" dirty="0"/>
           </a:p>
@@ -14536,11 +14590,11 @@
             </a:avLst>
           </a:prstGeom>
           <a:solidFill>
-            <a:srgbClr val="161B22"/>
+            <a:srgbClr val="F5F1EB"/>
           </a:solidFill>
           <a:ln w="19050">
             <a:solidFill>
-              <a:srgbClr val="3FB950"/>
+              <a:srgbClr val="4A9968"/>
             </a:solidFill>
             <a:prstDash val="solid"/>
           </a:ln>
@@ -14573,7 +14627,7 @@
             <a:r>
               <a:rPr lang="en-US" sz="900" b="1" dirty="0">
                 <a:solidFill>
-                  <a:srgbClr val="58A6FF"/>
+                  <a:srgbClr val="4A7FB5"/>
                 </a:solidFill>
                 <a:latin typeface="Calibri" pitchFamily="34" charset="0"/>
                 <a:ea typeface="Calibri" pitchFamily="34" charset="-122"/>
@@ -14612,7 +14666,7 @@
             <a:r>
               <a:rPr lang="en-US" sz="2000" dirty="0">
                 <a:solidFill>
-                  <a:srgbClr val="E6EDF3"/>
+                  <a:srgbClr val="2D2926"/>
                 </a:solidFill>
                 <a:latin typeface="Calibri" pitchFamily="34" charset="0"/>
                 <a:ea typeface="Calibri" pitchFamily="34" charset="-122"/>
@@ -14651,7 +14705,7 @@
             <a:r>
               <a:rPr lang="en-US" sz="1000" b="1" dirty="0">
                 <a:solidFill>
-                  <a:srgbClr val="E6EDF3"/>
+                  <a:srgbClr val="2D2926"/>
                 </a:solidFill>
                 <a:latin typeface="Calibri" pitchFamily="34" charset="0"/>
                 <a:ea typeface="Calibri" pitchFamily="34" charset="-122"/>
@@ -14690,7 +14744,7 @@
             <a:r>
               <a:rPr lang="en-US" sz="800" dirty="0">
                 <a:solidFill>
-                  <a:srgbClr val="8B949E"/>
+                  <a:srgbClr val="8A8078"/>
                 </a:solidFill>
                 <a:latin typeface="Calibri" pitchFamily="34" charset="0"/>
                 <a:ea typeface="Calibri" pitchFamily="34" charset="-122"/>
@@ -14719,11 +14773,11 @@
             </a:avLst>
           </a:prstGeom>
           <a:solidFill>
-            <a:srgbClr val="161B22"/>
+            <a:srgbClr val="F5F1EB"/>
           </a:solidFill>
           <a:ln w="19050">
             <a:solidFill>
-              <a:srgbClr val="D29922"/>
+              <a:srgbClr val="B8892C"/>
             </a:solidFill>
             <a:prstDash val="solid"/>
           </a:ln>
@@ -14756,7 +14810,7 @@
             <a:r>
               <a:rPr lang="en-US" sz="900" b="1" dirty="0">
                 <a:solidFill>
-                  <a:srgbClr val="58A6FF"/>
+                  <a:srgbClr val="4A7FB5"/>
                 </a:solidFill>
                 <a:latin typeface="Calibri" pitchFamily="34" charset="0"/>
                 <a:ea typeface="Calibri" pitchFamily="34" charset="-122"/>
@@ -14795,7 +14849,7 @@
             <a:r>
               <a:rPr lang="en-US" sz="2000" dirty="0">
                 <a:solidFill>
-                  <a:srgbClr val="E6EDF3"/>
+                  <a:srgbClr val="2D2926"/>
                 </a:solidFill>
                 <a:latin typeface="Calibri" pitchFamily="34" charset="0"/>
                 <a:ea typeface="Calibri" pitchFamily="34" charset="-122"/>
@@ -14834,13 +14888,13 @@
             <a:r>
               <a:rPr lang="en-US" sz="1000" b="1" dirty="0">
                 <a:solidFill>
-                  <a:srgbClr val="E6EDF3"/>
-                </a:solidFill>
-                <a:latin typeface="Calibri" pitchFamily="34" charset="0"/>
-                <a:ea typeface="Calibri" pitchFamily="34" charset="-122"/>
-                <a:cs typeface="Calibri" pitchFamily="34" charset="-120"/>
-              </a:rPr>
-              <a:t>可觀測性</a:t>
+                  <a:srgbClr val="2D2926"/>
+                </a:solidFill>
+                <a:latin typeface="Calibri" pitchFamily="34" charset="0"/>
+                <a:ea typeface="Calibri" pitchFamily="34" charset="-122"/>
+                <a:cs typeface="Calibri" pitchFamily="34" charset="-120"/>
+              </a:rPr>
+              <a:t>Observability</a:t>
             </a:r>
             <a:endParaRPr lang="en-US" sz="1000" dirty="0"/>
           </a:p>
@@ -14873,7 +14927,7 @@
             <a:r>
               <a:rPr lang="en-US" sz="800" dirty="0">
                 <a:solidFill>
-                  <a:srgbClr val="8B949E"/>
+                  <a:srgbClr val="8A8078"/>
                 </a:solidFill>
                 <a:latin typeface="Calibri" pitchFamily="34" charset="0"/>
                 <a:ea typeface="Calibri" pitchFamily="34" charset="-122"/>
@@ -14902,7 +14956,7 @@
           <a:noFill/>
           <a:ln w="19050">
             <a:solidFill>
-              <a:srgbClr val="58A6FF"/>
+              <a:srgbClr val="4A7FB5"/>
             </a:solidFill>
             <a:prstDash val="solid"/>
             <a:tailEnd type="arrow"/>
@@ -14926,7 +14980,7 @@
           <a:noFill/>
           <a:ln w="19050">
             <a:solidFill>
-              <a:srgbClr val="58A6FF"/>
+              <a:srgbClr val="4A7FB5"/>
             </a:solidFill>
             <a:prstDash val="solid"/>
             <a:tailEnd type="arrow"/>
@@ -14950,7 +15004,7 @@
           <a:noFill/>
           <a:ln w="19050">
             <a:solidFill>
-              <a:srgbClr val="58A6FF"/>
+              <a:srgbClr val="4A7FB5"/>
             </a:solidFill>
             <a:prstDash val="solid"/>
             <a:tailEnd type="arrow"/>
@@ -14974,7 +15028,7 @@
           <a:noFill/>
           <a:ln w="19050">
             <a:solidFill>
-              <a:srgbClr val="58A6FF"/>
+              <a:srgbClr val="4A7FB5"/>
             </a:solidFill>
             <a:prstDash val="solid"/>
             <a:tailEnd type="arrow"/>
@@ -14998,7 +15052,7 @@
           <a:noFill/>
           <a:ln w="19050">
             <a:solidFill>
-              <a:srgbClr val="58A6FF"/>
+              <a:srgbClr val="4A7FB5"/>
             </a:solidFill>
             <a:prstDash val="solid"/>
             <a:tailEnd type="arrow"/>
@@ -15022,11 +15076,11 @@
             </a:avLst>
           </a:prstGeom>
           <a:solidFill>
-            <a:srgbClr val="161B22"/>
+            <a:srgbClr val="F5F1EB"/>
           </a:solidFill>
           <a:ln w="19050">
             <a:solidFill>
-              <a:srgbClr val="58A6FF"/>
+              <a:srgbClr val="4A7FB5"/>
             </a:solidFill>
             <a:prstDash val="solid"/>
           </a:ln>
@@ -15059,13 +15113,13 @@
             <a:r>
               <a:rPr lang="en-US" sz="1400" b="1" dirty="0">
                 <a:solidFill>
-                  <a:srgbClr val="58A6FF"/>
-                </a:solidFill>
-                <a:latin typeface="Calibri" pitchFamily="34" charset="0"/>
-                <a:ea typeface="Calibri" pitchFamily="34" charset="-122"/>
-                <a:cs typeface="Calibri" pitchFamily="34" charset="-120"/>
-              </a:rPr>
-              <a:t>🎯 核心洞察：複雜度是必然的 — 但可以被管理</a:t>
+                  <a:srgbClr val="4A7FB5"/>
+                </a:solidFill>
+                <a:latin typeface="Calibri" pitchFamily="34" charset="0"/>
+                <a:ea typeface="Calibri" pitchFamily="34" charset="-122"/>
+                <a:cs typeface="Calibri" pitchFamily="34" charset="-120"/>
+              </a:rPr>
+              <a:t>🎯 Core Insight: Complexity is inevitable — but it can be managed</a:t>
             </a:r>
             <a:endParaRPr lang="en-US" sz="1400" dirty="0"/>
           </a:p>
@@ -15098,13 +15152,13 @@
             <a:r>
               <a:rPr lang="en-US" sz="1000" dirty="0">
                 <a:solidFill>
-                  <a:srgbClr val="8B949E"/>
-                </a:solidFill>
-                <a:latin typeface="Calibri" pitchFamily="34" charset="0"/>
-                <a:ea typeface="Calibri" pitchFamily="34" charset="-122"/>
-                <a:cs typeface="Calibri" pitchFamily="34" charset="-120"/>
-              </a:rPr>
-              <a:t>Container + 12-Factor + CI/CD + Observability = 現代 Cloud Native 工程師的工具箱</a:t>
+                  <a:srgbClr val="8A8078"/>
+                </a:solidFill>
+                <a:latin typeface="Calibri" pitchFamily="34" charset="0"/>
+                <a:ea typeface="Calibri" pitchFamily="34" charset="-122"/>
+                <a:cs typeface="Calibri" pitchFamily="34" charset="-120"/>
+              </a:rPr>
+              <a:t>Container + 12-Factor + CI/CD + Observability = The Modern Cloud Native Engineer's Toolkit</a:t>
             </a:r>
             <a:endParaRPr lang="en-US" sz="1000" dirty="0"/>
           </a:p>
@@ -15127,11 +15181,11 @@
             </a:avLst>
           </a:prstGeom>
           <a:solidFill>
-            <a:srgbClr val="161B22"/>
+            <a:srgbClr val="F5F1EB"/>
           </a:solidFill>
           <a:ln w="19050">
             <a:solidFill>
-              <a:srgbClr val="1F6FEB"/>
+              <a:srgbClr val="5B8DB8"/>
             </a:solidFill>
             <a:prstDash val="solid"/>
           </a:ln>
@@ -15164,13 +15218,13 @@
             <a:r>
               <a:rPr lang="en-US" sz="1100" b="1" dirty="0">
                 <a:solidFill>
-                  <a:srgbClr val="1F6FEB"/>
-                </a:solidFill>
-                <a:latin typeface="Calibri" pitchFamily="34" charset="0"/>
-                <a:ea typeface="Calibri" pitchFamily="34" charset="-122"/>
-                <a:cs typeface="Calibri" pitchFamily="34" charset="-120"/>
-              </a:rPr>
-              <a:t>🏗️ 架構是演進的</a:t>
+                  <a:srgbClr val="5B8DB8"/>
+                </a:solidFill>
+                <a:latin typeface="Calibri" pitchFamily="34" charset="0"/>
+                <a:ea typeface="Calibri" pitchFamily="34" charset="-122"/>
+                <a:cs typeface="Calibri" pitchFamily="34" charset="-120"/>
+              </a:rPr>
+              <a:t>🏗️ Architecture Evolves</a:t>
             </a:r>
             <a:endParaRPr lang="en-US" sz="1100" dirty="0"/>
           </a:p>
@@ -15203,13 +15257,13 @@
             <a:r>
               <a:rPr lang="en-US" sz="900" dirty="0">
                 <a:solidFill>
-                  <a:srgbClr val="8B949E"/>
-                </a:solidFill>
-                <a:latin typeface="Calibri" pitchFamily="34" charset="0"/>
-                <a:ea typeface="Calibri" pitchFamily="34" charset="-122"/>
-                <a:cs typeface="Calibri" pitchFamily="34" charset="-120"/>
-              </a:rPr>
-              <a:t>從單機到分散式</a:t>
+                  <a:srgbClr val="8A8078"/>
+                </a:solidFill>
+                <a:latin typeface="Calibri" pitchFamily="34" charset="0"/>
+                <a:ea typeface="Calibri" pitchFamily="34" charset="-122"/>
+                <a:cs typeface="Calibri" pitchFamily="34" charset="-120"/>
+              </a:rPr>
+              <a:t>From monolith to distributed</a:t>
             </a:r>
             <a:endParaRPr lang="en-US" sz="900" dirty="0"/>
           </a:p>
@@ -15220,13 +15274,13 @@
             <a:r>
               <a:rPr lang="en-US" sz="900" dirty="0">
                 <a:solidFill>
-                  <a:srgbClr val="8B949E"/>
-                </a:solidFill>
-                <a:latin typeface="Calibri" pitchFamily="34" charset="0"/>
-                <a:ea typeface="Calibri" pitchFamily="34" charset="-122"/>
-                <a:cs typeface="Calibri" pitchFamily="34" charset="-120"/>
-              </a:rPr>
-              <a:t>每一步都有原因</a:t>
+                  <a:srgbClr val="8A8078"/>
+                </a:solidFill>
+                <a:latin typeface="Calibri" pitchFamily="34" charset="0"/>
+                <a:ea typeface="Calibri" pitchFamily="34" charset="-122"/>
+                <a:cs typeface="Calibri" pitchFamily="34" charset="-120"/>
+              </a:rPr>
+              <a:t>Every step has a reason</a:t>
             </a:r>
             <a:endParaRPr lang="en-US" sz="900" dirty="0"/>
           </a:p>
@@ -15237,13 +15291,13 @@
             <a:r>
               <a:rPr lang="en-US" sz="900" dirty="0">
                 <a:solidFill>
-                  <a:srgbClr val="8B949E"/>
-                </a:solidFill>
-                <a:latin typeface="Calibri" pitchFamily="34" charset="0"/>
-                <a:ea typeface="Calibri" pitchFamily="34" charset="-122"/>
-                <a:cs typeface="Calibri" pitchFamily="34" charset="-120"/>
-              </a:rPr>
-              <a:t>不要過度設計</a:t>
+                  <a:srgbClr val="8A8078"/>
+                </a:solidFill>
+                <a:latin typeface="Calibri" pitchFamily="34" charset="0"/>
+                <a:ea typeface="Calibri" pitchFamily="34" charset="-122"/>
+                <a:cs typeface="Calibri" pitchFamily="34" charset="-120"/>
+              </a:rPr>
+              <a:t>Don't over-engineer</a:t>
             </a:r>
             <a:endParaRPr lang="en-US" sz="900" dirty="0"/>
           </a:p>
@@ -15266,11 +15320,11 @@
             </a:avLst>
           </a:prstGeom>
           <a:solidFill>
-            <a:srgbClr val="161B22"/>
+            <a:srgbClr val="F5F1EB"/>
           </a:solidFill>
           <a:ln w="19050">
             <a:solidFill>
-              <a:srgbClr val="0D8A6C"/>
+              <a:srgbClr val="4A9B8E"/>
             </a:solidFill>
             <a:prstDash val="solid"/>
           </a:ln>
@@ -15303,13 +15357,13 @@
             <a:r>
               <a:rPr lang="en-US" sz="1100" b="1" dirty="0">
                 <a:solidFill>
-                  <a:srgbClr val="0D8A6C"/>
-                </a:solidFill>
-                <a:latin typeface="Calibri" pitchFamily="34" charset="0"/>
-                <a:ea typeface="Calibri" pitchFamily="34" charset="-122"/>
-                <a:cs typeface="Calibri" pitchFamily="34" charset="-120"/>
-              </a:rPr>
-              <a:t>🐳 Container 是基石</a:t>
+                  <a:srgbClr val="4A9B8E"/>
+                </a:solidFill>
+                <a:latin typeface="Calibri" pitchFamily="34" charset="0"/>
+                <a:ea typeface="Calibri" pitchFamily="34" charset="-122"/>
+                <a:cs typeface="Calibri" pitchFamily="34" charset="-120"/>
+              </a:rPr>
+              <a:t>🐳 Containers Are the Foundation</a:t>
             </a:r>
             <a:endParaRPr lang="en-US" sz="1100" dirty="0"/>
           </a:p>
@@ -15342,13 +15396,13 @@
             <a:r>
               <a:rPr lang="en-US" sz="900" dirty="0">
                 <a:solidFill>
-                  <a:srgbClr val="8B949E"/>
-                </a:solidFill>
-                <a:latin typeface="Calibri" pitchFamily="34" charset="0"/>
-                <a:ea typeface="Calibri" pitchFamily="34" charset="-122"/>
-                <a:cs typeface="Calibri" pitchFamily="34" charset="-120"/>
-              </a:rPr>
-              <a:t>環境一致 + 版本管理</a:t>
+                  <a:srgbClr val="8A8078"/>
+                </a:solidFill>
+                <a:latin typeface="Calibri" pitchFamily="34" charset="0"/>
+                <a:ea typeface="Calibri" pitchFamily="34" charset="-122"/>
+                <a:cs typeface="Calibri" pitchFamily="34" charset="-120"/>
+              </a:rPr>
+              <a:t>Consistent environments + Versioning</a:t>
             </a:r>
             <a:endParaRPr lang="en-US" sz="900" dirty="0"/>
           </a:p>
@@ -15359,13 +15413,13 @@
             <a:r>
               <a:rPr lang="en-US" sz="900" dirty="0">
                 <a:solidFill>
-                  <a:srgbClr val="8B949E"/>
-                </a:solidFill>
-                <a:latin typeface="Calibri" pitchFamily="34" charset="0"/>
-                <a:ea typeface="Calibri" pitchFamily="34" charset="-122"/>
-                <a:cs typeface="Calibri" pitchFamily="34" charset="-120"/>
-              </a:rPr>
-              <a:t>現代部署的最小單位</a:t>
+                  <a:srgbClr val="8A8078"/>
+                </a:solidFill>
+                <a:latin typeface="Calibri" pitchFamily="34" charset="0"/>
+                <a:ea typeface="Calibri" pitchFamily="34" charset="-122"/>
+                <a:cs typeface="Calibri" pitchFamily="34" charset="-120"/>
+              </a:rPr>
+              <a:t>The smallest unit of modern deployment</a:t>
             </a:r>
             <a:endParaRPr lang="en-US" sz="900" dirty="0"/>
           </a:p>
@@ -15376,13 +15430,13 @@
             <a:r>
               <a:rPr lang="en-US" sz="900" dirty="0">
                 <a:solidFill>
-                  <a:srgbClr val="8B949E"/>
-                </a:solidFill>
-                <a:latin typeface="Calibri" pitchFamily="34" charset="0"/>
-                <a:ea typeface="Calibri" pitchFamily="34" charset="-122"/>
-                <a:cs typeface="Calibri" pitchFamily="34" charset="-120"/>
-              </a:rPr>
-              <a:t>學會用好 Docker</a:t>
+                  <a:srgbClr val="8A8078"/>
+                </a:solidFill>
+                <a:latin typeface="Calibri" pitchFamily="34" charset="0"/>
+                <a:ea typeface="Calibri" pitchFamily="34" charset="-122"/>
+                <a:cs typeface="Calibri" pitchFamily="34" charset="-120"/>
+              </a:rPr>
+              <a:t>Master Docker well</a:t>
             </a:r>
             <a:endParaRPr lang="en-US" sz="900" dirty="0"/>
           </a:p>
@@ -15405,11 +15459,11 @@
             </a:avLst>
           </a:prstGeom>
           <a:solidFill>
-            <a:srgbClr val="161B22"/>
+            <a:srgbClr val="F5F1EB"/>
           </a:solidFill>
           <a:ln w="19050">
             <a:solidFill>
-              <a:srgbClr val="3FB950"/>
+              <a:srgbClr val="4A9968"/>
             </a:solidFill>
             <a:prstDash val="solid"/>
           </a:ln>
@@ -15442,13 +15496,13 @@
             <a:r>
               <a:rPr lang="en-US" sz="1100" b="1" dirty="0">
                 <a:solidFill>
-                  <a:srgbClr val="3FB950"/>
-                </a:solidFill>
-                <a:latin typeface="Calibri" pitchFamily="34" charset="0"/>
-                <a:ea typeface="Calibri" pitchFamily="34" charset="-122"/>
-                <a:cs typeface="Calibri" pitchFamily="34" charset="-120"/>
-              </a:rPr>
-              <a:t>📊 數字說話</a:t>
+                  <a:srgbClr val="4A9968"/>
+                </a:solidFill>
+                <a:latin typeface="Calibri" pitchFamily="34" charset="0"/>
+                <a:ea typeface="Calibri" pitchFamily="34" charset="-122"/>
+                <a:cs typeface="Calibri" pitchFamily="34" charset="-120"/>
+              </a:rPr>
+              <a:t>📊 Let Data Decide</a:t>
             </a:r>
             <a:endParaRPr lang="en-US" sz="1100" dirty="0"/>
           </a:p>
@@ -15481,7 +15535,7 @@
             <a:r>
               <a:rPr lang="en-US" sz="900" dirty="0">
                 <a:solidFill>
-                  <a:srgbClr val="8B949E"/>
+                  <a:srgbClr val="8A8078"/>
                 </a:solidFill>
                 <a:latin typeface="Calibri" pitchFamily="34" charset="0"/>
                 <a:ea typeface="Calibri" pitchFamily="34" charset="-122"/>
@@ -15498,13 +15552,13 @@
             <a:r>
               <a:rPr lang="en-US" sz="900" dirty="0">
                 <a:solidFill>
-                  <a:srgbClr val="8B949E"/>
-                </a:solidFill>
-                <a:latin typeface="Calibri" pitchFamily="34" charset="0"/>
-                <a:ea typeface="Calibri" pitchFamily="34" charset="-122"/>
-                <a:cs typeface="Calibri" pitchFamily="34" charset="-120"/>
-              </a:rPr>
-              <a:t>用指標驅動改善</a:t>
+                  <a:srgbClr val="8A8078"/>
+                </a:solidFill>
+                <a:latin typeface="Calibri" pitchFamily="34" charset="0"/>
+                <a:ea typeface="Calibri" pitchFamily="34" charset="-122"/>
+                <a:cs typeface="Calibri" pitchFamily="34" charset="-120"/>
+              </a:rPr>
+              <a:t>Drive improvement with metrics</a:t>
             </a:r>
             <a:endParaRPr lang="en-US" sz="900" dirty="0"/>
           </a:p>
@@ -15515,13 +15569,13 @@
             <a:r>
               <a:rPr lang="en-US" sz="900" dirty="0">
                 <a:solidFill>
-                  <a:srgbClr val="8B949E"/>
-                </a:solidFill>
-                <a:latin typeface="Calibri" pitchFamily="34" charset="0"/>
-                <a:ea typeface="Calibri" pitchFamily="34" charset="-122"/>
-                <a:cs typeface="Calibri" pitchFamily="34" charset="-120"/>
-              </a:rPr>
-              <a:t>不靠感覺做決策</a:t>
+                  <a:srgbClr val="8A8078"/>
+                </a:solidFill>
+                <a:latin typeface="Calibri" pitchFamily="34" charset="0"/>
+                <a:ea typeface="Calibri" pitchFamily="34" charset="-122"/>
+                <a:cs typeface="Calibri" pitchFamily="34" charset="-120"/>
+              </a:rPr>
+              <a:t>Don't rely on gut feelings</a:t>
             </a:r>
             <a:endParaRPr lang="en-US" sz="900" dirty="0"/>
           </a:p>
